--- a/Presentation.pptx
+++ b/Presentation.pptx
@@ -16,9 +16,9 @@
     <p:sldId id="276" r:id="rId4"/>
     <p:sldId id="323" r:id="rId5"/>
     <p:sldId id="297" r:id="rId6"/>
-    <p:sldId id="302" r:id="rId7"/>
-    <p:sldId id="296" r:id="rId8"/>
-    <p:sldId id="295" r:id="rId9"/>
+    <p:sldId id="295" r:id="rId7"/>
+    <p:sldId id="302" r:id="rId8"/>
+    <p:sldId id="296" r:id="rId9"/>
     <p:sldId id="267" r:id="rId10"/>
     <p:sldId id="287" r:id="rId11"/>
     <p:sldId id="275" r:id="rId12"/>
@@ -38,9 +38,9 @@
     <p:sldId id="285" r:id="rId26"/>
     <p:sldId id="307" r:id="rId27"/>
     <p:sldId id="320" r:id="rId28"/>
-    <p:sldId id="322" r:id="rId29"/>
-    <p:sldId id="286" r:id="rId30"/>
-    <p:sldId id="292" r:id="rId31"/>
+    <p:sldId id="286" r:id="rId29"/>
+    <p:sldId id="292" r:id="rId30"/>
+    <p:sldId id="322" r:id="rId31"/>
     <p:sldId id="290" r:id="rId32"/>
     <p:sldId id="314" r:id="rId33"/>
     <p:sldId id="291" r:id="rId34"/>
@@ -257,7 +257,7 @@
             <a:pPr rtl="0"/>
             <a:fld id="{43367168-A7C3-4A51-ACFE-4D76B720982F}" type="datetime1">
               <a:rPr lang="fr-FR" smtClean="0"/>
-              <a:t>07/09/2026</a:t>
+              <a:t>15/09/2026</a:t>
             </a:fld>
             <a:endParaRPr lang="fr-FR"/>
           </a:p>
@@ -439,7 +439,7 @@
             <a:pPr rtl="0"/>
             <a:fld id="{CB4F1169-1988-463B-A52C-EF5C9A50040C}" type="datetime1">
               <a:rPr lang="fr-FR" noProof="0" smtClean="0"/>
-              <a:t>07/09/2026</a:t>
+              <a:t>15/09/2026</a:t>
             </a:fld>
             <a:endParaRPr lang="fr-FR" noProof="0"/>
           </a:p>
@@ -825,6 +825,107 @@
   <p:cSld>
     <p:spTree>
       <p:nvGrpSpPr>
+        <p:cNvPr id="1" name=""/>
+        <p:cNvGrpSpPr/>
+        <p:nvPr/>
+      </p:nvGrpSpPr>
+      <p:grpSpPr>
+        <a:xfrm>
+          <a:off x="0" y="0"/>
+          <a:ext cx="0" cy="0"/>
+          <a:chOff x="0" y="0"/>
+          <a:chExt cx="0" cy="0"/>
+        </a:xfrm>
+      </p:grpSpPr>
+      <p:sp>
+        <p:nvSpPr>
+          <p:cNvPr id="2" name="Espace réservé de l'image des diapositives 1"/>
+          <p:cNvSpPr>
+            <a:spLocks noGrp="1" noRot="1" noChangeAspect="1"/>
+          </p:cNvSpPr>
+          <p:nvPr>
+            <p:ph type="sldImg"/>
+          </p:nvPr>
+        </p:nvSpPr>
+        <p:spPr/>
+        <p:txBody>
+          <a:bodyPr/>
+          <a:lstStyle/>
+          <a:p>
+            <a:endParaRPr lang="fr-FR"/>
+          </a:p>
+        </p:txBody>
+      </p:sp>
+      <p:sp>
+        <p:nvSpPr>
+          <p:cNvPr id="3" name="Espace réservé des notes 2"/>
+          <p:cNvSpPr>
+            <a:spLocks noGrp="1"/>
+          </p:cNvSpPr>
+          <p:nvPr>
+            <p:ph type="body" idx="1"/>
+          </p:nvPr>
+        </p:nvSpPr>
+        <p:spPr/>
+        <p:txBody>
+          <a:bodyPr/>
+          <a:lstStyle/>
+          <a:p>
+            <a:r>
+              <a:rPr lang="fr-FR" dirty="0"/>
+              <a:t>Identifiants</a:t>
+            </a:r>
+          </a:p>
+          <a:p>
+            <a:r>
+              <a:rPr lang="fr-FR" dirty="0"/>
+              <a:t>Valeurs fixes</a:t>
+            </a:r>
+          </a:p>
+        </p:txBody>
+      </p:sp>
+      <p:sp>
+        <p:nvSpPr>
+          <p:cNvPr id="4" name="Espace réservé du numéro de diapositive 3"/>
+          <p:cNvSpPr>
+            <a:spLocks noGrp="1"/>
+          </p:cNvSpPr>
+          <p:nvPr>
+            <p:ph type="sldNum" sz="quarter" idx="5"/>
+          </p:nvPr>
+        </p:nvSpPr>
+        <p:spPr/>
+        <p:txBody>
+          <a:bodyPr/>
+          <a:lstStyle/>
+          <a:p>
+            <a:pPr rtl="0"/>
+            <a:fld id="{C6B3AB32-59DF-41F1-9618-EDFBF5049629}" type="slidenum">
+              <a:rPr lang="fr-FR" noProof="0" smtClean="0"/>
+              <a:t>10</a:t>
+            </a:fld>
+            <a:endParaRPr lang="fr-FR" noProof="0"/>
+          </a:p>
+        </p:txBody>
+      </p:sp>
+    </p:spTree>
+    <p:extLst>
+      <p:ext uri="{BB962C8B-B14F-4D97-AF65-F5344CB8AC3E}">
+        <p14:creationId xmlns:p14="http://schemas.microsoft.com/office/powerpoint/2010/main" val="1363216828"/>
+      </p:ext>
+    </p:extLst>
+  </p:cSld>
+  <p:clrMapOvr>
+    <a:masterClrMapping/>
+  </p:clrMapOvr>
+</p:notes>
+</file>
+
+<file path=ppt/notesSlides/notesSlide11.xml><?xml version="1.0" encoding="utf-8"?>
+<p:notes xmlns:a="http://schemas.openxmlformats.org/drawingml/2006/main" xmlns:r="http://schemas.openxmlformats.org/officeDocument/2006/relationships" xmlns:p="http://schemas.openxmlformats.org/presentationml/2006/main">
+  <p:cSld>
+    <p:spTree>
+      <p:nvGrpSpPr>
         <p:cNvPr id="1" name="">
           <a:extLst>
             <a:ext uri="{FF2B5EF4-FFF2-40B4-BE49-F238E27FC236}">
@@ -974,7 +1075,7 @@
 </p:notes>
 </file>
 
-<file path=ppt/notesSlides/notesSlide11.xml><?xml version="1.0" encoding="utf-8"?>
+<file path=ppt/notesSlides/notesSlide12.xml><?xml version="1.0" encoding="utf-8"?>
 <p:notes xmlns:a="http://schemas.openxmlformats.org/drawingml/2006/main" xmlns:r="http://schemas.openxmlformats.org/officeDocument/2006/relationships" xmlns:p="http://schemas.openxmlformats.org/presentationml/2006/main">
   <p:cSld>
     <p:spTree>
@@ -1191,7 +1292,7 @@
 </p:notes>
 </file>
 
-<file path=ppt/notesSlides/notesSlide12.xml><?xml version="1.0" encoding="utf-8"?>
+<file path=ppt/notesSlides/notesSlide13.xml><?xml version="1.0" encoding="utf-8"?>
 <p:notes xmlns:a="http://schemas.openxmlformats.org/drawingml/2006/main" xmlns:r="http://schemas.openxmlformats.org/officeDocument/2006/relationships" xmlns:p="http://schemas.openxmlformats.org/presentationml/2006/main">
   <p:cSld>
     <p:spTree>
@@ -1260,8 +1361,31 @@
           <a:bodyPr rtlCol="0"/>
           <a:lstStyle/>
           <a:p>
+            <a:pPr marL="0" marR="0" lvl="0" indent="0" algn="l" defTabSz="914400" rtl="0" eaLnBrk="1" fontAlgn="auto" latinLnBrk="0" hangingPunct="1">
+              <a:lnSpc>
+                <a:spcPct val="100000"/>
+              </a:lnSpc>
+              <a:spcBef>
+                <a:spcPts val="0"/>
+              </a:spcBef>
+              <a:spcAft>
+                <a:spcPts val="0"/>
+              </a:spcAft>
+              <a:buClrTx/>
+              <a:buSzTx/>
+              <a:buFontTx/>
+              <a:buNone/>
+              <a:tabLst/>
+              <a:defRPr/>
+            </a:pPr>
+            <a:r>
+              <a:rPr lang="fr-FR" dirty="0"/>
+              <a:t>Analyse des démissions en quantités</a:t>
+            </a:r>
+          </a:p>
+          <a:p>
             <a:pPr rtl="0"/>
-            <a:endParaRPr lang="fr-FR"/>
+            <a:endParaRPr lang="fr-FR" dirty="0"/>
           </a:p>
         </p:txBody>
       </p:sp>
@@ -1308,7 +1432,7 @@
 </p:notes>
 </file>
 
-<file path=ppt/notesSlides/notesSlide13.xml><?xml version="1.0" encoding="utf-8"?>
+<file path=ppt/notesSlides/notesSlide14.xml><?xml version="1.0" encoding="utf-8"?>
 <p:notes xmlns:a="http://schemas.openxmlformats.org/drawingml/2006/main" xmlns:r="http://schemas.openxmlformats.org/officeDocument/2006/relationships" xmlns:p="http://schemas.openxmlformats.org/presentationml/2006/main">
   <p:cSld>
     <p:spTree>
@@ -1380,6 +1504,17 @@
             <a:pPr rtl="0"/>
             <a:r>
               <a:rPr lang="fr-FR" dirty="0"/>
+              <a:t>Analyse des démissions en pourcentages</a:t>
+            </a:r>
+          </a:p>
+          <a:p>
+            <a:pPr rtl="0"/>
+            <a:endParaRPr lang="fr-FR" dirty="0"/>
+          </a:p>
+          <a:p>
+            <a:pPr rtl="0"/>
+            <a:r>
+              <a:rPr lang="fr-FR" dirty="0"/>
               <a:t>Les représentants commerciaux sont les plus touchés avec 40% dans le poste</a:t>
             </a:r>
           </a:p>
@@ -1428,7 +1563,7 @@
 </p:notes>
 </file>
 
-<file path=ppt/notesSlides/notesSlide14.xml><?xml version="1.0" encoding="utf-8"?>
+<file path=ppt/notesSlides/notesSlide15.xml><?xml version="1.0" encoding="utf-8"?>
 <p:notes xmlns:a="http://schemas.openxmlformats.org/drawingml/2006/main" xmlns:r="http://schemas.openxmlformats.org/officeDocument/2006/relationships" xmlns:p="http://schemas.openxmlformats.org/presentationml/2006/main">
   <p:cSld>
     <p:spTree>
@@ -1497,13 +1632,6 @@
           <a:bodyPr rtlCol="0"/>
           <a:lstStyle/>
           <a:p>
-            <a:pPr rtl="0"/>
-            <a:r>
-              <a:rPr lang="fr-FR" dirty="0"/>
-              <a:t>Les 3 premières catégories regroupe beaucoup plus de salariés que « Représentant Commerciaux »</a:t>
-            </a:r>
-          </a:p>
-          <a:p>
             <a:pPr marL="0" marR="0" lvl="0" indent="0" algn="l" defTabSz="914400" rtl="0" eaLnBrk="1" fontAlgn="auto" latinLnBrk="0" hangingPunct="1">
               <a:lnSpc>
                 <a:spcPct val="100000"/>
@@ -1523,6 +1651,40 @@
             </a:pPr>
             <a:r>
               <a:rPr lang="fr-FR" dirty="0"/>
+              <a:t>Distribution des salariés</a:t>
+            </a:r>
+          </a:p>
+          <a:p>
+            <a:pPr rtl="0"/>
+            <a:endParaRPr lang="fr-FR" dirty="0"/>
+          </a:p>
+          <a:p>
+            <a:pPr rtl="0"/>
+            <a:r>
+              <a:rPr lang="fr-FR" dirty="0"/>
+              <a:t>Les 3 premières catégories regroupe beaucoup plus de salariés que « Représentant Commerciaux »</a:t>
+            </a:r>
+          </a:p>
+          <a:p>
+            <a:pPr marL="0" marR="0" lvl="0" indent="0" algn="l" defTabSz="914400" rtl="0" eaLnBrk="1" fontAlgn="auto" latinLnBrk="0" hangingPunct="1">
+              <a:lnSpc>
+                <a:spcPct val="100000"/>
+              </a:lnSpc>
+              <a:spcBef>
+                <a:spcPts val="0"/>
+              </a:spcBef>
+              <a:spcAft>
+                <a:spcPts val="0"/>
+              </a:spcAft>
+              <a:buClrTx/>
+              <a:buSzTx/>
+              <a:buFontTx/>
+              <a:buNone/>
+              <a:tabLst/>
+              <a:defRPr/>
+            </a:pPr>
+            <a:r>
+              <a:rPr lang="fr-FR" dirty="0"/>
               <a:t>Ce qui explique </a:t>
             </a:r>
             <a:r>
@@ -1604,7 +1766,7 @@
 </p:notes>
 </file>
 
-<file path=ppt/notesSlides/notesSlide15.xml><?xml version="1.0" encoding="utf-8"?>
+<file path=ppt/notesSlides/notesSlide16.xml><?xml version="1.0" encoding="utf-8"?>
 <p:notes xmlns:a="http://schemas.openxmlformats.org/drawingml/2006/main" xmlns:r="http://schemas.openxmlformats.org/officeDocument/2006/relationships" xmlns:p="http://schemas.openxmlformats.org/presentationml/2006/main">
   <p:cSld>
     <p:spTree>
@@ -1724,7 +1886,7 @@
 </p:notes>
 </file>
 
-<file path=ppt/notesSlides/notesSlide16.xml><?xml version="1.0" encoding="utf-8"?>
+<file path=ppt/notesSlides/notesSlide17.xml><?xml version="1.0" encoding="utf-8"?>
 <p:notes xmlns:a="http://schemas.openxmlformats.org/drawingml/2006/main" xmlns:r="http://schemas.openxmlformats.org/officeDocument/2006/relationships" xmlns:p="http://schemas.openxmlformats.org/presentationml/2006/main">
   <p:cSld>
     <p:spTree>
@@ -1844,7 +2006,7 @@
 </p:notes>
 </file>
 
-<file path=ppt/notesSlides/notesSlide17.xml><?xml version="1.0" encoding="utf-8"?>
+<file path=ppt/notesSlides/notesSlide18.xml><?xml version="1.0" encoding="utf-8"?>
 <p:notes xmlns:a="http://schemas.openxmlformats.org/drawingml/2006/main" xmlns:r="http://schemas.openxmlformats.org/officeDocument/2006/relationships" xmlns:p="http://schemas.openxmlformats.org/presentationml/2006/main">
   <p:cSld>
     <p:spTree>
@@ -1964,7 +2126,7 @@
 </p:notes>
 </file>
 
-<file path=ppt/notesSlides/notesSlide18.xml><?xml version="1.0" encoding="utf-8"?>
+<file path=ppt/notesSlides/notesSlide19.xml><?xml version="1.0" encoding="utf-8"?>
 <p:notes xmlns:a="http://schemas.openxmlformats.org/drawingml/2006/main" xmlns:r="http://schemas.openxmlformats.org/officeDocument/2006/relationships" xmlns:p="http://schemas.openxmlformats.org/presentationml/2006/main">
   <p:cSld>
     <p:spTree>
@@ -2075,175 +2237,6 @@
     <p:extLst>
       <p:ext uri="{BB962C8B-B14F-4D97-AF65-F5344CB8AC3E}">
         <p14:creationId xmlns:p14="http://schemas.microsoft.com/office/powerpoint/2010/main" val="1517880499"/>
-      </p:ext>
-    </p:extLst>
-  </p:cSld>
-  <p:clrMapOvr>
-    <a:masterClrMapping/>
-  </p:clrMapOvr>
-</p:notes>
-</file>
-
-<file path=ppt/notesSlides/notesSlide19.xml><?xml version="1.0" encoding="utf-8"?>
-<p:notes xmlns:a="http://schemas.openxmlformats.org/drawingml/2006/main" xmlns:r="http://schemas.openxmlformats.org/officeDocument/2006/relationships" xmlns:p="http://schemas.openxmlformats.org/presentationml/2006/main">
-  <p:cSld>
-    <p:spTree>
-      <p:nvGrpSpPr>
-        <p:cNvPr id="1" name="">
-          <a:extLst>
-            <a:ext uri="{FF2B5EF4-FFF2-40B4-BE49-F238E27FC236}">
-              <a16:creationId xmlns:a16="http://schemas.microsoft.com/office/drawing/2014/main" id="{0963BE42-7496-DBF9-1BD7-375DFB214D05}"/>
-            </a:ext>
-          </a:extLst>
-        </p:cNvPr>
-        <p:cNvGrpSpPr/>
-        <p:nvPr/>
-      </p:nvGrpSpPr>
-      <p:grpSpPr>
-        <a:xfrm>
-          <a:off x="0" y="0"/>
-          <a:ext cx="0" cy="0"/>
-          <a:chOff x="0" y="0"/>
-          <a:chExt cx="0" cy="0"/>
-        </a:xfrm>
-      </p:grpSpPr>
-      <p:sp>
-        <p:nvSpPr>
-          <p:cNvPr id="2" name="Espace réservé de l'image des diapositives 1">
-            <a:extLst>
-              <a:ext uri="{FF2B5EF4-FFF2-40B4-BE49-F238E27FC236}">
-                <a16:creationId xmlns:a16="http://schemas.microsoft.com/office/drawing/2014/main" id="{312D5055-B3E3-AC5C-BA6B-F7E5C4F41E0B}"/>
-              </a:ext>
-            </a:extLst>
-          </p:cNvPr>
-          <p:cNvSpPr>
-            <a:spLocks noGrp="1" noRot="1" noChangeAspect="1"/>
-          </p:cNvSpPr>
-          <p:nvPr>
-            <p:ph type="sldImg"/>
-          </p:nvPr>
-        </p:nvSpPr>
-        <p:spPr/>
-        <p:txBody>
-          <a:bodyPr/>
-          <a:lstStyle/>
-          <a:p>
-            <a:endParaRPr lang="fr-FR"/>
-          </a:p>
-        </p:txBody>
-      </p:sp>
-      <p:sp>
-        <p:nvSpPr>
-          <p:cNvPr id="3" name="Espace réservé des notes 2">
-            <a:extLst>
-              <a:ext uri="{FF2B5EF4-FFF2-40B4-BE49-F238E27FC236}">
-                <a16:creationId xmlns:a16="http://schemas.microsoft.com/office/drawing/2014/main" id="{FE3554EF-908A-C0A2-EA8B-E7B9759B9B7C}"/>
-              </a:ext>
-            </a:extLst>
-          </p:cNvPr>
-          <p:cNvSpPr>
-            <a:spLocks noGrp="1"/>
-          </p:cNvSpPr>
-          <p:nvPr>
-            <p:ph type="body" idx="1"/>
-          </p:nvPr>
-        </p:nvSpPr>
-        <p:spPr/>
-        <p:txBody>
-          <a:bodyPr/>
-          <a:lstStyle/>
-          <a:p>
-            <a:r>
-              <a:rPr lang="fr-FR" dirty="0"/>
-              <a:t>Nous utiliserons 3 modèles pour comparer nos </a:t>
-            </a:r>
-            <a:r>
-              <a:rPr lang="fr-FR" dirty="0" err="1"/>
-              <a:t>resultats</a:t>
-            </a:r>
-            <a:endParaRPr lang="fr-FR" dirty="0"/>
-          </a:p>
-          <a:p>
-            <a:endParaRPr lang="fr-FR" dirty="0"/>
-          </a:p>
-          <a:p>
-            <a:r>
-              <a:rPr lang="fr-FR" dirty="0"/>
-              <a:t>Le </a:t>
-            </a:r>
-            <a:r>
-              <a:rPr lang="fr-FR" dirty="0" err="1"/>
-              <a:t>dummy</a:t>
-            </a:r>
-            <a:r>
-              <a:rPr lang="fr-FR" dirty="0"/>
-              <a:t> qui est une simple moyenne comme base de comparaison</a:t>
-            </a:r>
-          </a:p>
-          <a:p>
-            <a:r>
-              <a:rPr lang="fr-FR" dirty="0"/>
-              <a:t>Le </a:t>
-            </a:r>
-            <a:r>
-              <a:rPr lang="fr-FR" dirty="0" err="1"/>
-              <a:t>LogisicRegression</a:t>
-            </a:r>
-            <a:r>
-              <a:rPr lang="fr-FR" dirty="0"/>
-              <a:t> qui se base sur une comparaison linéaire</a:t>
-            </a:r>
-          </a:p>
-          <a:p>
-            <a:r>
-              <a:rPr lang="fr-FR" dirty="0"/>
-              <a:t>Le </a:t>
-            </a:r>
-            <a:r>
-              <a:rPr lang="fr-FR" dirty="0" err="1"/>
-              <a:t>XGBoost</a:t>
-            </a:r>
-            <a:r>
-              <a:rPr lang="fr-FR" dirty="0"/>
-              <a:t> qui utilise des sous-modèles à base de forêts</a:t>
-            </a:r>
-          </a:p>
-        </p:txBody>
-      </p:sp>
-      <p:sp>
-        <p:nvSpPr>
-          <p:cNvPr id="4" name="Espace réservé du numéro de diapositive 3">
-            <a:extLst>
-              <a:ext uri="{FF2B5EF4-FFF2-40B4-BE49-F238E27FC236}">
-                <a16:creationId xmlns:a16="http://schemas.microsoft.com/office/drawing/2014/main" id="{518C4275-4F49-EF25-F89A-C4F510F6C459}"/>
-              </a:ext>
-            </a:extLst>
-          </p:cNvPr>
-          <p:cNvSpPr>
-            <a:spLocks noGrp="1"/>
-          </p:cNvSpPr>
-          <p:nvPr>
-            <p:ph type="sldNum" sz="quarter" idx="5"/>
-          </p:nvPr>
-        </p:nvSpPr>
-        <p:spPr/>
-        <p:txBody>
-          <a:bodyPr/>
-          <a:lstStyle/>
-          <a:p>
-            <a:pPr rtl="0"/>
-            <a:fld id="{C6B3AB32-59DF-41F1-9618-EDFBF5049629}" type="slidenum">
-              <a:rPr lang="fr-FR" noProof="0" smtClean="0"/>
-              <a:t>22</a:t>
-            </a:fld>
-            <a:endParaRPr lang="fr-FR" noProof="0"/>
-          </a:p>
-        </p:txBody>
-      </p:sp>
-    </p:spTree>
-    <p:extLst>
-      <p:ext uri="{BB962C8B-B14F-4D97-AF65-F5344CB8AC3E}">
-        <p14:creationId xmlns:p14="http://schemas.microsoft.com/office/powerpoint/2010/main" val="1486105459"/>
       </p:ext>
     </p:extLst>
   </p:cSld>
@@ -2308,7 +2301,10 @@
               <a:rPr lang="fr-FR" dirty="0" err="1"/>
               <a:t>Technova</a:t>
             </a:r>
-            <a:endParaRPr lang="fr-FR" dirty="0"/>
+            <a:r>
+              <a:rPr lang="fr-FR" dirty="0"/>
+              <a:t> =&gt; ce projet porte sur l’identification</a:t>
+            </a:r>
           </a:p>
           <a:p>
             <a:r>
@@ -2330,29 +2326,6 @@
             <a:r>
               <a:rPr lang="fr-FR" dirty="0"/>
               <a:t> IA</a:t>
-            </a:r>
-          </a:p>
-          <a:p>
-            <a:r>
-              <a:rPr lang="fr-FR" dirty="0"/>
-              <a:t>Stack : </a:t>
-            </a:r>
-            <a:r>
-              <a:rPr lang="fr-FR" dirty="0" err="1"/>
-              <a:t>Jupyter</a:t>
-            </a:r>
-            <a:r>
-              <a:rPr lang="fr-FR" dirty="0"/>
-              <a:t> + Python, UV Package, Excel</a:t>
-            </a:r>
-          </a:p>
-          <a:p>
-            <a:endParaRPr lang="fr-FR" dirty="0"/>
-          </a:p>
-          <a:p>
-            <a:r>
-              <a:rPr lang="fr-FR" dirty="0"/>
-              <a:t>Machine Learning</a:t>
             </a:r>
           </a:p>
         </p:txBody>
@@ -2399,6 +2372,159 @@
   <p:cSld>
     <p:spTree>
       <p:nvGrpSpPr>
+        <p:cNvPr id="1" name="">
+          <a:extLst>
+            <a:ext uri="{FF2B5EF4-FFF2-40B4-BE49-F238E27FC236}">
+              <a16:creationId xmlns:a16="http://schemas.microsoft.com/office/drawing/2014/main" id="{0963BE42-7496-DBF9-1BD7-375DFB214D05}"/>
+            </a:ext>
+          </a:extLst>
+        </p:cNvPr>
+        <p:cNvGrpSpPr/>
+        <p:nvPr/>
+      </p:nvGrpSpPr>
+      <p:grpSpPr>
+        <a:xfrm>
+          <a:off x="0" y="0"/>
+          <a:ext cx="0" cy="0"/>
+          <a:chOff x="0" y="0"/>
+          <a:chExt cx="0" cy="0"/>
+        </a:xfrm>
+      </p:grpSpPr>
+      <p:sp>
+        <p:nvSpPr>
+          <p:cNvPr id="2" name="Espace réservé de l'image des diapositives 1">
+            <a:extLst>
+              <a:ext uri="{FF2B5EF4-FFF2-40B4-BE49-F238E27FC236}">
+                <a16:creationId xmlns:a16="http://schemas.microsoft.com/office/drawing/2014/main" id="{312D5055-B3E3-AC5C-BA6B-F7E5C4F41E0B}"/>
+              </a:ext>
+            </a:extLst>
+          </p:cNvPr>
+          <p:cNvSpPr>
+            <a:spLocks noGrp="1" noRot="1" noChangeAspect="1"/>
+          </p:cNvSpPr>
+          <p:nvPr>
+            <p:ph type="sldImg"/>
+          </p:nvPr>
+        </p:nvSpPr>
+        <p:spPr/>
+        <p:txBody>
+          <a:bodyPr/>
+          <a:lstStyle/>
+          <a:p>
+            <a:endParaRPr lang="fr-FR"/>
+          </a:p>
+        </p:txBody>
+      </p:sp>
+      <p:sp>
+        <p:nvSpPr>
+          <p:cNvPr id="3" name="Espace réservé des notes 2">
+            <a:extLst>
+              <a:ext uri="{FF2B5EF4-FFF2-40B4-BE49-F238E27FC236}">
+                <a16:creationId xmlns:a16="http://schemas.microsoft.com/office/drawing/2014/main" id="{FE3554EF-908A-C0A2-EA8B-E7B9759B9B7C}"/>
+              </a:ext>
+            </a:extLst>
+          </p:cNvPr>
+          <p:cNvSpPr>
+            <a:spLocks noGrp="1"/>
+          </p:cNvSpPr>
+          <p:nvPr>
+            <p:ph type="body" idx="1"/>
+          </p:nvPr>
+        </p:nvSpPr>
+        <p:spPr/>
+        <p:txBody>
+          <a:bodyPr/>
+          <a:lstStyle/>
+          <a:p>
+            <a:r>
+              <a:rPr lang="fr-FR" dirty="0"/>
+              <a:t>Nous utiliserons 3 modèles pour comparer nos </a:t>
+            </a:r>
+            <a:r>
+              <a:rPr lang="fr-FR" dirty="0" err="1"/>
+              <a:t>resultats</a:t>
+            </a:r>
+            <a:endParaRPr lang="fr-FR" dirty="0"/>
+          </a:p>
+          <a:p>
+            <a:endParaRPr lang="fr-FR" dirty="0"/>
+          </a:p>
+          <a:p>
+            <a:r>
+              <a:rPr lang="fr-FR" dirty="0"/>
+              <a:t>Le </a:t>
+            </a:r>
+            <a:r>
+              <a:rPr lang="fr-FR" dirty="0" err="1"/>
+              <a:t>dummy</a:t>
+            </a:r>
+            <a:r>
+              <a:rPr lang="fr-FR" dirty="0"/>
+              <a:t> qui est une simple moyenne comme base de comparaison</a:t>
+            </a:r>
+          </a:p>
+          <a:p>
+            <a:r>
+              <a:rPr lang="fr-FR" dirty="0"/>
+              <a:t>1 modèle linéaire qui se base sur une comparaison linéaire</a:t>
+            </a:r>
+          </a:p>
+          <a:p>
+            <a:r>
+              <a:rPr lang="fr-FR" dirty="0"/>
+              <a:t>3 modèles non-linéaires qui sont des modèles à base d’arbres de décision</a:t>
+            </a:r>
+          </a:p>
+        </p:txBody>
+      </p:sp>
+      <p:sp>
+        <p:nvSpPr>
+          <p:cNvPr id="4" name="Espace réservé du numéro de diapositive 3">
+            <a:extLst>
+              <a:ext uri="{FF2B5EF4-FFF2-40B4-BE49-F238E27FC236}">
+                <a16:creationId xmlns:a16="http://schemas.microsoft.com/office/drawing/2014/main" id="{518C4275-4F49-EF25-F89A-C4F510F6C459}"/>
+              </a:ext>
+            </a:extLst>
+          </p:cNvPr>
+          <p:cNvSpPr>
+            <a:spLocks noGrp="1"/>
+          </p:cNvSpPr>
+          <p:nvPr>
+            <p:ph type="sldNum" sz="quarter" idx="5"/>
+          </p:nvPr>
+        </p:nvSpPr>
+        <p:spPr/>
+        <p:txBody>
+          <a:bodyPr/>
+          <a:lstStyle/>
+          <a:p>
+            <a:pPr rtl="0"/>
+            <a:fld id="{C6B3AB32-59DF-41F1-9618-EDFBF5049629}" type="slidenum">
+              <a:rPr lang="fr-FR" noProof="0" smtClean="0"/>
+              <a:t>22</a:t>
+            </a:fld>
+            <a:endParaRPr lang="fr-FR" noProof="0"/>
+          </a:p>
+        </p:txBody>
+      </p:sp>
+    </p:spTree>
+    <p:extLst>
+      <p:ext uri="{BB962C8B-B14F-4D97-AF65-F5344CB8AC3E}">
+        <p14:creationId xmlns:p14="http://schemas.microsoft.com/office/powerpoint/2010/main" val="1486105459"/>
+      </p:ext>
+    </p:extLst>
+  </p:cSld>
+  <p:clrMapOvr>
+    <a:masterClrMapping/>
+  </p:clrMapOvr>
+</p:notes>
+</file>
+
+<file path=ppt/notesSlides/notesSlide21.xml><?xml version="1.0" encoding="utf-8"?>
+<p:notes xmlns:a="http://schemas.openxmlformats.org/drawingml/2006/main" xmlns:r="http://schemas.openxmlformats.org/officeDocument/2006/relationships" xmlns:p="http://schemas.openxmlformats.org/presentationml/2006/main">
+  <p:cSld>
+    <p:spTree>
+      <p:nvGrpSpPr>
         <p:cNvPr id="1" name=""/>
         <p:cNvGrpSpPr/>
         <p:nvPr/>
@@ -2489,7 +2615,7 @@
 </p:notes>
 </file>
 
-<file path=ppt/notesSlides/notesSlide21.xml><?xml version="1.0" encoding="utf-8"?>
+<file path=ppt/notesSlides/notesSlide22.xml><?xml version="1.0" encoding="utf-8"?>
 <p:notes xmlns:a="http://schemas.openxmlformats.org/drawingml/2006/main" xmlns:r="http://schemas.openxmlformats.org/officeDocument/2006/relationships" xmlns:p="http://schemas.openxmlformats.org/presentationml/2006/main">
   <p:cSld>
     <p:spTree>
@@ -2877,7 +3003,7 @@
 </p:notes>
 </file>
 
-<file path=ppt/notesSlides/notesSlide22.xml><?xml version="1.0" encoding="utf-8"?>
+<file path=ppt/notesSlides/notesSlide23.xml><?xml version="1.0" encoding="utf-8"?>
 <p:notes xmlns:a="http://schemas.openxmlformats.org/drawingml/2006/main" xmlns:r="http://schemas.openxmlformats.org/officeDocument/2006/relationships" xmlns:p="http://schemas.openxmlformats.org/presentationml/2006/main">
   <p:cSld>
     <p:spTree>
@@ -2978,7 +3104,7 @@
 </p:notes>
 </file>
 
-<file path=ppt/notesSlides/notesSlide23.xml><?xml version="1.0" encoding="utf-8"?>
+<file path=ppt/notesSlides/notesSlide24.xml><?xml version="1.0" encoding="utf-8"?>
 <p:notes xmlns:a="http://schemas.openxmlformats.org/drawingml/2006/main" xmlns:r="http://schemas.openxmlformats.org/officeDocument/2006/relationships" xmlns:p="http://schemas.openxmlformats.org/presentationml/2006/main">
   <p:cSld>
     <p:spTree>
@@ -3152,8 +3278,29 @@
               <a:rPr lang="fr-FR" sz="1200" kern="1200" noProof="0" dirty="0">
                 <a:latin typeface="Aptos" panose="020B0004020202020204" pitchFamily="34" charset="0"/>
               </a:rPr>
-              <a:t>Recherche du seuil optimal (F1-Score) = test avec différents seuils pour la meilleur note F1</a:t>
-            </a:r>
+              <a:t>Recherche du seuil optimal (</a:t>
+            </a:r>
+            <a:r>
+              <a:rPr lang="fr-FR" sz="1200" kern="1200" noProof="0" dirty="0" err="1">
+                <a:latin typeface="Aptos" panose="020B0004020202020204" pitchFamily="34" charset="0"/>
+              </a:rPr>
+              <a:t>Recall</a:t>
+            </a:r>
+            <a:r>
+              <a:rPr lang="fr-FR" sz="1200" kern="1200" noProof="0" dirty="0">
+                <a:latin typeface="Aptos" panose="020B0004020202020204" pitchFamily="34" charset="0"/>
+              </a:rPr>
+              <a:t>) = test avec différents seuils pour la meilleur note </a:t>
+            </a:r>
+            <a:r>
+              <a:rPr lang="fr-FR" sz="1200" kern="1200" noProof="0" dirty="0" err="1">
+                <a:latin typeface="Aptos" panose="020B0004020202020204" pitchFamily="34" charset="0"/>
+              </a:rPr>
+              <a:t>recall</a:t>
+            </a:r>
+            <a:endParaRPr lang="fr-FR" sz="1200" kern="1200" noProof="0" dirty="0">
+              <a:latin typeface="Aptos" panose="020B0004020202020204" pitchFamily="34" charset="0"/>
+            </a:endParaRPr>
           </a:p>
           <a:p>
             <a:pPr marL="0" lvl="0" indent="0" defTabSz="1600200">
@@ -3191,19 +3338,7 @@
               <a:rPr lang="fr-FR" sz="1200" kern="1200" noProof="0" dirty="0">
                 <a:latin typeface="Aptos" panose="020B0004020202020204" pitchFamily="34" charset="0"/>
               </a:rPr>
-              <a:t>Entrainement final est la combinaison des passes dans le </a:t>
-            </a:r>
-            <a:r>
-              <a:rPr lang="fr-FR" sz="1200" kern="1200" noProof="0" dirty="0" err="1">
-                <a:latin typeface="Aptos" panose="020B0004020202020204" pitchFamily="34" charset="0"/>
-              </a:rPr>
-              <a:t>meme</a:t>
-            </a:r>
-            <a:r>
-              <a:rPr lang="fr-FR" sz="1200" kern="1200" noProof="0" dirty="0">
-                <a:latin typeface="Aptos" panose="020B0004020202020204" pitchFamily="34" charset="0"/>
-              </a:rPr>
-              <a:t> ordre et si le F1 score est meilleur</a:t>
+              <a:t>Entrainement final est la combinaison des passes dans le même ordre et si le F1 score est meilleur</a:t>
             </a:r>
           </a:p>
         </p:txBody>
@@ -3242,244 +3377,6 @@
     <p:extLst>
       <p:ext uri="{BB962C8B-B14F-4D97-AF65-F5344CB8AC3E}">
         <p14:creationId xmlns:p14="http://schemas.microsoft.com/office/powerpoint/2010/main" val="2431494964"/>
-      </p:ext>
-    </p:extLst>
-  </p:cSld>
-  <p:clrMapOvr>
-    <a:masterClrMapping/>
-  </p:clrMapOvr>
-</p:notes>
-</file>
-
-<file path=ppt/notesSlides/notesSlide24.xml><?xml version="1.0" encoding="utf-8"?>
-<p:notes xmlns:a="http://schemas.openxmlformats.org/drawingml/2006/main" xmlns:r="http://schemas.openxmlformats.org/officeDocument/2006/relationships" xmlns:p="http://schemas.openxmlformats.org/presentationml/2006/main">
-  <p:cSld>
-    <p:spTree>
-      <p:nvGrpSpPr>
-        <p:cNvPr id="1" name="">
-          <a:extLst>
-            <a:ext uri="{FF2B5EF4-FFF2-40B4-BE49-F238E27FC236}">
-              <a16:creationId xmlns:a16="http://schemas.microsoft.com/office/drawing/2014/main" id="{B1310CD6-5544-E561-9A6F-F7E9DE6FDEA1}"/>
-            </a:ext>
-          </a:extLst>
-        </p:cNvPr>
-        <p:cNvGrpSpPr/>
-        <p:nvPr/>
-      </p:nvGrpSpPr>
-      <p:grpSpPr>
-        <a:xfrm>
-          <a:off x="0" y="0"/>
-          <a:ext cx="0" cy="0"/>
-          <a:chOff x="0" y="0"/>
-          <a:chExt cx="0" cy="0"/>
-        </a:xfrm>
-      </p:grpSpPr>
-      <p:sp>
-        <p:nvSpPr>
-          <p:cNvPr id="2" name="Espace réservé de l'image des diapositives 1">
-            <a:extLst>
-              <a:ext uri="{FF2B5EF4-FFF2-40B4-BE49-F238E27FC236}">
-                <a16:creationId xmlns:a16="http://schemas.microsoft.com/office/drawing/2014/main" id="{F54AA499-B9F8-A65A-3EE4-8D6DCBE33B59}"/>
-              </a:ext>
-            </a:extLst>
-          </p:cNvPr>
-          <p:cNvSpPr>
-            <a:spLocks noGrp="1" noRot="1" noChangeAspect="1"/>
-          </p:cNvSpPr>
-          <p:nvPr>
-            <p:ph type="sldImg"/>
-          </p:nvPr>
-        </p:nvSpPr>
-        <p:spPr/>
-      </p:sp>
-      <p:sp>
-        <p:nvSpPr>
-          <p:cNvPr id="3" name="Espace réservé des notes 2">
-            <a:extLst>
-              <a:ext uri="{FF2B5EF4-FFF2-40B4-BE49-F238E27FC236}">
-                <a16:creationId xmlns:a16="http://schemas.microsoft.com/office/drawing/2014/main" id="{D023E6CE-201B-1062-1523-AE8F0D53E8A2}"/>
-              </a:ext>
-            </a:extLst>
-          </p:cNvPr>
-          <p:cNvSpPr>
-            <a:spLocks noGrp="1"/>
-          </p:cNvSpPr>
-          <p:nvPr>
-            <p:ph type="body" idx="1"/>
-          </p:nvPr>
-        </p:nvSpPr>
-        <p:spPr/>
-        <p:txBody>
-          <a:bodyPr/>
-          <a:lstStyle/>
-          <a:p>
-            <a:pPr marL="0" marR="0" lvl="0" indent="0" algn="l" defTabSz="914400" rtl="0" eaLnBrk="1" fontAlgn="auto" latinLnBrk="0" hangingPunct="1">
-              <a:lnSpc>
-                <a:spcPct val="100000"/>
-              </a:lnSpc>
-              <a:spcBef>
-                <a:spcPts val="0"/>
-              </a:spcBef>
-              <a:spcAft>
-                <a:spcPts val="0"/>
-              </a:spcAft>
-              <a:buClrTx/>
-              <a:buSzTx/>
-              <a:buFontTx/>
-              <a:buNone/>
-              <a:tabLst/>
-              <a:defRPr/>
-            </a:pPr>
-            <a:r>
-              <a:rPr lang="fr-FR" dirty="0"/>
-              <a:t>La courbe Précision-Rappel est </a:t>
-            </a:r>
-            <a:r>
-              <a:rPr lang="fr-FR" b="1" dirty="0"/>
-              <a:t>paramétrique</a:t>
-            </a:r>
-            <a:r>
-              <a:rPr lang="fr-FR" dirty="0"/>
-              <a:t> : chaque point de la courbe correspond à un seuil différent.</a:t>
-            </a:r>
-          </a:p>
-          <a:p>
-            <a:endParaRPr lang="fr-FR" dirty="0"/>
-          </a:p>
-          <a:p>
-            <a:r>
-              <a:rPr lang="fr-FR" dirty="0"/>
-              <a:t>plus on baisse le seuil, plus on détecte de départs… mais au prix d'une explosion des fausses alertes.</a:t>
-            </a:r>
-          </a:p>
-          <a:p>
-            <a:r>
-              <a:rPr lang="fr-FR" b="1" dirty="0"/>
-              <a:t>Seuil retenu : 0.551</a:t>
-            </a:r>
-          </a:p>
-          <a:p>
-            <a:r>
-              <a:rPr lang="fr-FR" dirty="0"/>
-              <a:t>Contrainte métier : </a:t>
-            </a:r>
-            <a:r>
-              <a:rPr lang="fr-FR" b="1" dirty="0"/>
-              <a:t>rappel ≥ 68 %</a:t>
-            </a:r>
-            <a:r>
-              <a:rPr lang="fr-FR" dirty="0"/>
-              <a:t> (ne pas rater de départ)</a:t>
-            </a:r>
-          </a:p>
-          <a:p>
-            <a:endParaRPr lang="fr-FR" dirty="0"/>
-          </a:p>
-          <a:p>
-            <a:r>
-              <a:rPr lang="fr-FR" b="1" dirty="0"/>
-              <a:t>Interprétation</a:t>
-            </a:r>
-          </a:p>
-          <a:p>
-            <a:r>
-              <a:rPr lang="fr-FR" b="1" dirty="0"/>
-              <a:t> 70 % des départs réels sont détectés</a:t>
-            </a:r>
-            <a:endParaRPr lang="fr-FR" dirty="0"/>
-          </a:p>
-          <a:p>
-            <a:r>
-              <a:rPr lang="fr-FR" dirty="0"/>
-              <a:t> </a:t>
-            </a:r>
-            <a:r>
-              <a:rPr lang="fr-FR" b="1" dirty="0"/>
-              <a:t>47 % des alertes sont correctes</a:t>
-            </a:r>
-            <a:r>
-              <a:rPr lang="fr-FR" dirty="0"/>
-              <a:t> (1 alerte sur 2 est un faux positif)</a:t>
-            </a:r>
-          </a:p>
-          <a:p>
-            <a:r>
-              <a:rPr lang="fr-FR" dirty="0"/>
-              <a:t> </a:t>
-            </a:r>
-            <a:r>
-              <a:rPr lang="fr-FR" b="1" dirty="0"/>
-              <a:t>F1 = 0.56</a:t>
-            </a:r>
-            <a:r>
-              <a:rPr lang="fr-FR" dirty="0"/>
-              <a:t> → bon compromis global pour un problème déséquilibré</a:t>
-            </a:r>
-          </a:p>
-          <a:p>
-            <a:endParaRPr lang="fr-FR" b="1" dirty="0"/>
-          </a:p>
-          <a:p>
-            <a:r>
-              <a:rPr lang="fr-FR" dirty="0"/>
-              <a:t>Le seuil a été choisi pour </a:t>
-            </a:r>
-            <a:r>
-              <a:rPr lang="fr-FR" b="1" dirty="0"/>
-              <a:t>maximiser la détection des départs</a:t>
-            </a:r>
-            <a:r>
-              <a:rPr lang="fr-FR" dirty="0"/>
-              <a:t> tout en gardant une précision acceptable — cohérent avec un objectif de </a:t>
-            </a:r>
-            <a:r>
-              <a:rPr lang="fr-FR" b="1" dirty="0"/>
-              <a:t>sécurité / surveillance</a:t>
-            </a:r>
-            <a:r>
-              <a:rPr lang="fr-FR" dirty="0"/>
-              <a:t>, où rater un départ coûte plus cher qu'une fausse alerte.</a:t>
-            </a:r>
-          </a:p>
-          <a:p>
-            <a:endParaRPr lang="fr-FR" dirty="0"/>
-          </a:p>
-        </p:txBody>
-      </p:sp>
-      <p:sp>
-        <p:nvSpPr>
-          <p:cNvPr id="4" name="Espace réservé du numéro de diapositive 3">
-            <a:extLst>
-              <a:ext uri="{FF2B5EF4-FFF2-40B4-BE49-F238E27FC236}">
-                <a16:creationId xmlns:a16="http://schemas.microsoft.com/office/drawing/2014/main" id="{743B32DC-7602-FC11-15FC-7163DB1390EB}"/>
-              </a:ext>
-            </a:extLst>
-          </p:cNvPr>
-          <p:cNvSpPr>
-            <a:spLocks noGrp="1"/>
-          </p:cNvSpPr>
-          <p:nvPr>
-            <p:ph type="sldNum" sz="quarter" idx="5"/>
-          </p:nvPr>
-        </p:nvSpPr>
-        <p:spPr/>
-        <p:txBody>
-          <a:bodyPr/>
-          <a:lstStyle/>
-          <a:p>
-            <a:pPr rtl="0"/>
-            <a:fld id="{C6B3AB32-59DF-41F1-9618-EDFBF5049629}" type="slidenum">
-              <a:rPr lang="fr-FR" noProof="0" smtClean="0"/>
-              <a:t>28</a:t>
-            </a:fld>
-            <a:endParaRPr lang="fr-FR" noProof="0"/>
-          </a:p>
-        </p:txBody>
-      </p:sp>
-    </p:spTree>
-    <p:extLst>
-      <p:ext uri="{BB962C8B-B14F-4D97-AF65-F5344CB8AC3E}">
-        <p14:creationId xmlns:p14="http://schemas.microsoft.com/office/powerpoint/2010/main" val="2177048887"/>
       </p:ext>
     </p:extLst>
   </p:cSld>
@@ -3569,7 +3466,7 @@
             <a:pPr rtl="0"/>
             <a:fld id="{C6B3AB32-59DF-41F1-9618-EDFBF5049629}" type="slidenum">
               <a:rPr lang="fr-FR" noProof="0" smtClean="0"/>
-              <a:t>29</a:t>
+              <a:t>28</a:t>
             </a:fld>
             <a:endParaRPr lang="fr-FR" noProof="0"/>
           </a:p>
@@ -3761,7 +3658,7 @@
             <a:pPr rtl="0"/>
             <a:fld id="{C6B3AB32-59DF-41F1-9618-EDFBF5049629}" type="slidenum">
               <a:rPr lang="fr-FR" noProof="0" smtClean="0"/>
-              <a:t>30</a:t>
+              <a:t>29</a:t>
             </a:fld>
             <a:endParaRPr lang="fr-FR" noProof="0"/>
           </a:p>
@@ -3781,6 +3678,292 @@
 </file>
 
 <file path=ppt/notesSlides/notesSlide27.xml><?xml version="1.0" encoding="utf-8"?>
+<p:notes xmlns:a="http://schemas.openxmlformats.org/drawingml/2006/main" xmlns:r="http://schemas.openxmlformats.org/officeDocument/2006/relationships" xmlns:p="http://schemas.openxmlformats.org/presentationml/2006/main">
+  <p:cSld>
+    <p:spTree>
+      <p:nvGrpSpPr>
+        <p:cNvPr id="1" name="">
+          <a:extLst>
+            <a:ext uri="{FF2B5EF4-FFF2-40B4-BE49-F238E27FC236}">
+              <a16:creationId xmlns:a16="http://schemas.microsoft.com/office/drawing/2014/main" id="{B1310CD6-5544-E561-9A6F-F7E9DE6FDEA1}"/>
+            </a:ext>
+          </a:extLst>
+        </p:cNvPr>
+        <p:cNvGrpSpPr/>
+        <p:nvPr/>
+      </p:nvGrpSpPr>
+      <p:grpSpPr>
+        <a:xfrm>
+          <a:off x="0" y="0"/>
+          <a:ext cx="0" cy="0"/>
+          <a:chOff x="0" y="0"/>
+          <a:chExt cx="0" cy="0"/>
+        </a:xfrm>
+      </p:grpSpPr>
+      <p:sp>
+        <p:nvSpPr>
+          <p:cNvPr id="2" name="Espace réservé de l'image des diapositives 1">
+            <a:extLst>
+              <a:ext uri="{FF2B5EF4-FFF2-40B4-BE49-F238E27FC236}">
+                <a16:creationId xmlns:a16="http://schemas.microsoft.com/office/drawing/2014/main" id="{F54AA499-B9F8-A65A-3EE4-8D6DCBE33B59}"/>
+              </a:ext>
+            </a:extLst>
+          </p:cNvPr>
+          <p:cNvSpPr>
+            <a:spLocks noGrp="1" noRot="1" noChangeAspect="1"/>
+          </p:cNvSpPr>
+          <p:nvPr>
+            <p:ph type="sldImg"/>
+          </p:nvPr>
+        </p:nvSpPr>
+        <p:spPr/>
+      </p:sp>
+      <p:sp>
+        <p:nvSpPr>
+          <p:cNvPr id="3" name="Espace réservé des notes 2">
+            <a:extLst>
+              <a:ext uri="{FF2B5EF4-FFF2-40B4-BE49-F238E27FC236}">
+                <a16:creationId xmlns:a16="http://schemas.microsoft.com/office/drawing/2014/main" id="{D023E6CE-201B-1062-1523-AE8F0D53E8A2}"/>
+              </a:ext>
+            </a:extLst>
+          </p:cNvPr>
+          <p:cNvSpPr>
+            <a:spLocks noGrp="1"/>
+          </p:cNvSpPr>
+          <p:nvPr>
+            <p:ph type="body" idx="1"/>
+          </p:nvPr>
+        </p:nvSpPr>
+        <p:spPr/>
+        <p:txBody>
+          <a:bodyPr/>
+          <a:lstStyle/>
+          <a:p>
+            <a:pPr marL="0" marR="0" lvl="0" indent="0" algn="l" defTabSz="914400" rtl="0" eaLnBrk="1" fontAlgn="auto" latinLnBrk="0" hangingPunct="1">
+              <a:lnSpc>
+                <a:spcPct val="100000"/>
+              </a:lnSpc>
+              <a:spcBef>
+                <a:spcPts val="0"/>
+              </a:spcBef>
+              <a:spcAft>
+                <a:spcPts val="0"/>
+              </a:spcAft>
+              <a:buClrTx/>
+              <a:buSzTx/>
+              <a:buFontTx/>
+              <a:buNone/>
+              <a:tabLst/>
+              <a:defRPr/>
+            </a:pPr>
+            <a:r>
+              <a:rPr lang="fr-FR" dirty="0"/>
+              <a:t>Prenons l’exemple du </a:t>
+            </a:r>
+            <a:r>
+              <a:rPr lang="fr-FR" dirty="0" err="1"/>
+              <a:t>XGBoost</a:t>
+            </a:r>
+            <a:endParaRPr lang="fr-FR" dirty="0"/>
+          </a:p>
+          <a:p>
+            <a:pPr marL="0" marR="0" lvl="0" indent="0" algn="l" defTabSz="914400" rtl="0" eaLnBrk="1" fontAlgn="auto" latinLnBrk="0" hangingPunct="1">
+              <a:lnSpc>
+                <a:spcPct val="100000"/>
+              </a:lnSpc>
+              <a:spcBef>
+                <a:spcPts val="0"/>
+              </a:spcBef>
+              <a:spcAft>
+                <a:spcPts val="0"/>
+              </a:spcAft>
+              <a:buClrTx/>
+              <a:buSzTx/>
+              <a:buFontTx/>
+              <a:buNone/>
+              <a:tabLst/>
+              <a:defRPr/>
+            </a:pPr>
+            <a:endParaRPr lang="fr-FR" dirty="0"/>
+          </a:p>
+          <a:p>
+            <a:pPr marL="0" marR="0" lvl="0" indent="0" algn="l" defTabSz="914400" rtl="0" eaLnBrk="1" fontAlgn="auto" latinLnBrk="0" hangingPunct="1">
+              <a:lnSpc>
+                <a:spcPct val="100000"/>
+              </a:lnSpc>
+              <a:spcBef>
+                <a:spcPts val="0"/>
+              </a:spcBef>
+              <a:spcAft>
+                <a:spcPts val="0"/>
+              </a:spcAft>
+              <a:buClrTx/>
+              <a:buSzTx/>
+              <a:buFontTx/>
+              <a:buNone/>
+              <a:tabLst/>
+              <a:defRPr/>
+            </a:pPr>
+            <a:r>
+              <a:rPr lang="fr-FR" dirty="0"/>
+              <a:t>La courbe Précision-Rappel est </a:t>
+            </a:r>
+            <a:r>
+              <a:rPr lang="fr-FR" b="1" dirty="0"/>
+              <a:t>paramétrique</a:t>
+            </a:r>
+            <a:r>
+              <a:rPr lang="fr-FR" dirty="0"/>
+              <a:t> : chaque point de la courbe correspond à un seuil différent.</a:t>
+            </a:r>
+          </a:p>
+          <a:p>
+            <a:endParaRPr lang="fr-FR" dirty="0"/>
+          </a:p>
+          <a:p>
+            <a:r>
+              <a:rPr lang="fr-FR" dirty="0"/>
+              <a:t>plus on baisse le seuil, plus on détecte de départs… mais au prix d'une explosion des fausses alertes.</a:t>
+            </a:r>
+          </a:p>
+          <a:p>
+            <a:r>
+              <a:rPr lang="fr-FR" b="1" dirty="0"/>
+              <a:t>Seuil retenu : 0.551</a:t>
+            </a:r>
+          </a:p>
+          <a:p>
+            <a:r>
+              <a:rPr lang="fr-FR" dirty="0"/>
+              <a:t>Contrainte métier : </a:t>
+            </a:r>
+            <a:r>
+              <a:rPr lang="fr-FR" b="1" dirty="0"/>
+              <a:t>rappel ≥ 68 %</a:t>
+            </a:r>
+            <a:r>
+              <a:rPr lang="fr-FR" dirty="0"/>
+              <a:t> (ne pas rater de départ)</a:t>
+            </a:r>
+          </a:p>
+          <a:p>
+            <a:endParaRPr lang="fr-FR" dirty="0"/>
+          </a:p>
+          <a:p>
+            <a:r>
+              <a:rPr lang="fr-FR" b="1" dirty="0"/>
+              <a:t>Interprétation</a:t>
+            </a:r>
+          </a:p>
+          <a:p>
+            <a:r>
+              <a:rPr lang="fr-FR" b="1" dirty="0"/>
+              <a:t> 70 % des départs réels sont détectés</a:t>
+            </a:r>
+            <a:endParaRPr lang="fr-FR" dirty="0"/>
+          </a:p>
+          <a:p>
+            <a:r>
+              <a:rPr lang="fr-FR" dirty="0"/>
+              <a:t> </a:t>
+            </a:r>
+            <a:r>
+              <a:rPr lang="fr-FR" b="1" dirty="0"/>
+              <a:t>47 % des alertes sont correctes</a:t>
+            </a:r>
+            <a:r>
+              <a:rPr lang="fr-FR" dirty="0"/>
+              <a:t> (1 alerte sur 2 est un faux positif)</a:t>
+            </a:r>
+          </a:p>
+          <a:p>
+            <a:r>
+              <a:rPr lang="fr-FR" dirty="0"/>
+              <a:t> </a:t>
+            </a:r>
+            <a:r>
+              <a:rPr lang="fr-FR" b="1" dirty="0"/>
+              <a:t>F1 = 0.56</a:t>
+            </a:r>
+            <a:r>
+              <a:rPr lang="fr-FR" dirty="0"/>
+              <a:t> → bon compromis global pour un problème déséquilibré</a:t>
+            </a:r>
+          </a:p>
+          <a:p>
+            <a:endParaRPr lang="fr-FR" b="1" dirty="0"/>
+          </a:p>
+          <a:p>
+            <a:r>
+              <a:rPr lang="fr-FR" dirty="0"/>
+              <a:t>Le seuil a été choisi pour </a:t>
+            </a:r>
+            <a:r>
+              <a:rPr lang="fr-FR" b="1" dirty="0"/>
+              <a:t>maximiser la détection des départs</a:t>
+            </a:r>
+            <a:r>
+              <a:rPr lang="fr-FR" dirty="0"/>
+              <a:t> tout en gardant une précision acceptable — cohérent avec un objectif de </a:t>
+            </a:r>
+            <a:r>
+              <a:rPr lang="fr-FR" b="1" dirty="0"/>
+              <a:t>sécurité / surveillance</a:t>
+            </a:r>
+            <a:r>
+              <a:rPr lang="fr-FR" dirty="0"/>
+              <a:t>, où rater un départ coûte plus cher qu'une fausse alerte.</a:t>
+            </a:r>
+          </a:p>
+          <a:p>
+            <a:endParaRPr lang="fr-FR" dirty="0"/>
+          </a:p>
+        </p:txBody>
+      </p:sp>
+      <p:sp>
+        <p:nvSpPr>
+          <p:cNvPr id="4" name="Espace réservé du numéro de diapositive 3">
+            <a:extLst>
+              <a:ext uri="{FF2B5EF4-FFF2-40B4-BE49-F238E27FC236}">
+                <a16:creationId xmlns:a16="http://schemas.microsoft.com/office/drawing/2014/main" id="{743B32DC-7602-FC11-15FC-7163DB1390EB}"/>
+              </a:ext>
+            </a:extLst>
+          </p:cNvPr>
+          <p:cNvSpPr>
+            <a:spLocks noGrp="1"/>
+          </p:cNvSpPr>
+          <p:nvPr>
+            <p:ph type="sldNum" sz="quarter" idx="5"/>
+          </p:nvPr>
+        </p:nvSpPr>
+        <p:spPr/>
+        <p:txBody>
+          <a:bodyPr/>
+          <a:lstStyle/>
+          <a:p>
+            <a:pPr rtl="0"/>
+            <a:fld id="{C6B3AB32-59DF-41F1-9618-EDFBF5049629}" type="slidenum">
+              <a:rPr lang="fr-FR" noProof="0" smtClean="0"/>
+              <a:t>30</a:t>
+            </a:fld>
+            <a:endParaRPr lang="fr-FR" noProof="0"/>
+          </a:p>
+        </p:txBody>
+      </p:sp>
+    </p:spTree>
+    <p:extLst>
+      <p:ext uri="{BB962C8B-B14F-4D97-AF65-F5344CB8AC3E}">
+        <p14:creationId xmlns:p14="http://schemas.microsoft.com/office/powerpoint/2010/main" val="2177048887"/>
+      </p:ext>
+    </p:extLst>
+  </p:cSld>
+  <p:clrMapOvr>
+    <a:masterClrMapping/>
+  </p:clrMapOvr>
+</p:notes>
+</file>
+
+<file path=ppt/notesSlides/notesSlide28.xml><?xml version="1.0" encoding="utf-8"?>
 <p:notes xmlns:a="http://schemas.openxmlformats.org/drawingml/2006/main" xmlns:r="http://schemas.openxmlformats.org/officeDocument/2006/relationships" xmlns:p="http://schemas.openxmlformats.org/presentationml/2006/main">
   <p:cSld>
     <p:spTree>
@@ -3910,7 +4093,7 @@
 </p:notes>
 </file>
 
-<file path=ppt/notesSlides/notesSlide28.xml><?xml version="1.0" encoding="utf-8"?>
+<file path=ppt/notesSlides/notesSlide29.xml><?xml version="1.0" encoding="utf-8"?>
 <p:notes xmlns:a="http://schemas.openxmlformats.org/drawingml/2006/main" xmlns:r="http://schemas.openxmlformats.org/officeDocument/2006/relationships" xmlns:p="http://schemas.openxmlformats.org/presentationml/2006/main">
   <p:cSld>
     <p:spTree>
@@ -4112,7 +4295,132 @@
 </p:notes>
 </file>
 
-<file path=ppt/notesSlides/notesSlide29.xml><?xml version="1.0" encoding="utf-8"?>
+<file path=ppt/notesSlides/notesSlide3.xml><?xml version="1.0" encoding="utf-8"?>
+<p:notes xmlns:a="http://schemas.openxmlformats.org/drawingml/2006/main" xmlns:r="http://schemas.openxmlformats.org/officeDocument/2006/relationships" xmlns:p="http://schemas.openxmlformats.org/presentationml/2006/main">
+  <p:cSld>
+    <p:spTree>
+      <p:nvGrpSpPr>
+        <p:cNvPr id="1" name=""/>
+        <p:cNvGrpSpPr/>
+        <p:nvPr/>
+      </p:nvGrpSpPr>
+      <p:grpSpPr>
+        <a:xfrm>
+          <a:off x="0" y="0"/>
+          <a:ext cx="0" cy="0"/>
+          <a:chOff x="0" y="0"/>
+          <a:chExt cx="0" cy="0"/>
+        </a:xfrm>
+      </p:grpSpPr>
+      <p:sp>
+        <p:nvSpPr>
+          <p:cNvPr id="2" name="Espace réservé de l'image des diapositives 1"/>
+          <p:cNvSpPr>
+            <a:spLocks noGrp="1" noRot="1" noChangeAspect="1"/>
+          </p:cNvSpPr>
+          <p:nvPr>
+            <p:ph type="sldImg"/>
+          </p:nvPr>
+        </p:nvSpPr>
+        <p:spPr/>
+      </p:sp>
+      <p:sp>
+        <p:nvSpPr>
+          <p:cNvPr id="3" name="Espace réservé des notes 2"/>
+          <p:cNvSpPr>
+            <a:spLocks noGrp="1"/>
+          </p:cNvSpPr>
+          <p:nvPr>
+            <p:ph type="body" idx="1"/>
+          </p:nvPr>
+        </p:nvSpPr>
+        <p:spPr/>
+        <p:txBody>
+          <a:bodyPr/>
+          <a:lstStyle/>
+          <a:p>
+            <a:r>
+              <a:rPr lang="fr-FR" dirty="0"/>
+              <a:t>Pour ce faire j’ai utilisé les techniques de machines </a:t>
+            </a:r>
+            <a:r>
+              <a:rPr lang="fr-FR" dirty="0" err="1"/>
+              <a:t>learning</a:t>
+            </a:r>
+            <a:r>
+              <a:rPr lang="fr-FR" dirty="0"/>
+              <a:t> basé sur…</a:t>
+            </a:r>
+          </a:p>
+          <a:p>
+            <a:endParaRPr lang="fr-FR" dirty="0"/>
+          </a:p>
+          <a:p>
+            <a:r>
+              <a:rPr lang="fr-FR" dirty="0"/>
+              <a:t>Stack : </a:t>
+            </a:r>
+            <a:r>
+              <a:rPr lang="fr-FR" dirty="0" err="1"/>
+              <a:t>Jupyter</a:t>
+            </a:r>
+            <a:r>
+              <a:rPr lang="fr-FR" dirty="0"/>
+              <a:t> + Python, UV Package, Excel</a:t>
+            </a:r>
+          </a:p>
+          <a:p>
+            <a:endParaRPr lang="fr-FR" dirty="0"/>
+          </a:p>
+          <a:p>
+            <a:r>
+              <a:rPr lang="fr-FR" dirty="0"/>
+              <a:t>Machine Learning</a:t>
+            </a:r>
+          </a:p>
+          <a:p>
+            <a:endParaRPr lang="fr-FR" dirty="0"/>
+          </a:p>
+        </p:txBody>
+      </p:sp>
+      <p:sp>
+        <p:nvSpPr>
+          <p:cNvPr id="4" name="Espace réservé du numéro de diapositive 3"/>
+          <p:cNvSpPr>
+            <a:spLocks noGrp="1"/>
+          </p:cNvSpPr>
+          <p:nvPr>
+            <p:ph type="sldNum" sz="quarter" idx="5"/>
+          </p:nvPr>
+        </p:nvSpPr>
+        <p:spPr/>
+        <p:txBody>
+          <a:bodyPr/>
+          <a:lstStyle/>
+          <a:p>
+            <a:pPr rtl="0"/>
+            <a:fld id="{C6B3AB32-59DF-41F1-9618-EDFBF5049629}" type="slidenum">
+              <a:rPr lang="fr-FR" noProof="0" smtClean="0"/>
+              <a:t>3</a:t>
+            </a:fld>
+            <a:endParaRPr lang="fr-FR" noProof="0"/>
+          </a:p>
+        </p:txBody>
+      </p:sp>
+    </p:spTree>
+    <p:extLst>
+      <p:ext uri="{BB962C8B-B14F-4D97-AF65-F5344CB8AC3E}">
+        <p14:creationId xmlns:p14="http://schemas.microsoft.com/office/powerpoint/2010/main" val="2894453939"/>
+      </p:ext>
+    </p:extLst>
+  </p:cSld>
+  <p:clrMapOvr>
+    <a:masterClrMapping/>
+  </p:clrMapOvr>
+</p:notes>
+</file>
+
+<file path=ppt/notesSlides/notesSlide30.xml><?xml version="1.0" encoding="utf-8"?>
 <p:notes xmlns:a="http://schemas.openxmlformats.org/drawingml/2006/main" xmlns:r="http://schemas.openxmlformats.org/officeDocument/2006/relationships" xmlns:p="http://schemas.openxmlformats.org/presentationml/2006/main">
   <p:cSld>
     <p:spTree>
@@ -4357,7 +4665,1086 @@
 </p:notes>
 </file>
 
-<file path=ppt/notesSlides/notesSlide3.xml><?xml version="1.0" encoding="utf-8"?>
+<file path=ppt/notesSlides/notesSlide31.xml><?xml version="1.0" encoding="utf-8"?>
+<p:notes xmlns:a="http://schemas.openxmlformats.org/drawingml/2006/main" xmlns:r="http://schemas.openxmlformats.org/officeDocument/2006/relationships" xmlns:p="http://schemas.openxmlformats.org/presentationml/2006/main">
+  <p:cSld>
+    <p:spTree>
+      <p:nvGrpSpPr>
+        <p:cNvPr id="1" name="">
+          <a:extLst>
+            <a:ext uri="{FF2B5EF4-FFF2-40B4-BE49-F238E27FC236}">
+              <a16:creationId xmlns:a16="http://schemas.microsoft.com/office/drawing/2014/main" id="{41767EAC-48AB-45D2-1772-B2D8D96F553C}"/>
+            </a:ext>
+          </a:extLst>
+        </p:cNvPr>
+        <p:cNvGrpSpPr/>
+        <p:nvPr/>
+      </p:nvGrpSpPr>
+      <p:grpSpPr>
+        <a:xfrm>
+          <a:off x="0" y="0"/>
+          <a:ext cx="0" cy="0"/>
+          <a:chOff x="0" y="0"/>
+          <a:chExt cx="0" cy="0"/>
+        </a:xfrm>
+      </p:grpSpPr>
+      <p:sp>
+        <p:nvSpPr>
+          <p:cNvPr id="2" name="Espace réservé de l'image des diapositives 1">
+            <a:extLst>
+              <a:ext uri="{FF2B5EF4-FFF2-40B4-BE49-F238E27FC236}">
+                <a16:creationId xmlns:a16="http://schemas.microsoft.com/office/drawing/2014/main" id="{2024354F-EB29-5AD9-752E-A3AA3BB06E5F}"/>
+              </a:ext>
+            </a:extLst>
+          </p:cNvPr>
+          <p:cNvSpPr>
+            <a:spLocks noGrp="1" noRot="1" noChangeAspect="1"/>
+          </p:cNvSpPr>
+          <p:nvPr>
+            <p:ph type="sldImg"/>
+          </p:nvPr>
+        </p:nvSpPr>
+        <p:spPr/>
+        <p:txBody>
+          <a:bodyPr/>
+          <a:lstStyle/>
+          <a:p>
+            <a:endParaRPr lang="fr-FR"/>
+          </a:p>
+        </p:txBody>
+      </p:sp>
+      <p:sp>
+        <p:nvSpPr>
+          <p:cNvPr id="3" name="Espace réservé des notes 2">
+            <a:extLst>
+              <a:ext uri="{FF2B5EF4-FFF2-40B4-BE49-F238E27FC236}">
+                <a16:creationId xmlns:a16="http://schemas.microsoft.com/office/drawing/2014/main" id="{31D963A7-BDC3-4C18-E60B-B092A0243A07}"/>
+              </a:ext>
+            </a:extLst>
+          </p:cNvPr>
+          <p:cNvSpPr>
+            <a:spLocks noGrp="1"/>
+          </p:cNvSpPr>
+          <p:nvPr>
+            <p:ph type="body" idx="1"/>
+          </p:nvPr>
+        </p:nvSpPr>
+        <p:spPr/>
+        <p:txBody>
+          <a:bodyPr/>
+          <a:lstStyle/>
+          <a:p>
+            <a:pPr marL="0" marR="0" lvl="0" indent="0" algn="l" defTabSz="914400" rtl="0" eaLnBrk="1" fontAlgn="auto" latinLnBrk="0" hangingPunct="1">
+              <a:lnSpc>
+                <a:spcPct val="100000"/>
+              </a:lnSpc>
+              <a:spcBef>
+                <a:spcPts val="0"/>
+              </a:spcBef>
+              <a:spcAft>
+                <a:spcPts val="0"/>
+              </a:spcAft>
+              <a:buClrTx/>
+              <a:buSzTx/>
+              <a:buFontTx/>
+              <a:buNone/>
+              <a:tabLst/>
+              <a:defRPr/>
+            </a:pPr>
+            <a:r>
+              <a:rPr lang="fr-FR" sz="1200" b="1" kern="1200" dirty="0" err="1">
+                <a:solidFill>
+                  <a:schemeClr val="tx1"/>
+                </a:solidFill>
+                <a:effectLst/>
+                <a:latin typeface="+mn-lt"/>
+                <a:ea typeface="+mn-ea"/>
+                <a:cs typeface="+mn-cs"/>
+              </a:rPr>
+              <a:t>features</a:t>
+            </a:r>
+            <a:r>
+              <a:rPr lang="fr-FR" sz="1200" b="1" kern="1200" dirty="0">
+                <a:solidFill>
+                  <a:schemeClr val="tx1"/>
+                </a:solidFill>
+                <a:effectLst/>
+                <a:latin typeface="+mn-lt"/>
+                <a:ea typeface="+mn-ea"/>
+                <a:cs typeface="+mn-cs"/>
+              </a:rPr>
+              <a:t> importances globales SHAP</a:t>
+            </a:r>
+            <a:endParaRPr lang="fr-FR" sz="1200" b="0" kern="1200" dirty="0">
+              <a:solidFill>
+                <a:schemeClr val="tx1"/>
+              </a:solidFill>
+              <a:effectLst/>
+              <a:latin typeface="+mn-lt"/>
+              <a:ea typeface="+mn-ea"/>
+              <a:cs typeface="+mn-cs"/>
+            </a:endParaRPr>
+          </a:p>
+          <a:p>
+            <a:endParaRPr lang="fr-FR" sz="1200" b="0" kern="1200" dirty="0">
+              <a:solidFill>
+                <a:schemeClr val="tx1"/>
+              </a:solidFill>
+              <a:effectLst/>
+              <a:latin typeface="+mn-lt"/>
+              <a:ea typeface="+mn-ea"/>
+              <a:cs typeface="+mn-cs"/>
+            </a:endParaRPr>
+          </a:p>
+          <a:p>
+            <a:r>
+              <a:rPr lang="fr-FR" sz="1200" b="0" kern="1200" dirty="0">
+                <a:solidFill>
+                  <a:schemeClr val="tx1"/>
+                </a:solidFill>
+                <a:effectLst/>
+                <a:latin typeface="+mn-lt"/>
+                <a:ea typeface="+mn-ea"/>
+                <a:cs typeface="+mn-cs"/>
+              </a:rPr>
+              <a:t>Visualise les </a:t>
+            </a:r>
+            <a:r>
+              <a:rPr lang="fr-FR" sz="1200" b="0" kern="1200" dirty="0" err="1">
+                <a:solidFill>
+                  <a:schemeClr val="tx1"/>
+                </a:solidFill>
+                <a:effectLst/>
+                <a:latin typeface="+mn-lt"/>
+                <a:ea typeface="+mn-ea"/>
+                <a:cs typeface="+mn-cs"/>
+              </a:rPr>
+              <a:t>features</a:t>
+            </a:r>
+            <a:r>
+              <a:rPr lang="fr-FR" sz="1200" b="0" kern="1200" dirty="0">
+                <a:solidFill>
+                  <a:schemeClr val="tx1"/>
+                </a:solidFill>
+                <a:effectLst/>
+                <a:latin typeface="+mn-lt"/>
+                <a:ea typeface="+mn-ea"/>
+                <a:cs typeface="+mn-cs"/>
+              </a:rPr>
+              <a:t> ayant le plus de poids dans le facteur de démission</a:t>
+            </a:r>
+          </a:p>
+        </p:txBody>
+      </p:sp>
+      <p:sp>
+        <p:nvSpPr>
+          <p:cNvPr id="4" name="Espace réservé du numéro de diapositive 3">
+            <a:extLst>
+              <a:ext uri="{FF2B5EF4-FFF2-40B4-BE49-F238E27FC236}">
+                <a16:creationId xmlns:a16="http://schemas.microsoft.com/office/drawing/2014/main" id="{968FB8C0-5012-ACE1-F356-A7A637CE6280}"/>
+              </a:ext>
+            </a:extLst>
+          </p:cNvPr>
+          <p:cNvSpPr>
+            <a:spLocks noGrp="1"/>
+          </p:cNvSpPr>
+          <p:nvPr>
+            <p:ph type="sldNum" sz="quarter" idx="5"/>
+          </p:nvPr>
+        </p:nvSpPr>
+        <p:spPr/>
+        <p:txBody>
+          <a:bodyPr/>
+          <a:lstStyle/>
+          <a:p>
+            <a:pPr rtl="0"/>
+            <a:fld id="{C6B3AB32-59DF-41F1-9618-EDFBF5049629}" type="slidenum">
+              <a:rPr lang="fr-FR" noProof="0" smtClean="0"/>
+              <a:t>35</a:t>
+            </a:fld>
+            <a:endParaRPr lang="fr-FR" noProof="0"/>
+          </a:p>
+        </p:txBody>
+      </p:sp>
+    </p:spTree>
+    <p:extLst>
+      <p:ext uri="{BB962C8B-B14F-4D97-AF65-F5344CB8AC3E}">
+        <p14:creationId xmlns:p14="http://schemas.microsoft.com/office/powerpoint/2010/main" val="1338158569"/>
+      </p:ext>
+    </p:extLst>
+  </p:cSld>
+  <p:clrMapOvr>
+    <a:masterClrMapping/>
+  </p:clrMapOvr>
+</p:notes>
+</file>
+
+<file path=ppt/notesSlides/notesSlide32.xml><?xml version="1.0" encoding="utf-8"?>
+<p:notes xmlns:a="http://schemas.openxmlformats.org/drawingml/2006/main" xmlns:r="http://schemas.openxmlformats.org/officeDocument/2006/relationships" xmlns:p="http://schemas.openxmlformats.org/presentationml/2006/main">
+  <p:cSld>
+    <p:spTree>
+      <p:nvGrpSpPr>
+        <p:cNvPr id="1" name="">
+          <a:extLst>
+            <a:ext uri="{FF2B5EF4-FFF2-40B4-BE49-F238E27FC236}">
+              <a16:creationId xmlns:a16="http://schemas.microsoft.com/office/drawing/2014/main" id="{705DDA38-138E-34EB-37A3-628D1050E27B}"/>
+            </a:ext>
+          </a:extLst>
+        </p:cNvPr>
+        <p:cNvGrpSpPr/>
+        <p:nvPr/>
+      </p:nvGrpSpPr>
+      <p:grpSpPr>
+        <a:xfrm>
+          <a:off x="0" y="0"/>
+          <a:ext cx="0" cy="0"/>
+          <a:chOff x="0" y="0"/>
+          <a:chExt cx="0" cy="0"/>
+        </a:xfrm>
+      </p:grpSpPr>
+      <p:sp>
+        <p:nvSpPr>
+          <p:cNvPr id="2" name="Espace réservé de l'image des diapositives 1">
+            <a:extLst>
+              <a:ext uri="{FF2B5EF4-FFF2-40B4-BE49-F238E27FC236}">
+                <a16:creationId xmlns:a16="http://schemas.microsoft.com/office/drawing/2014/main" id="{55AB7AE7-873F-C5BC-B419-742C844D087D}"/>
+              </a:ext>
+            </a:extLst>
+          </p:cNvPr>
+          <p:cNvSpPr>
+            <a:spLocks noGrp="1" noRot="1" noChangeAspect="1"/>
+          </p:cNvSpPr>
+          <p:nvPr>
+            <p:ph type="sldImg"/>
+          </p:nvPr>
+        </p:nvSpPr>
+        <p:spPr/>
+        <p:txBody>
+          <a:bodyPr/>
+          <a:lstStyle/>
+          <a:p>
+            <a:endParaRPr lang="fr-FR"/>
+          </a:p>
+        </p:txBody>
+      </p:sp>
+      <p:sp>
+        <p:nvSpPr>
+          <p:cNvPr id="3" name="Espace réservé des notes 2">
+            <a:extLst>
+              <a:ext uri="{FF2B5EF4-FFF2-40B4-BE49-F238E27FC236}">
+                <a16:creationId xmlns:a16="http://schemas.microsoft.com/office/drawing/2014/main" id="{DFCF48E8-768D-4103-7985-2649EFB4FE44}"/>
+              </a:ext>
+            </a:extLst>
+          </p:cNvPr>
+          <p:cNvSpPr>
+            <a:spLocks noGrp="1"/>
+          </p:cNvSpPr>
+          <p:nvPr>
+            <p:ph type="body" idx="1"/>
+          </p:nvPr>
+        </p:nvSpPr>
+        <p:spPr/>
+        <p:txBody>
+          <a:bodyPr/>
+          <a:lstStyle/>
+          <a:p>
+            <a:pPr marL="0" marR="0" lvl="0" indent="0" algn="l" defTabSz="914400" rtl="0" eaLnBrk="1" fontAlgn="auto" latinLnBrk="0" hangingPunct="1">
+              <a:lnSpc>
+                <a:spcPct val="100000"/>
+              </a:lnSpc>
+              <a:spcBef>
+                <a:spcPts val="0"/>
+              </a:spcBef>
+              <a:spcAft>
+                <a:spcPts val="0"/>
+              </a:spcAft>
+              <a:buClrTx/>
+              <a:buSzTx/>
+              <a:buFontTx/>
+              <a:buNone/>
+              <a:tabLst/>
+              <a:defRPr/>
+            </a:pPr>
+            <a:r>
+              <a:rPr lang="fr-FR" sz="1200" b="1" kern="1200" dirty="0" err="1">
+                <a:solidFill>
+                  <a:schemeClr val="tx1"/>
+                </a:solidFill>
+                <a:effectLst/>
+                <a:latin typeface="+mn-lt"/>
+                <a:ea typeface="+mn-ea"/>
+                <a:cs typeface="+mn-cs"/>
+              </a:rPr>
+              <a:t>features</a:t>
+            </a:r>
+            <a:r>
+              <a:rPr lang="fr-FR" sz="1200" b="1" kern="1200" dirty="0">
+                <a:solidFill>
+                  <a:schemeClr val="tx1"/>
+                </a:solidFill>
+                <a:effectLst/>
+                <a:latin typeface="+mn-lt"/>
+                <a:ea typeface="+mn-ea"/>
+                <a:cs typeface="+mn-cs"/>
+              </a:rPr>
+              <a:t> importances pour le groupe </a:t>
+            </a:r>
+            <a:r>
+              <a:rPr lang="fr-FR" sz="1200" b="1" kern="1200" dirty="0" err="1">
+                <a:solidFill>
+                  <a:schemeClr val="tx1"/>
+                </a:solidFill>
+                <a:effectLst/>
+                <a:latin typeface="+mn-lt"/>
+                <a:ea typeface="+mn-ea"/>
+                <a:cs typeface="+mn-cs"/>
+              </a:rPr>
+              <a:t>median</a:t>
+            </a:r>
+            <a:r>
+              <a:rPr lang="fr-FR" sz="1200" b="1" kern="1200" dirty="0">
+                <a:solidFill>
+                  <a:schemeClr val="tx1"/>
+                </a:solidFill>
+                <a:effectLst/>
+                <a:latin typeface="+mn-lt"/>
+                <a:ea typeface="+mn-ea"/>
+                <a:cs typeface="+mn-cs"/>
+              </a:rPr>
+              <a:t> TP</a:t>
+            </a:r>
+            <a:r>
+              <a:rPr lang="fr-FR" sz="1200" b="0" kern="1200" dirty="0">
+                <a:solidFill>
+                  <a:schemeClr val="tx1"/>
+                </a:solidFill>
+                <a:effectLst/>
+                <a:latin typeface="+mn-lt"/>
+                <a:ea typeface="+mn-ea"/>
+                <a:cs typeface="+mn-cs"/>
+              </a:rPr>
+              <a:t> </a:t>
+            </a:r>
+            <a:r>
+              <a:rPr lang="fr-FR" sz="1200" b="1" kern="1200" dirty="0">
+                <a:solidFill>
+                  <a:schemeClr val="tx1"/>
+                </a:solidFill>
+                <a:effectLst/>
+                <a:latin typeface="+mn-lt"/>
+                <a:ea typeface="+mn-ea"/>
+                <a:cs typeface="+mn-cs"/>
+              </a:rPr>
+              <a:t>SHAP (1 échantillon)</a:t>
+            </a:r>
+            <a:endParaRPr lang="fr-FR" sz="1200" b="0" kern="1200" dirty="0">
+              <a:solidFill>
+                <a:schemeClr val="tx1"/>
+              </a:solidFill>
+              <a:effectLst/>
+              <a:latin typeface="+mn-lt"/>
+              <a:ea typeface="+mn-ea"/>
+              <a:cs typeface="+mn-cs"/>
+            </a:endParaRPr>
+          </a:p>
+          <a:p>
+            <a:endParaRPr lang="fr-FR" sz="1200" b="0" kern="1200" dirty="0">
+              <a:solidFill>
+                <a:schemeClr val="tx1"/>
+              </a:solidFill>
+              <a:effectLst/>
+              <a:latin typeface="+mn-lt"/>
+              <a:ea typeface="+mn-ea"/>
+              <a:cs typeface="+mn-cs"/>
+            </a:endParaRPr>
+          </a:p>
+          <a:p>
+            <a:r>
+              <a:rPr lang="fr-FR" dirty="0"/>
+              <a:t>On prend la </a:t>
+            </a:r>
+            <a:r>
+              <a:rPr lang="fr-FR" b="1" dirty="0"/>
+              <a:t>contribution SHAP médiane par </a:t>
+            </a:r>
+            <a:r>
+              <a:rPr lang="fr-FR" b="1" dirty="0" err="1"/>
+              <a:t>feature</a:t>
+            </a:r>
+            <a:r>
+              <a:rPr lang="fr-FR" b="1" dirty="0"/>
+              <a:t> pour un groupe donné (ici TP)</a:t>
+            </a:r>
+            <a:endParaRPr lang="fr-FR" sz="1200" b="0" kern="1200" dirty="0">
+              <a:solidFill>
+                <a:schemeClr val="tx1"/>
+              </a:solidFill>
+              <a:effectLst/>
+              <a:latin typeface="+mn-lt"/>
+              <a:ea typeface="+mn-ea"/>
+              <a:cs typeface="+mn-cs"/>
+            </a:endParaRPr>
+          </a:p>
+          <a:p>
+            <a:r>
+              <a:rPr lang="fr-FR" dirty="0"/>
+              <a:t>Dans ce groupe, dans quelle direction chaque variable influence-t-elle typiquement la prédiction ?</a:t>
+            </a:r>
+          </a:p>
+          <a:p>
+            <a:endParaRPr lang="fr-FR" sz="1200" b="0" kern="1200" dirty="0">
+              <a:solidFill>
+                <a:schemeClr val="tx1"/>
+              </a:solidFill>
+              <a:effectLst/>
+              <a:latin typeface="+mn-lt"/>
+              <a:ea typeface="+mn-ea"/>
+              <a:cs typeface="+mn-cs"/>
+            </a:endParaRPr>
+          </a:p>
+          <a:p>
+            <a:r>
+              <a:rPr lang="fr-FR" sz="1200" b="0" kern="1200" dirty="0">
+                <a:solidFill>
+                  <a:schemeClr val="tx1"/>
+                </a:solidFill>
+                <a:effectLst/>
+                <a:latin typeface="+mn-lt"/>
+                <a:ea typeface="+mn-ea"/>
+                <a:cs typeface="+mn-cs"/>
+              </a:rPr>
+              <a:t>On sélectionne un </a:t>
+            </a:r>
+            <a:r>
+              <a:rPr lang="fr-FR" dirty="0"/>
+              <a:t>individu qui est celui dont les SHAP values sont les plus proches de la médiane du groupe</a:t>
+            </a:r>
+            <a:endParaRPr lang="fr-FR" sz="1200" b="0" kern="1200" dirty="0">
+              <a:solidFill>
+                <a:schemeClr val="tx1"/>
+              </a:solidFill>
+              <a:effectLst/>
+              <a:latin typeface="+mn-lt"/>
+              <a:ea typeface="+mn-ea"/>
+              <a:cs typeface="+mn-cs"/>
+            </a:endParaRPr>
+          </a:p>
+          <a:p>
+            <a:endParaRPr lang="fr-FR" sz="1200" b="0" kern="1200" dirty="0">
+              <a:solidFill>
+                <a:schemeClr val="tx1"/>
+              </a:solidFill>
+              <a:effectLst/>
+              <a:latin typeface="+mn-lt"/>
+              <a:ea typeface="+mn-ea"/>
+              <a:cs typeface="+mn-cs"/>
+            </a:endParaRPr>
+          </a:p>
+          <a:p>
+            <a:r>
+              <a:rPr lang="fr-FR" dirty="0"/>
+              <a:t>Pour cet individu représentatif du groupe:</a:t>
+            </a:r>
+          </a:p>
+          <a:p>
+            <a:pPr marL="171450" indent="-171450">
+              <a:buFont typeface="Arial" panose="020B0604020202020204" pitchFamily="34" charset="0"/>
+              <a:buChar char="•"/>
+            </a:pPr>
+            <a:r>
+              <a:rPr lang="fr-FR" dirty="0"/>
+              <a:t>les heures supplémentaires constituent le principal facteur orientant les prédictions vers le départ</a:t>
+            </a:r>
+          </a:p>
+          <a:p>
+            <a:pPr marL="171450" indent="-171450">
+              <a:buFont typeface="Arial" panose="020B0604020202020204" pitchFamily="34" charset="0"/>
+              <a:buChar char="•"/>
+            </a:pPr>
+            <a:r>
+              <a:rPr lang="fr-FR" dirty="0"/>
+              <a:t>suivies par le nombre de participations au PEE, le niveau hiérarchique et l'appartenance au département Consulting</a:t>
+            </a:r>
+          </a:p>
+          <a:p>
+            <a:pPr marL="171450" indent="-171450">
+              <a:buFont typeface="Arial" panose="020B0604020202020204" pitchFamily="34" charset="0"/>
+              <a:buChar char="•"/>
+            </a:pPr>
+            <a:r>
+              <a:rPr lang="fr-FR" dirty="0"/>
+              <a:t>À l'inverse, le nombre d'expériences précédentes contribue à orienter les prédictions vers le maintien</a:t>
+            </a:r>
+            <a:endParaRPr lang="fr-FR" sz="1200" b="0" kern="1200" dirty="0">
+              <a:solidFill>
+                <a:schemeClr val="tx1"/>
+              </a:solidFill>
+              <a:effectLst/>
+              <a:latin typeface="+mn-lt"/>
+              <a:ea typeface="+mn-ea"/>
+              <a:cs typeface="+mn-cs"/>
+            </a:endParaRPr>
+          </a:p>
+        </p:txBody>
+      </p:sp>
+      <p:sp>
+        <p:nvSpPr>
+          <p:cNvPr id="4" name="Espace réservé du numéro de diapositive 3">
+            <a:extLst>
+              <a:ext uri="{FF2B5EF4-FFF2-40B4-BE49-F238E27FC236}">
+                <a16:creationId xmlns:a16="http://schemas.microsoft.com/office/drawing/2014/main" id="{2E6DBE43-51A0-07B5-E82B-BC7968B6FE24}"/>
+              </a:ext>
+            </a:extLst>
+          </p:cNvPr>
+          <p:cNvSpPr>
+            <a:spLocks noGrp="1"/>
+          </p:cNvSpPr>
+          <p:nvPr>
+            <p:ph type="sldNum" sz="quarter" idx="5"/>
+          </p:nvPr>
+        </p:nvSpPr>
+        <p:spPr/>
+        <p:txBody>
+          <a:bodyPr/>
+          <a:lstStyle/>
+          <a:p>
+            <a:pPr rtl="0"/>
+            <a:fld id="{C6B3AB32-59DF-41F1-9618-EDFBF5049629}" type="slidenum">
+              <a:rPr lang="fr-FR" noProof="0" smtClean="0"/>
+              <a:t>36</a:t>
+            </a:fld>
+            <a:endParaRPr lang="fr-FR" noProof="0"/>
+          </a:p>
+        </p:txBody>
+      </p:sp>
+    </p:spTree>
+    <p:extLst>
+      <p:ext uri="{BB962C8B-B14F-4D97-AF65-F5344CB8AC3E}">
+        <p14:creationId xmlns:p14="http://schemas.microsoft.com/office/powerpoint/2010/main" val="126324508"/>
+      </p:ext>
+    </p:extLst>
+  </p:cSld>
+  <p:clrMapOvr>
+    <a:masterClrMapping/>
+  </p:clrMapOvr>
+</p:notes>
+</file>
+
+<file path=ppt/notesSlides/notesSlide33.xml><?xml version="1.0" encoding="utf-8"?>
+<p:notes xmlns:a="http://schemas.openxmlformats.org/drawingml/2006/main" xmlns:r="http://schemas.openxmlformats.org/officeDocument/2006/relationships" xmlns:p="http://schemas.openxmlformats.org/presentationml/2006/main">
+  <p:cSld>
+    <p:spTree>
+      <p:nvGrpSpPr>
+        <p:cNvPr id="1" name="">
+          <a:extLst>
+            <a:ext uri="{FF2B5EF4-FFF2-40B4-BE49-F238E27FC236}">
+              <a16:creationId xmlns:a16="http://schemas.microsoft.com/office/drawing/2014/main" id="{5B5A59FB-FD10-1081-3906-358138570219}"/>
+            </a:ext>
+          </a:extLst>
+        </p:cNvPr>
+        <p:cNvGrpSpPr/>
+        <p:nvPr/>
+      </p:nvGrpSpPr>
+      <p:grpSpPr>
+        <a:xfrm>
+          <a:off x="0" y="0"/>
+          <a:ext cx="0" cy="0"/>
+          <a:chOff x="0" y="0"/>
+          <a:chExt cx="0" cy="0"/>
+        </a:xfrm>
+      </p:grpSpPr>
+      <p:sp>
+        <p:nvSpPr>
+          <p:cNvPr id="2" name="Espace réservé de l'image des diapositives 1">
+            <a:extLst>
+              <a:ext uri="{FF2B5EF4-FFF2-40B4-BE49-F238E27FC236}">
+                <a16:creationId xmlns:a16="http://schemas.microsoft.com/office/drawing/2014/main" id="{C8571FC5-A85E-C517-2507-11DD36433F64}"/>
+              </a:ext>
+            </a:extLst>
+          </p:cNvPr>
+          <p:cNvSpPr>
+            <a:spLocks noGrp="1" noRot="1" noChangeAspect="1"/>
+          </p:cNvSpPr>
+          <p:nvPr>
+            <p:ph type="sldImg"/>
+          </p:nvPr>
+        </p:nvSpPr>
+        <p:spPr/>
+        <p:txBody>
+          <a:bodyPr/>
+          <a:lstStyle/>
+          <a:p>
+            <a:endParaRPr lang="fr-FR"/>
+          </a:p>
+        </p:txBody>
+      </p:sp>
+      <p:sp>
+        <p:nvSpPr>
+          <p:cNvPr id="3" name="Espace réservé des notes 2">
+            <a:extLst>
+              <a:ext uri="{FF2B5EF4-FFF2-40B4-BE49-F238E27FC236}">
+                <a16:creationId xmlns:a16="http://schemas.microsoft.com/office/drawing/2014/main" id="{63EA0FDF-D7BE-C2FE-4A69-2BFB4784064F}"/>
+              </a:ext>
+            </a:extLst>
+          </p:cNvPr>
+          <p:cNvSpPr>
+            <a:spLocks noGrp="1"/>
+          </p:cNvSpPr>
+          <p:nvPr>
+            <p:ph type="body" idx="1"/>
+          </p:nvPr>
+        </p:nvSpPr>
+        <p:spPr/>
+        <p:txBody>
+          <a:bodyPr/>
+          <a:lstStyle/>
+          <a:p>
+            <a:r>
+              <a:rPr lang="fr-FR" dirty="0"/>
+              <a:t>Les  </a:t>
+            </a:r>
+            <a:r>
+              <a:rPr lang="fr-FR" dirty="0" err="1"/>
+              <a:t>contre-factuel</a:t>
+            </a:r>
+            <a:r>
+              <a:rPr lang="fr-FR" dirty="0"/>
+              <a:t> répond à la question </a:t>
+            </a:r>
+            <a:r>
+              <a:rPr lang="fr-FR" b="1" dirty="0"/>
+              <a:t>« que faudrait-il changer chez cet employé pour qu'il reste ? »</a:t>
+            </a:r>
+            <a:r>
+              <a:rPr lang="fr-FR" dirty="0"/>
+              <a:t> </a:t>
+            </a:r>
+          </a:p>
+          <a:p>
+            <a:r>
+              <a:rPr lang="fr-FR" dirty="0"/>
+              <a:t> il transforme une prédiction (« il va partir ») en </a:t>
+            </a:r>
+            <a:r>
+              <a:rPr lang="fr-FR" b="1" dirty="0"/>
+              <a:t>recommandation actionnable</a:t>
+            </a:r>
+            <a:r>
+              <a:rPr lang="fr-FR" dirty="0"/>
+              <a:t> pour les RH.</a:t>
+            </a:r>
+          </a:p>
+          <a:p>
+            <a:endParaRPr lang="fr-FR" dirty="0"/>
+          </a:p>
+          <a:p>
+            <a:r>
+              <a:rPr lang="fr-FR" dirty="0"/>
+              <a:t>Là où SHAP explique </a:t>
+            </a:r>
+            <a:r>
+              <a:rPr lang="fr-FR" b="1" dirty="0"/>
+              <a:t>pourquoi</a:t>
+            </a:r>
+            <a:r>
+              <a:rPr lang="fr-FR" dirty="0"/>
+              <a:t> le modèle prédit un départ, </a:t>
+            </a:r>
+            <a:r>
+              <a:rPr lang="fr-FR" dirty="0" err="1"/>
+              <a:t>DiCE</a:t>
+            </a:r>
+            <a:r>
+              <a:rPr lang="fr-FR" dirty="0"/>
+              <a:t> indique </a:t>
+            </a:r>
+            <a:r>
+              <a:rPr lang="fr-FR" b="1" dirty="0"/>
+              <a:t>quoi modifier concrètement</a:t>
+            </a:r>
+            <a:r>
+              <a:rPr lang="fr-FR" dirty="0"/>
+              <a:t> pour inverser la décision, en proposant les changements </a:t>
+            </a:r>
+            <a:r>
+              <a:rPr lang="fr-FR" b="1" dirty="0"/>
+              <a:t>les plus proches et les plus économiques</a:t>
+            </a:r>
+            <a:r>
+              <a:rPr lang="fr-FR" dirty="0"/>
+              <a:t> possibles.</a:t>
+            </a:r>
+          </a:p>
+        </p:txBody>
+      </p:sp>
+      <p:sp>
+        <p:nvSpPr>
+          <p:cNvPr id="4" name="Espace réservé du numéro de diapositive 3">
+            <a:extLst>
+              <a:ext uri="{FF2B5EF4-FFF2-40B4-BE49-F238E27FC236}">
+                <a16:creationId xmlns:a16="http://schemas.microsoft.com/office/drawing/2014/main" id="{2CDBA37F-7EA8-D297-EC14-12D5AE0DEDC1}"/>
+              </a:ext>
+            </a:extLst>
+          </p:cNvPr>
+          <p:cNvSpPr>
+            <a:spLocks noGrp="1"/>
+          </p:cNvSpPr>
+          <p:nvPr>
+            <p:ph type="sldNum" sz="quarter" idx="5"/>
+          </p:nvPr>
+        </p:nvSpPr>
+        <p:spPr/>
+        <p:txBody>
+          <a:bodyPr/>
+          <a:lstStyle/>
+          <a:p>
+            <a:pPr rtl="0"/>
+            <a:fld id="{C6B3AB32-59DF-41F1-9618-EDFBF5049629}" type="slidenum">
+              <a:rPr lang="fr-FR" noProof="0" smtClean="0"/>
+              <a:t>37</a:t>
+            </a:fld>
+            <a:endParaRPr lang="fr-FR" noProof="0"/>
+          </a:p>
+        </p:txBody>
+      </p:sp>
+    </p:spTree>
+    <p:extLst>
+      <p:ext uri="{BB962C8B-B14F-4D97-AF65-F5344CB8AC3E}">
+        <p14:creationId xmlns:p14="http://schemas.microsoft.com/office/powerpoint/2010/main" val="104220876"/>
+      </p:ext>
+    </p:extLst>
+  </p:cSld>
+  <p:clrMapOvr>
+    <a:masterClrMapping/>
+  </p:clrMapOvr>
+</p:notes>
+</file>
+
+<file path=ppt/notesSlides/notesSlide34.xml><?xml version="1.0" encoding="utf-8"?>
+<p:notes xmlns:a="http://schemas.openxmlformats.org/drawingml/2006/main" xmlns:r="http://schemas.openxmlformats.org/officeDocument/2006/relationships" xmlns:p="http://schemas.openxmlformats.org/presentationml/2006/main">
+  <p:cSld>
+    <p:spTree>
+      <p:nvGrpSpPr>
+        <p:cNvPr id="1" name=""/>
+        <p:cNvGrpSpPr/>
+        <p:nvPr/>
+      </p:nvGrpSpPr>
+      <p:grpSpPr>
+        <a:xfrm>
+          <a:off x="0" y="0"/>
+          <a:ext cx="0" cy="0"/>
+          <a:chOff x="0" y="0"/>
+          <a:chExt cx="0" cy="0"/>
+        </a:xfrm>
+      </p:grpSpPr>
+      <p:sp>
+        <p:nvSpPr>
+          <p:cNvPr id="2" name="Espace réservé de l'image des diapositives 1"/>
+          <p:cNvSpPr>
+            <a:spLocks noGrp="1" noRot="1" noChangeAspect="1"/>
+          </p:cNvSpPr>
+          <p:nvPr>
+            <p:ph type="sldImg"/>
+          </p:nvPr>
+        </p:nvSpPr>
+        <p:spPr/>
+      </p:sp>
+      <p:sp>
+        <p:nvSpPr>
+          <p:cNvPr id="3" name="Espace réservé des notes 2"/>
+          <p:cNvSpPr>
+            <a:spLocks noGrp="1"/>
+          </p:cNvSpPr>
+          <p:nvPr>
+            <p:ph type="body" idx="1"/>
+          </p:nvPr>
+        </p:nvSpPr>
+        <p:spPr/>
+        <p:txBody>
+          <a:bodyPr/>
+          <a:lstStyle/>
+          <a:p>
+            <a:pPr marL="0" marR="0" lvl="0" indent="0" algn="l" defTabSz="914400" rtl="0" eaLnBrk="1" fontAlgn="auto" latinLnBrk="0" hangingPunct="1">
+              <a:lnSpc>
+                <a:spcPct val="100000"/>
+              </a:lnSpc>
+              <a:spcBef>
+                <a:spcPts val="0"/>
+              </a:spcBef>
+              <a:spcAft>
+                <a:spcPts val="0"/>
+              </a:spcAft>
+              <a:buClrTx/>
+              <a:buSzTx/>
+              <a:buFontTx/>
+              <a:buNone/>
+              <a:tabLst/>
+              <a:defRPr/>
+            </a:pPr>
+            <a:r>
+              <a:rPr lang="fr-FR" dirty="0">
+                <a:latin typeface="Aptos" panose="020B0004020202020204" pitchFamily="34" charset="0"/>
+              </a:rPr>
+              <a:t>Ces résultats décrivent le comportement du modèle et doivent être interprétés comme des </a:t>
+            </a:r>
+            <a:r>
+              <a:rPr lang="fr-FR" b="1" dirty="0">
+                <a:latin typeface="Aptos" panose="020B0004020202020204" pitchFamily="34" charset="0"/>
+              </a:rPr>
+              <a:t>facteurs associés aux prédictions</a:t>
+            </a:r>
+            <a:r>
+              <a:rPr lang="fr-FR" dirty="0">
+                <a:latin typeface="Aptos" panose="020B0004020202020204" pitchFamily="34" charset="0"/>
+              </a:rPr>
+              <a:t>, et non comme des relations de causalité.</a:t>
+            </a:r>
+          </a:p>
+          <a:p>
+            <a:endParaRPr lang="fr-FR" dirty="0"/>
+          </a:p>
+        </p:txBody>
+      </p:sp>
+      <p:sp>
+        <p:nvSpPr>
+          <p:cNvPr id="4" name="Espace réservé du numéro de diapositive 3"/>
+          <p:cNvSpPr>
+            <a:spLocks noGrp="1"/>
+          </p:cNvSpPr>
+          <p:nvPr>
+            <p:ph type="sldNum" sz="quarter" idx="5"/>
+          </p:nvPr>
+        </p:nvSpPr>
+        <p:spPr/>
+        <p:txBody>
+          <a:bodyPr/>
+          <a:lstStyle/>
+          <a:p>
+            <a:pPr rtl="0"/>
+            <a:fld id="{C6B3AB32-59DF-41F1-9618-EDFBF5049629}" type="slidenum">
+              <a:rPr lang="fr-FR" noProof="0" smtClean="0"/>
+              <a:t>38</a:t>
+            </a:fld>
+            <a:endParaRPr lang="fr-FR" noProof="0"/>
+          </a:p>
+        </p:txBody>
+      </p:sp>
+    </p:spTree>
+    <p:extLst>
+      <p:ext uri="{BB962C8B-B14F-4D97-AF65-F5344CB8AC3E}">
+        <p14:creationId xmlns:p14="http://schemas.microsoft.com/office/powerpoint/2010/main" val="206496525"/>
+      </p:ext>
+    </p:extLst>
+  </p:cSld>
+  <p:clrMapOvr>
+    <a:masterClrMapping/>
+  </p:clrMapOvr>
+</p:notes>
+</file>
+
+<file path=ppt/notesSlides/notesSlide35.xml><?xml version="1.0" encoding="utf-8"?>
+<p:notes xmlns:a="http://schemas.openxmlformats.org/drawingml/2006/main" xmlns:r="http://schemas.openxmlformats.org/officeDocument/2006/relationships" xmlns:p="http://schemas.openxmlformats.org/presentationml/2006/main">
+  <p:cSld>
+    <p:spTree>
+      <p:nvGrpSpPr>
+        <p:cNvPr id="1" name="">
+          <a:extLst>
+            <a:ext uri="{FF2B5EF4-FFF2-40B4-BE49-F238E27FC236}">
+              <a16:creationId xmlns:a16="http://schemas.microsoft.com/office/drawing/2014/main" id="{D1896BE4-D62C-95FE-431D-9992E96A6E47}"/>
+            </a:ext>
+          </a:extLst>
+        </p:cNvPr>
+        <p:cNvGrpSpPr/>
+        <p:nvPr/>
+      </p:nvGrpSpPr>
+      <p:grpSpPr>
+        <a:xfrm>
+          <a:off x="0" y="0"/>
+          <a:ext cx="0" cy="0"/>
+          <a:chOff x="0" y="0"/>
+          <a:chExt cx="0" cy="0"/>
+        </a:xfrm>
+      </p:grpSpPr>
+      <p:sp>
+        <p:nvSpPr>
+          <p:cNvPr id="2" name="Espace réservé de l'image des diapositives 1">
+            <a:extLst>
+              <a:ext uri="{FF2B5EF4-FFF2-40B4-BE49-F238E27FC236}">
+                <a16:creationId xmlns:a16="http://schemas.microsoft.com/office/drawing/2014/main" id="{A487A7E2-0B92-FB3D-8DE3-16823243DF6D}"/>
+              </a:ext>
+            </a:extLst>
+          </p:cNvPr>
+          <p:cNvSpPr>
+            <a:spLocks noGrp="1" noRot="1" noChangeAspect="1"/>
+          </p:cNvSpPr>
+          <p:nvPr>
+            <p:ph type="sldImg"/>
+          </p:nvPr>
+        </p:nvSpPr>
+        <p:spPr/>
+      </p:sp>
+      <p:sp>
+        <p:nvSpPr>
+          <p:cNvPr id="3" name="Espace réservé des notes 2">
+            <a:extLst>
+              <a:ext uri="{FF2B5EF4-FFF2-40B4-BE49-F238E27FC236}">
+                <a16:creationId xmlns:a16="http://schemas.microsoft.com/office/drawing/2014/main" id="{C92A35F3-19A4-9951-AFBB-A25D381A5CD9}"/>
+              </a:ext>
+            </a:extLst>
+          </p:cNvPr>
+          <p:cNvSpPr>
+            <a:spLocks noGrp="1"/>
+          </p:cNvSpPr>
+          <p:nvPr>
+            <p:ph type="body" idx="1"/>
+          </p:nvPr>
+        </p:nvSpPr>
+        <p:spPr/>
+        <p:txBody>
+          <a:bodyPr/>
+          <a:lstStyle/>
+          <a:p>
+            <a:endParaRPr lang="fr-FR" dirty="0"/>
+          </a:p>
+        </p:txBody>
+      </p:sp>
+      <p:sp>
+        <p:nvSpPr>
+          <p:cNvPr id="4" name="Espace réservé du numéro de diapositive 3">
+            <a:extLst>
+              <a:ext uri="{FF2B5EF4-FFF2-40B4-BE49-F238E27FC236}">
+                <a16:creationId xmlns:a16="http://schemas.microsoft.com/office/drawing/2014/main" id="{B9839FF4-B97C-6E5C-8260-E41EEBF012F7}"/>
+              </a:ext>
+            </a:extLst>
+          </p:cNvPr>
+          <p:cNvSpPr>
+            <a:spLocks noGrp="1"/>
+          </p:cNvSpPr>
+          <p:nvPr>
+            <p:ph type="sldNum" sz="quarter" idx="5"/>
+          </p:nvPr>
+        </p:nvSpPr>
+        <p:spPr/>
+        <p:txBody>
+          <a:bodyPr/>
+          <a:lstStyle/>
+          <a:p>
+            <a:pPr rtl="0"/>
+            <a:fld id="{C6B3AB32-59DF-41F1-9618-EDFBF5049629}" type="slidenum">
+              <a:rPr lang="fr-FR" noProof="0" smtClean="0"/>
+              <a:t>39</a:t>
+            </a:fld>
+            <a:endParaRPr lang="fr-FR" noProof="0"/>
+          </a:p>
+        </p:txBody>
+      </p:sp>
+    </p:spTree>
+    <p:extLst>
+      <p:ext uri="{BB962C8B-B14F-4D97-AF65-F5344CB8AC3E}">
+        <p14:creationId xmlns:p14="http://schemas.microsoft.com/office/powerpoint/2010/main" val="2668510016"/>
+      </p:ext>
+    </p:extLst>
+  </p:cSld>
+  <p:clrMapOvr>
+    <a:masterClrMapping/>
+  </p:clrMapOvr>
+</p:notes>
+</file>
+
+<file path=ppt/notesSlides/notesSlide36.xml><?xml version="1.0" encoding="utf-8"?>
+<p:notes xmlns:a="http://schemas.openxmlformats.org/drawingml/2006/main" xmlns:r="http://schemas.openxmlformats.org/officeDocument/2006/relationships" xmlns:p="http://schemas.openxmlformats.org/presentationml/2006/main">
+  <p:cSld>
+    <p:spTree>
+      <p:nvGrpSpPr>
+        <p:cNvPr id="1" name=""/>
+        <p:cNvGrpSpPr/>
+        <p:nvPr/>
+      </p:nvGrpSpPr>
+      <p:grpSpPr>
+        <a:xfrm>
+          <a:off x="0" y="0"/>
+          <a:ext cx="0" cy="0"/>
+          <a:chOff x="0" y="0"/>
+          <a:chExt cx="0" cy="0"/>
+        </a:xfrm>
+      </p:grpSpPr>
+      <p:sp>
+        <p:nvSpPr>
+          <p:cNvPr id="2" name="Espace réservé de l’image des diapositives 1"/>
+          <p:cNvSpPr>
+            <a:spLocks noGrp="1" noRot="1" noChangeAspect="1"/>
+          </p:cNvSpPr>
+          <p:nvPr>
+            <p:ph type="sldImg"/>
+          </p:nvPr>
+        </p:nvSpPr>
+        <p:spPr/>
+        <p:txBody>
+          <a:bodyPr/>
+          <a:lstStyle/>
+          <a:p>
+            <a:endParaRPr lang="fr-FR"/>
+          </a:p>
+        </p:txBody>
+      </p:sp>
+      <p:sp>
+        <p:nvSpPr>
+          <p:cNvPr id="3" name="Espace réservé des commentaires 2"/>
+          <p:cNvSpPr>
+            <a:spLocks noGrp="1"/>
+          </p:cNvSpPr>
+          <p:nvPr>
+            <p:ph type="body" idx="1"/>
+          </p:nvPr>
+        </p:nvSpPr>
+        <p:spPr/>
+        <p:txBody>
+          <a:bodyPr rtlCol="0"/>
+          <a:lstStyle/>
+          <a:p>
+            <a:pPr rtl="0"/>
+            <a:endParaRPr lang="fr-FR"/>
+          </a:p>
+        </p:txBody>
+      </p:sp>
+      <p:sp>
+        <p:nvSpPr>
+          <p:cNvPr id="4" name="Espace réservé du numéro de diapositive 3"/>
+          <p:cNvSpPr>
+            <a:spLocks noGrp="1"/>
+          </p:cNvSpPr>
+          <p:nvPr>
+            <p:ph type="sldNum" sz="quarter" idx="5"/>
+          </p:nvPr>
+        </p:nvSpPr>
+        <p:spPr/>
+        <p:txBody>
+          <a:bodyPr rtlCol="0"/>
+          <a:lstStyle/>
+          <a:p>
+            <a:pPr rtl="0"/>
+            <a:fld id="{C6B3AB32-59DF-41F1-9618-EDFBF5049629}" type="slidenum">
+              <a:rPr lang="fr-FR" smtClean="0"/>
+              <a:t>41</a:t>
+            </a:fld>
+            <a:endParaRPr lang="fr-FR"/>
+          </a:p>
+        </p:txBody>
+      </p:sp>
+    </p:spTree>
+    <p:extLst>
+      <p:ext uri="{BB962C8B-B14F-4D97-AF65-F5344CB8AC3E}">
+        <p14:creationId xmlns:p14="http://schemas.microsoft.com/office/powerpoint/2010/main" val="1046714131"/>
+      </p:ext>
+    </p:extLst>
+  </p:cSld>
+  <p:clrMapOvr>
+    <a:masterClrMapping/>
+  </p:clrMapOvr>
+</p:notes>
+</file>
+
+<file path=ppt/notesSlides/notesSlide4.xml><?xml version="1.0" encoding="utf-8"?>
 <p:notes xmlns:a="http://schemas.openxmlformats.org/drawingml/2006/main" xmlns:r="http://schemas.openxmlformats.org/officeDocument/2006/relationships" xmlns:p="http://schemas.openxmlformats.org/presentationml/2006/main">
   <p:cSld>
     <p:spTree>
@@ -4494,561 +5881,7 @@
 </p:notes>
 </file>
 
-<file path=ppt/notesSlides/notesSlide30.xml><?xml version="1.0" encoding="utf-8"?>
-<p:notes xmlns:a="http://schemas.openxmlformats.org/drawingml/2006/main" xmlns:r="http://schemas.openxmlformats.org/officeDocument/2006/relationships" xmlns:p="http://schemas.openxmlformats.org/presentationml/2006/main">
-  <p:cSld>
-    <p:spTree>
-      <p:nvGrpSpPr>
-        <p:cNvPr id="1" name="">
-          <a:extLst>
-            <a:ext uri="{FF2B5EF4-FFF2-40B4-BE49-F238E27FC236}">
-              <a16:creationId xmlns:a16="http://schemas.microsoft.com/office/drawing/2014/main" id="{41767EAC-48AB-45D2-1772-B2D8D96F553C}"/>
-            </a:ext>
-          </a:extLst>
-        </p:cNvPr>
-        <p:cNvGrpSpPr/>
-        <p:nvPr/>
-      </p:nvGrpSpPr>
-      <p:grpSpPr>
-        <a:xfrm>
-          <a:off x="0" y="0"/>
-          <a:ext cx="0" cy="0"/>
-          <a:chOff x="0" y="0"/>
-          <a:chExt cx="0" cy="0"/>
-        </a:xfrm>
-      </p:grpSpPr>
-      <p:sp>
-        <p:nvSpPr>
-          <p:cNvPr id="2" name="Espace réservé de l'image des diapositives 1">
-            <a:extLst>
-              <a:ext uri="{FF2B5EF4-FFF2-40B4-BE49-F238E27FC236}">
-                <a16:creationId xmlns:a16="http://schemas.microsoft.com/office/drawing/2014/main" id="{2024354F-EB29-5AD9-752E-A3AA3BB06E5F}"/>
-              </a:ext>
-            </a:extLst>
-          </p:cNvPr>
-          <p:cNvSpPr>
-            <a:spLocks noGrp="1" noRot="1" noChangeAspect="1"/>
-          </p:cNvSpPr>
-          <p:nvPr>
-            <p:ph type="sldImg"/>
-          </p:nvPr>
-        </p:nvSpPr>
-        <p:spPr/>
-        <p:txBody>
-          <a:bodyPr/>
-          <a:lstStyle/>
-          <a:p>
-            <a:endParaRPr lang="fr-FR"/>
-          </a:p>
-        </p:txBody>
-      </p:sp>
-      <p:sp>
-        <p:nvSpPr>
-          <p:cNvPr id="3" name="Espace réservé des notes 2">
-            <a:extLst>
-              <a:ext uri="{FF2B5EF4-FFF2-40B4-BE49-F238E27FC236}">
-                <a16:creationId xmlns:a16="http://schemas.microsoft.com/office/drawing/2014/main" id="{31D963A7-BDC3-4C18-E60B-B092A0243A07}"/>
-              </a:ext>
-            </a:extLst>
-          </p:cNvPr>
-          <p:cNvSpPr>
-            <a:spLocks noGrp="1"/>
-          </p:cNvSpPr>
-          <p:nvPr>
-            <p:ph type="body" idx="1"/>
-          </p:nvPr>
-        </p:nvSpPr>
-        <p:spPr/>
-        <p:txBody>
-          <a:bodyPr/>
-          <a:lstStyle/>
-          <a:p>
-            <a:r>
-              <a:rPr lang="fr-FR" sz="1200" b="0" kern="1200" dirty="0">
-                <a:solidFill>
-                  <a:schemeClr val="tx1"/>
-                </a:solidFill>
-                <a:effectLst/>
-                <a:latin typeface="+mn-lt"/>
-                <a:ea typeface="+mn-ea"/>
-                <a:cs typeface="+mn-cs"/>
-              </a:rPr>
-              <a:t>Visualise les </a:t>
-            </a:r>
-            <a:r>
-              <a:rPr lang="fr-FR" sz="1200" b="0" kern="1200" dirty="0" err="1">
-                <a:solidFill>
-                  <a:schemeClr val="tx1"/>
-                </a:solidFill>
-                <a:effectLst/>
-                <a:latin typeface="+mn-lt"/>
-                <a:ea typeface="+mn-ea"/>
-                <a:cs typeface="+mn-cs"/>
-              </a:rPr>
-              <a:t>features</a:t>
-            </a:r>
-            <a:r>
-              <a:rPr lang="fr-FR" sz="1200" b="0" kern="1200" dirty="0">
-                <a:solidFill>
-                  <a:schemeClr val="tx1"/>
-                </a:solidFill>
-                <a:effectLst/>
-                <a:latin typeface="+mn-lt"/>
-                <a:ea typeface="+mn-ea"/>
-                <a:cs typeface="+mn-cs"/>
-              </a:rPr>
-              <a:t> ayant le plus de poids dans le facteur de démission</a:t>
-            </a:r>
-          </a:p>
-        </p:txBody>
-      </p:sp>
-      <p:sp>
-        <p:nvSpPr>
-          <p:cNvPr id="4" name="Espace réservé du numéro de diapositive 3">
-            <a:extLst>
-              <a:ext uri="{FF2B5EF4-FFF2-40B4-BE49-F238E27FC236}">
-                <a16:creationId xmlns:a16="http://schemas.microsoft.com/office/drawing/2014/main" id="{968FB8C0-5012-ACE1-F356-A7A637CE6280}"/>
-              </a:ext>
-            </a:extLst>
-          </p:cNvPr>
-          <p:cNvSpPr>
-            <a:spLocks noGrp="1"/>
-          </p:cNvSpPr>
-          <p:nvPr>
-            <p:ph type="sldNum" sz="quarter" idx="5"/>
-          </p:nvPr>
-        </p:nvSpPr>
-        <p:spPr/>
-        <p:txBody>
-          <a:bodyPr/>
-          <a:lstStyle/>
-          <a:p>
-            <a:pPr rtl="0"/>
-            <a:fld id="{C6B3AB32-59DF-41F1-9618-EDFBF5049629}" type="slidenum">
-              <a:rPr lang="fr-FR" noProof="0" smtClean="0"/>
-              <a:t>35</a:t>
-            </a:fld>
-            <a:endParaRPr lang="fr-FR" noProof="0"/>
-          </a:p>
-        </p:txBody>
-      </p:sp>
-    </p:spTree>
-    <p:extLst>
-      <p:ext uri="{BB962C8B-B14F-4D97-AF65-F5344CB8AC3E}">
-        <p14:creationId xmlns:p14="http://schemas.microsoft.com/office/powerpoint/2010/main" val="1338158569"/>
-      </p:ext>
-    </p:extLst>
-  </p:cSld>
-  <p:clrMapOvr>
-    <a:masterClrMapping/>
-  </p:clrMapOvr>
-</p:notes>
-</file>
-
-<file path=ppt/notesSlides/notesSlide31.xml><?xml version="1.0" encoding="utf-8"?>
-<p:notes xmlns:a="http://schemas.openxmlformats.org/drawingml/2006/main" xmlns:r="http://schemas.openxmlformats.org/officeDocument/2006/relationships" xmlns:p="http://schemas.openxmlformats.org/presentationml/2006/main">
-  <p:cSld>
-    <p:spTree>
-      <p:nvGrpSpPr>
-        <p:cNvPr id="1" name="">
-          <a:extLst>
-            <a:ext uri="{FF2B5EF4-FFF2-40B4-BE49-F238E27FC236}">
-              <a16:creationId xmlns:a16="http://schemas.microsoft.com/office/drawing/2014/main" id="{705DDA38-138E-34EB-37A3-628D1050E27B}"/>
-            </a:ext>
-          </a:extLst>
-        </p:cNvPr>
-        <p:cNvGrpSpPr/>
-        <p:nvPr/>
-      </p:nvGrpSpPr>
-      <p:grpSpPr>
-        <a:xfrm>
-          <a:off x="0" y="0"/>
-          <a:ext cx="0" cy="0"/>
-          <a:chOff x="0" y="0"/>
-          <a:chExt cx="0" cy="0"/>
-        </a:xfrm>
-      </p:grpSpPr>
-      <p:sp>
-        <p:nvSpPr>
-          <p:cNvPr id="2" name="Espace réservé de l'image des diapositives 1">
-            <a:extLst>
-              <a:ext uri="{FF2B5EF4-FFF2-40B4-BE49-F238E27FC236}">
-                <a16:creationId xmlns:a16="http://schemas.microsoft.com/office/drawing/2014/main" id="{55AB7AE7-873F-C5BC-B419-742C844D087D}"/>
-              </a:ext>
-            </a:extLst>
-          </p:cNvPr>
-          <p:cNvSpPr>
-            <a:spLocks noGrp="1" noRot="1" noChangeAspect="1"/>
-          </p:cNvSpPr>
-          <p:nvPr>
-            <p:ph type="sldImg"/>
-          </p:nvPr>
-        </p:nvSpPr>
-        <p:spPr/>
-        <p:txBody>
-          <a:bodyPr/>
-          <a:lstStyle/>
-          <a:p>
-            <a:endParaRPr lang="fr-FR"/>
-          </a:p>
-        </p:txBody>
-      </p:sp>
-      <p:sp>
-        <p:nvSpPr>
-          <p:cNvPr id="3" name="Espace réservé des notes 2">
-            <a:extLst>
-              <a:ext uri="{FF2B5EF4-FFF2-40B4-BE49-F238E27FC236}">
-                <a16:creationId xmlns:a16="http://schemas.microsoft.com/office/drawing/2014/main" id="{DFCF48E8-768D-4103-7985-2649EFB4FE44}"/>
-              </a:ext>
-            </a:extLst>
-          </p:cNvPr>
-          <p:cNvSpPr>
-            <a:spLocks noGrp="1"/>
-          </p:cNvSpPr>
-          <p:nvPr>
-            <p:ph type="body" idx="1"/>
-          </p:nvPr>
-        </p:nvSpPr>
-        <p:spPr/>
-        <p:txBody>
-          <a:bodyPr/>
-          <a:lstStyle/>
-          <a:p>
-            <a:r>
-              <a:rPr lang="fr-FR" sz="1200" b="0" kern="1200" dirty="0">
-                <a:solidFill>
-                  <a:schemeClr val="tx1"/>
-                </a:solidFill>
-                <a:effectLst/>
-                <a:latin typeface="+mn-lt"/>
-                <a:ea typeface="+mn-ea"/>
-                <a:cs typeface="+mn-cs"/>
-              </a:rPr>
-              <a:t>Visualise les </a:t>
-            </a:r>
-            <a:r>
-              <a:rPr lang="fr-FR" sz="1200" b="0" kern="1200" dirty="0" err="1">
-                <a:solidFill>
-                  <a:schemeClr val="tx1"/>
-                </a:solidFill>
-                <a:effectLst/>
-                <a:latin typeface="+mn-lt"/>
-                <a:ea typeface="+mn-ea"/>
-                <a:cs typeface="+mn-cs"/>
-              </a:rPr>
-              <a:t>features</a:t>
-            </a:r>
-            <a:r>
-              <a:rPr lang="fr-FR" sz="1200" b="0" kern="1200" dirty="0">
-                <a:solidFill>
-                  <a:schemeClr val="tx1"/>
-                </a:solidFill>
-                <a:effectLst/>
-                <a:latin typeface="+mn-lt"/>
-                <a:ea typeface="+mn-ea"/>
-                <a:cs typeface="+mn-cs"/>
-              </a:rPr>
-              <a:t> ayant entrainé une démission</a:t>
-            </a:r>
-          </a:p>
-          <a:p>
-            <a:r>
-              <a:rPr lang="fr-FR" sz="1200" b="0" kern="1200" dirty="0">
-                <a:solidFill>
-                  <a:schemeClr val="tx1"/>
-                </a:solidFill>
-                <a:effectLst/>
-                <a:latin typeface="+mn-lt"/>
-                <a:ea typeface="+mn-ea"/>
-                <a:cs typeface="+mn-cs"/>
-              </a:rPr>
-              <a:t>(Sur un </a:t>
-            </a:r>
-            <a:r>
-              <a:rPr lang="fr-FR" sz="1200" b="0" kern="1200" dirty="0" err="1">
-                <a:solidFill>
-                  <a:schemeClr val="tx1"/>
-                </a:solidFill>
-                <a:effectLst/>
-                <a:latin typeface="+mn-lt"/>
-                <a:ea typeface="+mn-ea"/>
-                <a:cs typeface="+mn-cs"/>
-              </a:rPr>
-              <a:t>echantillon</a:t>
-            </a:r>
-            <a:r>
-              <a:rPr lang="fr-FR" sz="1200" b="0" kern="1200" dirty="0">
-                <a:solidFill>
-                  <a:schemeClr val="tx1"/>
-                </a:solidFill>
-                <a:effectLst/>
-                <a:latin typeface="+mn-lt"/>
-                <a:ea typeface="+mn-ea"/>
-                <a:cs typeface="+mn-cs"/>
-              </a:rPr>
-              <a:t> réel </a:t>
-            </a:r>
-            <a:r>
-              <a:rPr lang="fr-FR" sz="1200" b="0" kern="1200" dirty="0" err="1">
-                <a:solidFill>
-                  <a:schemeClr val="tx1"/>
-                </a:solidFill>
-                <a:effectLst/>
-                <a:latin typeface="+mn-lt"/>
-                <a:ea typeface="+mn-ea"/>
-                <a:cs typeface="+mn-cs"/>
-              </a:rPr>
-              <a:t>representatif</a:t>
-            </a:r>
-            <a:r>
-              <a:rPr lang="fr-FR" sz="1200" b="0" kern="1200" dirty="0">
-                <a:solidFill>
-                  <a:schemeClr val="tx1"/>
-                </a:solidFill>
-                <a:effectLst/>
-                <a:latin typeface="+mn-lt"/>
-                <a:ea typeface="+mn-ea"/>
-                <a:cs typeface="+mn-cs"/>
-              </a:rPr>
-              <a:t> de la moyenne des départs)</a:t>
-            </a:r>
-          </a:p>
-        </p:txBody>
-      </p:sp>
-      <p:sp>
-        <p:nvSpPr>
-          <p:cNvPr id="4" name="Espace réservé du numéro de diapositive 3">
-            <a:extLst>
-              <a:ext uri="{FF2B5EF4-FFF2-40B4-BE49-F238E27FC236}">
-                <a16:creationId xmlns:a16="http://schemas.microsoft.com/office/drawing/2014/main" id="{2E6DBE43-51A0-07B5-E82B-BC7968B6FE24}"/>
-              </a:ext>
-            </a:extLst>
-          </p:cNvPr>
-          <p:cNvSpPr>
-            <a:spLocks noGrp="1"/>
-          </p:cNvSpPr>
-          <p:nvPr>
-            <p:ph type="sldNum" sz="quarter" idx="5"/>
-          </p:nvPr>
-        </p:nvSpPr>
-        <p:spPr/>
-        <p:txBody>
-          <a:bodyPr/>
-          <a:lstStyle/>
-          <a:p>
-            <a:pPr rtl="0"/>
-            <a:fld id="{C6B3AB32-59DF-41F1-9618-EDFBF5049629}" type="slidenum">
-              <a:rPr lang="fr-FR" noProof="0" smtClean="0"/>
-              <a:t>36</a:t>
-            </a:fld>
-            <a:endParaRPr lang="fr-FR" noProof="0"/>
-          </a:p>
-        </p:txBody>
-      </p:sp>
-    </p:spTree>
-    <p:extLst>
-      <p:ext uri="{BB962C8B-B14F-4D97-AF65-F5344CB8AC3E}">
-        <p14:creationId xmlns:p14="http://schemas.microsoft.com/office/powerpoint/2010/main" val="126324508"/>
-      </p:ext>
-    </p:extLst>
-  </p:cSld>
-  <p:clrMapOvr>
-    <a:masterClrMapping/>
-  </p:clrMapOvr>
-</p:notes>
-</file>
-
-<file path=ppt/notesSlides/notesSlide32.xml><?xml version="1.0" encoding="utf-8"?>
-<p:notes xmlns:a="http://schemas.openxmlformats.org/drawingml/2006/main" xmlns:r="http://schemas.openxmlformats.org/officeDocument/2006/relationships" xmlns:p="http://schemas.openxmlformats.org/presentationml/2006/main">
-  <p:cSld>
-    <p:spTree>
-      <p:nvGrpSpPr>
-        <p:cNvPr id="1" name="">
-          <a:extLst>
-            <a:ext uri="{FF2B5EF4-FFF2-40B4-BE49-F238E27FC236}">
-              <a16:creationId xmlns:a16="http://schemas.microsoft.com/office/drawing/2014/main" id="{5B5A59FB-FD10-1081-3906-358138570219}"/>
-            </a:ext>
-          </a:extLst>
-        </p:cNvPr>
-        <p:cNvGrpSpPr/>
-        <p:nvPr/>
-      </p:nvGrpSpPr>
-      <p:grpSpPr>
-        <a:xfrm>
-          <a:off x="0" y="0"/>
-          <a:ext cx="0" cy="0"/>
-          <a:chOff x="0" y="0"/>
-          <a:chExt cx="0" cy="0"/>
-        </a:xfrm>
-      </p:grpSpPr>
-      <p:sp>
-        <p:nvSpPr>
-          <p:cNvPr id="2" name="Espace réservé de l'image des diapositives 1">
-            <a:extLst>
-              <a:ext uri="{FF2B5EF4-FFF2-40B4-BE49-F238E27FC236}">
-                <a16:creationId xmlns:a16="http://schemas.microsoft.com/office/drawing/2014/main" id="{C8571FC5-A85E-C517-2507-11DD36433F64}"/>
-              </a:ext>
-            </a:extLst>
-          </p:cNvPr>
-          <p:cNvSpPr>
-            <a:spLocks noGrp="1" noRot="1" noChangeAspect="1"/>
-          </p:cNvSpPr>
-          <p:nvPr>
-            <p:ph type="sldImg"/>
-          </p:nvPr>
-        </p:nvSpPr>
-        <p:spPr/>
-        <p:txBody>
-          <a:bodyPr/>
-          <a:lstStyle/>
-          <a:p>
-            <a:endParaRPr lang="fr-FR"/>
-          </a:p>
-        </p:txBody>
-      </p:sp>
-      <p:sp>
-        <p:nvSpPr>
-          <p:cNvPr id="3" name="Espace réservé des notes 2">
-            <a:extLst>
-              <a:ext uri="{FF2B5EF4-FFF2-40B4-BE49-F238E27FC236}">
-                <a16:creationId xmlns:a16="http://schemas.microsoft.com/office/drawing/2014/main" id="{63EA0FDF-D7BE-C2FE-4A69-2BFB4784064F}"/>
-              </a:ext>
-            </a:extLst>
-          </p:cNvPr>
-          <p:cNvSpPr>
-            <a:spLocks noGrp="1"/>
-          </p:cNvSpPr>
-          <p:nvPr>
-            <p:ph type="body" idx="1"/>
-          </p:nvPr>
-        </p:nvSpPr>
-        <p:spPr/>
-        <p:txBody>
-          <a:bodyPr/>
-          <a:lstStyle/>
-          <a:p>
-            <a:r>
-              <a:rPr lang="fr-FR" dirty="0"/>
-              <a:t>Les  </a:t>
-            </a:r>
-            <a:r>
-              <a:rPr lang="fr-FR" dirty="0" err="1"/>
-              <a:t>contre-factuel</a:t>
-            </a:r>
-            <a:r>
-              <a:rPr lang="fr-FR" dirty="0"/>
-              <a:t> répond à la question </a:t>
-            </a:r>
-            <a:r>
-              <a:rPr lang="fr-FR" b="1" dirty="0"/>
-              <a:t>« que faudrait-il changer chez cet employé pour qu'il reste ? »</a:t>
-            </a:r>
-            <a:r>
-              <a:rPr lang="fr-FR" dirty="0"/>
-              <a:t> </a:t>
-            </a:r>
-          </a:p>
-          <a:p>
-            <a:r>
-              <a:rPr lang="fr-FR" dirty="0"/>
-              <a:t> il transforme une prédiction (« il va partir ») en </a:t>
-            </a:r>
-            <a:r>
-              <a:rPr lang="fr-FR" b="1" dirty="0"/>
-              <a:t>recommandation actionnable</a:t>
-            </a:r>
-            <a:r>
-              <a:rPr lang="fr-FR" dirty="0"/>
-              <a:t> pour les RH.</a:t>
-            </a:r>
-          </a:p>
-          <a:p>
-            <a:endParaRPr lang="fr-FR" dirty="0"/>
-          </a:p>
-          <a:p>
-            <a:r>
-              <a:rPr lang="fr-FR" dirty="0"/>
-              <a:t>Là où SHAP explique </a:t>
-            </a:r>
-            <a:r>
-              <a:rPr lang="fr-FR" b="1" dirty="0"/>
-              <a:t>pourquoi</a:t>
-            </a:r>
-            <a:r>
-              <a:rPr lang="fr-FR" dirty="0"/>
-              <a:t> le modèle prédit un départ, </a:t>
-            </a:r>
-            <a:r>
-              <a:rPr lang="fr-FR" dirty="0" err="1"/>
-              <a:t>DiCE</a:t>
-            </a:r>
-            <a:r>
-              <a:rPr lang="fr-FR" dirty="0"/>
-              <a:t> indique </a:t>
-            </a:r>
-            <a:r>
-              <a:rPr lang="fr-FR" b="1" dirty="0"/>
-              <a:t>quoi modifier concrètement</a:t>
-            </a:r>
-            <a:r>
-              <a:rPr lang="fr-FR" dirty="0"/>
-              <a:t> pour inverser la décision, en proposant les changements </a:t>
-            </a:r>
-            <a:r>
-              <a:rPr lang="fr-FR" b="1" dirty="0"/>
-              <a:t>les plus proches et les plus économiques</a:t>
-            </a:r>
-            <a:r>
-              <a:rPr lang="fr-FR" dirty="0"/>
-              <a:t> possibles.</a:t>
-            </a:r>
-          </a:p>
-        </p:txBody>
-      </p:sp>
-      <p:sp>
-        <p:nvSpPr>
-          <p:cNvPr id="4" name="Espace réservé du numéro de diapositive 3">
-            <a:extLst>
-              <a:ext uri="{FF2B5EF4-FFF2-40B4-BE49-F238E27FC236}">
-                <a16:creationId xmlns:a16="http://schemas.microsoft.com/office/drawing/2014/main" id="{2CDBA37F-7EA8-D297-EC14-12D5AE0DEDC1}"/>
-              </a:ext>
-            </a:extLst>
-          </p:cNvPr>
-          <p:cNvSpPr>
-            <a:spLocks noGrp="1"/>
-          </p:cNvSpPr>
-          <p:nvPr>
-            <p:ph type="sldNum" sz="quarter" idx="5"/>
-          </p:nvPr>
-        </p:nvSpPr>
-        <p:spPr/>
-        <p:txBody>
-          <a:bodyPr/>
-          <a:lstStyle/>
-          <a:p>
-            <a:pPr rtl="0"/>
-            <a:fld id="{C6B3AB32-59DF-41F1-9618-EDFBF5049629}" type="slidenum">
-              <a:rPr lang="fr-FR" noProof="0" smtClean="0"/>
-              <a:t>37</a:t>
-            </a:fld>
-            <a:endParaRPr lang="fr-FR" noProof="0"/>
-          </a:p>
-        </p:txBody>
-      </p:sp>
-    </p:spTree>
-    <p:extLst>
-      <p:ext uri="{BB962C8B-B14F-4D97-AF65-F5344CB8AC3E}">
-        <p14:creationId xmlns:p14="http://schemas.microsoft.com/office/powerpoint/2010/main" val="104220876"/>
-      </p:ext>
-    </p:extLst>
-  </p:cSld>
-  <p:clrMapOvr>
-    <a:masterClrMapping/>
-  </p:clrMapOvr>
-</p:notes>
-</file>
-
-<file path=ppt/notesSlides/notesSlide33.xml><?xml version="1.0" encoding="utf-8"?>
+<file path=ppt/notesSlides/notesSlide5.xml><?xml version="1.0" encoding="utf-8"?>
 <p:notes xmlns:a="http://schemas.openxmlformats.org/drawingml/2006/main" xmlns:r="http://schemas.openxmlformats.org/officeDocument/2006/relationships" xmlns:p="http://schemas.openxmlformats.org/presentationml/2006/main">
   <p:cSld>
     <p:spTree>
@@ -5076,330 +5909,6 @@
           </p:nvPr>
         </p:nvSpPr>
         <p:spPr/>
-      </p:sp>
-      <p:sp>
-        <p:nvSpPr>
-          <p:cNvPr id="3" name="Espace réservé des notes 2"/>
-          <p:cNvSpPr>
-            <a:spLocks noGrp="1"/>
-          </p:cNvSpPr>
-          <p:nvPr>
-            <p:ph type="body" idx="1"/>
-          </p:nvPr>
-        </p:nvSpPr>
-        <p:spPr/>
-        <p:txBody>
-          <a:bodyPr/>
-          <a:lstStyle/>
-          <a:p>
-            <a:pPr marL="0" marR="0" lvl="0" indent="0" algn="l" defTabSz="914400" rtl="0" eaLnBrk="1" fontAlgn="auto" latinLnBrk="0" hangingPunct="1">
-              <a:lnSpc>
-                <a:spcPct val="100000"/>
-              </a:lnSpc>
-              <a:spcBef>
-                <a:spcPts val="0"/>
-              </a:spcBef>
-              <a:spcAft>
-                <a:spcPts val="0"/>
-              </a:spcAft>
-              <a:buClrTx/>
-              <a:buSzTx/>
-              <a:buFontTx/>
-              <a:buNone/>
-              <a:tabLst/>
-              <a:defRPr/>
-            </a:pPr>
-            <a:r>
-              <a:rPr lang="fr-FR" dirty="0">
-                <a:latin typeface="Aptos" panose="020B0004020202020204" pitchFamily="34" charset="0"/>
-              </a:rPr>
-              <a:t>Ces résultats décrivent le comportement du modèle et doivent être interprétés comme des </a:t>
-            </a:r>
-            <a:r>
-              <a:rPr lang="fr-FR" b="1" dirty="0">
-                <a:latin typeface="Aptos" panose="020B0004020202020204" pitchFamily="34" charset="0"/>
-              </a:rPr>
-              <a:t>facteurs associés aux prédictions</a:t>
-            </a:r>
-            <a:r>
-              <a:rPr lang="fr-FR" dirty="0">
-                <a:latin typeface="Aptos" panose="020B0004020202020204" pitchFamily="34" charset="0"/>
-              </a:rPr>
-              <a:t>, et non comme des relations de causalité.</a:t>
-            </a:r>
-          </a:p>
-          <a:p>
-            <a:endParaRPr lang="fr-FR" dirty="0"/>
-          </a:p>
-        </p:txBody>
-      </p:sp>
-      <p:sp>
-        <p:nvSpPr>
-          <p:cNvPr id="4" name="Espace réservé du numéro de diapositive 3"/>
-          <p:cNvSpPr>
-            <a:spLocks noGrp="1"/>
-          </p:cNvSpPr>
-          <p:nvPr>
-            <p:ph type="sldNum" sz="quarter" idx="5"/>
-          </p:nvPr>
-        </p:nvSpPr>
-        <p:spPr/>
-        <p:txBody>
-          <a:bodyPr/>
-          <a:lstStyle/>
-          <a:p>
-            <a:pPr rtl="0"/>
-            <a:fld id="{C6B3AB32-59DF-41F1-9618-EDFBF5049629}" type="slidenum">
-              <a:rPr lang="fr-FR" noProof="0" smtClean="0"/>
-              <a:t>38</a:t>
-            </a:fld>
-            <a:endParaRPr lang="fr-FR" noProof="0"/>
-          </a:p>
-        </p:txBody>
-      </p:sp>
-    </p:spTree>
-    <p:extLst>
-      <p:ext uri="{BB962C8B-B14F-4D97-AF65-F5344CB8AC3E}">
-        <p14:creationId xmlns:p14="http://schemas.microsoft.com/office/powerpoint/2010/main" val="206496525"/>
-      </p:ext>
-    </p:extLst>
-  </p:cSld>
-  <p:clrMapOvr>
-    <a:masterClrMapping/>
-  </p:clrMapOvr>
-</p:notes>
-</file>
-
-<file path=ppt/notesSlides/notesSlide34.xml><?xml version="1.0" encoding="utf-8"?>
-<p:notes xmlns:a="http://schemas.openxmlformats.org/drawingml/2006/main" xmlns:r="http://schemas.openxmlformats.org/officeDocument/2006/relationships" xmlns:p="http://schemas.openxmlformats.org/presentationml/2006/main">
-  <p:cSld>
-    <p:spTree>
-      <p:nvGrpSpPr>
-        <p:cNvPr id="1" name="">
-          <a:extLst>
-            <a:ext uri="{FF2B5EF4-FFF2-40B4-BE49-F238E27FC236}">
-              <a16:creationId xmlns:a16="http://schemas.microsoft.com/office/drawing/2014/main" id="{D1896BE4-D62C-95FE-431D-9992E96A6E47}"/>
-            </a:ext>
-          </a:extLst>
-        </p:cNvPr>
-        <p:cNvGrpSpPr/>
-        <p:nvPr/>
-      </p:nvGrpSpPr>
-      <p:grpSpPr>
-        <a:xfrm>
-          <a:off x="0" y="0"/>
-          <a:ext cx="0" cy="0"/>
-          <a:chOff x="0" y="0"/>
-          <a:chExt cx="0" cy="0"/>
-        </a:xfrm>
-      </p:grpSpPr>
-      <p:sp>
-        <p:nvSpPr>
-          <p:cNvPr id="2" name="Espace réservé de l'image des diapositives 1">
-            <a:extLst>
-              <a:ext uri="{FF2B5EF4-FFF2-40B4-BE49-F238E27FC236}">
-                <a16:creationId xmlns:a16="http://schemas.microsoft.com/office/drawing/2014/main" id="{A487A7E2-0B92-FB3D-8DE3-16823243DF6D}"/>
-              </a:ext>
-            </a:extLst>
-          </p:cNvPr>
-          <p:cNvSpPr>
-            <a:spLocks noGrp="1" noRot="1" noChangeAspect="1"/>
-          </p:cNvSpPr>
-          <p:nvPr>
-            <p:ph type="sldImg"/>
-          </p:nvPr>
-        </p:nvSpPr>
-        <p:spPr/>
-      </p:sp>
-      <p:sp>
-        <p:nvSpPr>
-          <p:cNvPr id="3" name="Espace réservé des notes 2">
-            <a:extLst>
-              <a:ext uri="{FF2B5EF4-FFF2-40B4-BE49-F238E27FC236}">
-                <a16:creationId xmlns:a16="http://schemas.microsoft.com/office/drawing/2014/main" id="{C92A35F3-19A4-9951-AFBB-A25D381A5CD9}"/>
-              </a:ext>
-            </a:extLst>
-          </p:cNvPr>
-          <p:cNvSpPr>
-            <a:spLocks noGrp="1"/>
-          </p:cNvSpPr>
-          <p:nvPr>
-            <p:ph type="body" idx="1"/>
-          </p:nvPr>
-        </p:nvSpPr>
-        <p:spPr/>
-        <p:txBody>
-          <a:bodyPr/>
-          <a:lstStyle/>
-          <a:p>
-            <a:endParaRPr lang="fr-FR" dirty="0"/>
-          </a:p>
-        </p:txBody>
-      </p:sp>
-      <p:sp>
-        <p:nvSpPr>
-          <p:cNvPr id="4" name="Espace réservé du numéro de diapositive 3">
-            <a:extLst>
-              <a:ext uri="{FF2B5EF4-FFF2-40B4-BE49-F238E27FC236}">
-                <a16:creationId xmlns:a16="http://schemas.microsoft.com/office/drawing/2014/main" id="{B9839FF4-B97C-6E5C-8260-E41EEBF012F7}"/>
-              </a:ext>
-            </a:extLst>
-          </p:cNvPr>
-          <p:cNvSpPr>
-            <a:spLocks noGrp="1"/>
-          </p:cNvSpPr>
-          <p:nvPr>
-            <p:ph type="sldNum" sz="quarter" idx="5"/>
-          </p:nvPr>
-        </p:nvSpPr>
-        <p:spPr/>
-        <p:txBody>
-          <a:bodyPr/>
-          <a:lstStyle/>
-          <a:p>
-            <a:pPr rtl="0"/>
-            <a:fld id="{C6B3AB32-59DF-41F1-9618-EDFBF5049629}" type="slidenum">
-              <a:rPr lang="fr-FR" noProof="0" smtClean="0"/>
-              <a:t>39</a:t>
-            </a:fld>
-            <a:endParaRPr lang="fr-FR" noProof="0"/>
-          </a:p>
-        </p:txBody>
-      </p:sp>
-    </p:spTree>
-    <p:extLst>
-      <p:ext uri="{BB962C8B-B14F-4D97-AF65-F5344CB8AC3E}">
-        <p14:creationId xmlns:p14="http://schemas.microsoft.com/office/powerpoint/2010/main" val="2668510016"/>
-      </p:ext>
-    </p:extLst>
-  </p:cSld>
-  <p:clrMapOvr>
-    <a:masterClrMapping/>
-  </p:clrMapOvr>
-</p:notes>
-</file>
-
-<file path=ppt/notesSlides/notesSlide35.xml><?xml version="1.0" encoding="utf-8"?>
-<p:notes xmlns:a="http://schemas.openxmlformats.org/drawingml/2006/main" xmlns:r="http://schemas.openxmlformats.org/officeDocument/2006/relationships" xmlns:p="http://schemas.openxmlformats.org/presentationml/2006/main">
-  <p:cSld>
-    <p:spTree>
-      <p:nvGrpSpPr>
-        <p:cNvPr id="1" name=""/>
-        <p:cNvGrpSpPr/>
-        <p:nvPr/>
-      </p:nvGrpSpPr>
-      <p:grpSpPr>
-        <a:xfrm>
-          <a:off x="0" y="0"/>
-          <a:ext cx="0" cy="0"/>
-          <a:chOff x="0" y="0"/>
-          <a:chExt cx="0" cy="0"/>
-        </a:xfrm>
-      </p:grpSpPr>
-      <p:sp>
-        <p:nvSpPr>
-          <p:cNvPr id="2" name="Espace réservé de l’image des diapositives 1"/>
-          <p:cNvSpPr>
-            <a:spLocks noGrp="1" noRot="1" noChangeAspect="1"/>
-          </p:cNvSpPr>
-          <p:nvPr>
-            <p:ph type="sldImg"/>
-          </p:nvPr>
-        </p:nvSpPr>
-        <p:spPr/>
-        <p:txBody>
-          <a:bodyPr/>
-          <a:lstStyle/>
-          <a:p>
-            <a:endParaRPr lang="fr-FR"/>
-          </a:p>
-        </p:txBody>
-      </p:sp>
-      <p:sp>
-        <p:nvSpPr>
-          <p:cNvPr id="3" name="Espace réservé des commentaires 2"/>
-          <p:cNvSpPr>
-            <a:spLocks noGrp="1"/>
-          </p:cNvSpPr>
-          <p:nvPr>
-            <p:ph type="body" idx="1"/>
-          </p:nvPr>
-        </p:nvSpPr>
-        <p:spPr/>
-        <p:txBody>
-          <a:bodyPr rtlCol="0"/>
-          <a:lstStyle/>
-          <a:p>
-            <a:pPr rtl="0"/>
-            <a:endParaRPr lang="fr-FR"/>
-          </a:p>
-        </p:txBody>
-      </p:sp>
-      <p:sp>
-        <p:nvSpPr>
-          <p:cNvPr id="4" name="Espace réservé du numéro de diapositive 3"/>
-          <p:cNvSpPr>
-            <a:spLocks noGrp="1"/>
-          </p:cNvSpPr>
-          <p:nvPr>
-            <p:ph type="sldNum" sz="quarter" idx="5"/>
-          </p:nvPr>
-        </p:nvSpPr>
-        <p:spPr/>
-        <p:txBody>
-          <a:bodyPr rtlCol="0"/>
-          <a:lstStyle/>
-          <a:p>
-            <a:pPr rtl="0"/>
-            <a:fld id="{C6B3AB32-59DF-41F1-9618-EDFBF5049629}" type="slidenum">
-              <a:rPr lang="fr-FR" smtClean="0"/>
-              <a:t>41</a:t>
-            </a:fld>
-            <a:endParaRPr lang="fr-FR"/>
-          </a:p>
-        </p:txBody>
-      </p:sp>
-    </p:spTree>
-    <p:extLst>
-      <p:ext uri="{BB962C8B-B14F-4D97-AF65-F5344CB8AC3E}">
-        <p14:creationId xmlns:p14="http://schemas.microsoft.com/office/powerpoint/2010/main" val="1046714131"/>
-      </p:ext>
-    </p:extLst>
-  </p:cSld>
-  <p:clrMapOvr>
-    <a:masterClrMapping/>
-  </p:clrMapOvr>
-</p:notes>
-</file>
-
-<file path=ppt/notesSlides/notesSlide4.xml><?xml version="1.0" encoding="utf-8"?>
-<p:notes xmlns:a="http://schemas.openxmlformats.org/drawingml/2006/main" xmlns:r="http://schemas.openxmlformats.org/officeDocument/2006/relationships" xmlns:p="http://schemas.openxmlformats.org/presentationml/2006/main">
-  <p:cSld>
-    <p:spTree>
-      <p:nvGrpSpPr>
-        <p:cNvPr id="1" name=""/>
-        <p:cNvGrpSpPr/>
-        <p:nvPr/>
-      </p:nvGrpSpPr>
-      <p:grpSpPr>
-        <a:xfrm>
-          <a:off x="0" y="0"/>
-          <a:ext cx="0" cy="0"/>
-          <a:chOff x="0" y="0"/>
-          <a:chExt cx="0" cy="0"/>
-        </a:xfrm>
-      </p:grpSpPr>
-      <p:sp>
-        <p:nvSpPr>
-          <p:cNvPr id="2" name="Espace réservé de l'image des diapositives 1"/>
-          <p:cNvSpPr>
-            <a:spLocks noGrp="1" noRot="1" noChangeAspect="1"/>
-          </p:cNvSpPr>
-          <p:nvPr>
-            <p:ph type="sldImg"/>
-          </p:nvPr>
-        </p:nvSpPr>
-        <p:spPr/>
         <p:txBody>
           <a:bodyPr/>
           <a:lstStyle/>
@@ -5455,255 +5964,6 @@
     <p:extLst>
       <p:ext uri="{BB962C8B-B14F-4D97-AF65-F5344CB8AC3E}">
         <p14:creationId xmlns:p14="http://schemas.microsoft.com/office/powerpoint/2010/main" val="3627018449"/>
-      </p:ext>
-    </p:extLst>
-  </p:cSld>
-  <p:clrMapOvr>
-    <a:masterClrMapping/>
-  </p:clrMapOvr>
-</p:notes>
-</file>
-
-<file path=ppt/notesSlides/notesSlide5.xml><?xml version="1.0" encoding="utf-8"?>
-<p:notes xmlns:a="http://schemas.openxmlformats.org/drawingml/2006/main" xmlns:r="http://schemas.openxmlformats.org/officeDocument/2006/relationships" xmlns:p="http://schemas.openxmlformats.org/presentationml/2006/main">
-  <p:cSld>
-    <p:spTree>
-      <p:nvGrpSpPr>
-        <p:cNvPr id="1" name="">
-          <a:extLst>
-            <a:ext uri="{FF2B5EF4-FFF2-40B4-BE49-F238E27FC236}">
-              <a16:creationId xmlns:a16="http://schemas.microsoft.com/office/drawing/2014/main" id="{5ADB9793-939C-9ED6-1873-A265EF828CD5}"/>
-            </a:ext>
-          </a:extLst>
-        </p:cNvPr>
-        <p:cNvGrpSpPr/>
-        <p:nvPr/>
-      </p:nvGrpSpPr>
-      <p:grpSpPr>
-        <a:xfrm>
-          <a:off x="0" y="0"/>
-          <a:ext cx="0" cy="0"/>
-          <a:chOff x="0" y="0"/>
-          <a:chExt cx="0" cy="0"/>
-        </a:xfrm>
-      </p:grpSpPr>
-      <p:sp>
-        <p:nvSpPr>
-          <p:cNvPr id="2" name="Espace réservé de l'image des diapositives 1">
-            <a:extLst>
-              <a:ext uri="{FF2B5EF4-FFF2-40B4-BE49-F238E27FC236}">
-                <a16:creationId xmlns:a16="http://schemas.microsoft.com/office/drawing/2014/main" id="{232ACA2F-97E3-4662-606D-BD06BE23C9D4}"/>
-              </a:ext>
-            </a:extLst>
-          </p:cNvPr>
-          <p:cNvSpPr>
-            <a:spLocks noGrp="1" noRot="1" noChangeAspect="1"/>
-          </p:cNvSpPr>
-          <p:nvPr>
-            <p:ph type="sldImg"/>
-          </p:nvPr>
-        </p:nvSpPr>
-        <p:spPr/>
-        <p:txBody>
-          <a:bodyPr/>
-          <a:lstStyle/>
-          <a:p>
-            <a:endParaRPr lang="fr-FR"/>
-          </a:p>
-        </p:txBody>
-      </p:sp>
-      <p:sp>
-        <p:nvSpPr>
-          <p:cNvPr id="3" name="Espace réservé des notes 2">
-            <a:extLst>
-              <a:ext uri="{FF2B5EF4-FFF2-40B4-BE49-F238E27FC236}">
-                <a16:creationId xmlns:a16="http://schemas.microsoft.com/office/drawing/2014/main" id="{170703E3-EFD9-09E8-636A-87D376D0EA60}"/>
-              </a:ext>
-            </a:extLst>
-          </p:cNvPr>
-          <p:cNvSpPr>
-            <a:spLocks noGrp="1"/>
-          </p:cNvSpPr>
-          <p:nvPr>
-            <p:ph type="body" idx="1"/>
-          </p:nvPr>
-        </p:nvSpPr>
-        <p:spPr/>
-        <p:txBody>
-          <a:bodyPr/>
-          <a:lstStyle/>
-          <a:p>
-            <a:pPr marL="0" marR="0" lvl="0" indent="0" algn="l" defTabSz="914400" rtl="0" eaLnBrk="1" fontAlgn="auto" latinLnBrk="0" hangingPunct="1">
-              <a:lnSpc>
-                <a:spcPct val="100000"/>
-              </a:lnSpc>
-              <a:spcBef>
-                <a:spcPts val="0"/>
-              </a:spcBef>
-              <a:spcAft>
-                <a:spcPts val="0"/>
-              </a:spcAft>
-              <a:buClrTx/>
-              <a:buSzTx/>
-              <a:buFontTx/>
-              <a:buNone/>
-              <a:tabLst/>
-              <a:defRPr/>
-            </a:pPr>
-            <a:r>
-              <a:rPr lang="en-US" dirty="0">
-                <a:solidFill>
-                  <a:schemeClr val="tx2"/>
-                </a:solidFill>
-                <a:latin typeface="Verdana" panose="020B0604030504040204" pitchFamily="34" charset="0"/>
-                <a:ea typeface="Verdana" panose="020B0604030504040204" pitchFamily="34" charset="0"/>
-              </a:rPr>
-              <a:t>Jointure ID</a:t>
-            </a:r>
-          </a:p>
-          <a:p>
-            <a:pPr marL="0" marR="0" lvl="0" indent="0" algn="l" defTabSz="914400" rtl="0" eaLnBrk="1" fontAlgn="auto" latinLnBrk="0" hangingPunct="1">
-              <a:lnSpc>
-                <a:spcPct val="100000"/>
-              </a:lnSpc>
-              <a:spcBef>
-                <a:spcPts val="0"/>
-              </a:spcBef>
-              <a:spcAft>
-                <a:spcPts val="0"/>
-              </a:spcAft>
-              <a:buClrTx/>
-              <a:buSzTx/>
-              <a:buFontTx/>
-              <a:buNone/>
-              <a:tabLst/>
-              <a:defRPr/>
-            </a:pPr>
-            <a:r>
-              <a:rPr lang="en-US" dirty="0">
-                <a:solidFill>
-                  <a:schemeClr val="tx2"/>
-                </a:solidFill>
-                <a:latin typeface="Verdana" panose="020B0604030504040204" pitchFamily="34" charset="0"/>
-                <a:ea typeface="Verdana" panose="020B0604030504040204" pitchFamily="34" charset="0"/>
-              </a:rPr>
-              <a:t>* </a:t>
-            </a:r>
-            <a:r>
-              <a:rPr lang="en-US" dirty="0" err="1">
-                <a:solidFill>
-                  <a:schemeClr val="tx2"/>
-                </a:solidFill>
-                <a:latin typeface="Verdana" panose="020B0604030504040204" pitchFamily="34" charset="0"/>
-                <a:ea typeface="Verdana" panose="020B0604030504040204" pitchFamily="34" charset="0"/>
-              </a:rPr>
-              <a:t>eval_number</a:t>
-            </a:r>
-            <a:br>
-              <a:rPr lang="en-US" dirty="0">
-                <a:solidFill>
-                  <a:schemeClr val="tx2"/>
-                </a:solidFill>
-                <a:latin typeface="Verdana" panose="020B0604030504040204" pitchFamily="34" charset="0"/>
-                <a:ea typeface="Verdana" panose="020B0604030504040204" pitchFamily="34" charset="0"/>
-              </a:rPr>
-            </a:br>
-            <a:r>
-              <a:rPr lang="en-US" dirty="0">
-                <a:solidFill>
-                  <a:schemeClr val="tx2"/>
-                </a:solidFill>
-                <a:latin typeface="Verdana" panose="020B0604030504040204" pitchFamily="34" charset="0"/>
-                <a:ea typeface="Verdana" panose="020B0604030504040204" pitchFamily="34" charset="0"/>
-              </a:rPr>
-              <a:t>* </a:t>
-            </a:r>
-            <a:r>
-              <a:rPr lang="en-US" dirty="0" err="1">
-                <a:solidFill>
-                  <a:schemeClr val="tx2"/>
-                </a:solidFill>
-                <a:latin typeface="Verdana" panose="020B0604030504040204" pitchFamily="34" charset="0"/>
-                <a:ea typeface="Verdana" panose="020B0604030504040204" pitchFamily="34" charset="0"/>
-              </a:rPr>
-              <a:t>id_employee</a:t>
-            </a:r>
-            <a:br>
-              <a:rPr lang="en-US" dirty="0">
-                <a:solidFill>
-                  <a:schemeClr val="tx2"/>
-                </a:solidFill>
-                <a:latin typeface="Verdana" panose="020B0604030504040204" pitchFamily="34" charset="0"/>
-                <a:ea typeface="Verdana" panose="020B0604030504040204" pitchFamily="34" charset="0"/>
-              </a:rPr>
-            </a:br>
-            <a:r>
-              <a:rPr lang="en-US" dirty="0">
-                <a:solidFill>
-                  <a:schemeClr val="tx2"/>
-                </a:solidFill>
-                <a:latin typeface="Verdana" panose="020B0604030504040204" pitchFamily="34" charset="0"/>
-                <a:ea typeface="Verdana" panose="020B0604030504040204" pitchFamily="34" charset="0"/>
-              </a:rPr>
-              <a:t>* </a:t>
-            </a:r>
-            <a:r>
-              <a:rPr lang="en-US" dirty="0" err="1">
-                <a:solidFill>
-                  <a:schemeClr val="tx2"/>
-                </a:solidFill>
-                <a:latin typeface="Verdana" panose="020B0604030504040204" pitchFamily="34" charset="0"/>
-                <a:ea typeface="Verdana" panose="020B0604030504040204" pitchFamily="34" charset="0"/>
-              </a:rPr>
-              <a:t>code_sondage</a:t>
-            </a:r>
-            <a:endParaRPr lang="fr-FR" dirty="0">
-              <a:solidFill>
-                <a:schemeClr val="tx2"/>
-              </a:solidFill>
-              <a:latin typeface="Verdana" panose="020B0604030504040204" pitchFamily="34" charset="0"/>
-              <a:ea typeface="Verdana" panose="020B0604030504040204" pitchFamily="34" charset="0"/>
-            </a:endParaRPr>
-          </a:p>
-          <a:p>
-            <a:endParaRPr lang="fr-FR" dirty="0"/>
-          </a:p>
-        </p:txBody>
-      </p:sp>
-      <p:sp>
-        <p:nvSpPr>
-          <p:cNvPr id="4" name="Espace réservé du numéro de diapositive 3">
-            <a:extLst>
-              <a:ext uri="{FF2B5EF4-FFF2-40B4-BE49-F238E27FC236}">
-                <a16:creationId xmlns:a16="http://schemas.microsoft.com/office/drawing/2014/main" id="{E1468EBC-400A-43AB-9A35-311BA4E58402}"/>
-              </a:ext>
-            </a:extLst>
-          </p:cNvPr>
-          <p:cNvSpPr>
-            <a:spLocks noGrp="1"/>
-          </p:cNvSpPr>
-          <p:nvPr>
-            <p:ph type="sldNum" sz="quarter" idx="5"/>
-          </p:nvPr>
-        </p:nvSpPr>
-        <p:spPr/>
-        <p:txBody>
-          <a:bodyPr/>
-          <a:lstStyle/>
-          <a:p>
-            <a:pPr rtl="0"/>
-            <a:fld id="{C6B3AB32-59DF-41F1-9618-EDFBF5049629}" type="slidenum">
-              <a:rPr lang="fr-FR" noProof="0" smtClean="0"/>
-              <a:t>6</a:t>
-            </a:fld>
-            <a:endParaRPr lang="fr-FR" noProof="0"/>
-          </a:p>
-        </p:txBody>
-      </p:sp>
-    </p:spTree>
-    <p:extLst>
-      <p:ext uri="{BB962C8B-B14F-4D97-AF65-F5344CB8AC3E}">
-        <p14:creationId xmlns:p14="http://schemas.microsoft.com/office/powerpoint/2010/main" val="1873950053"/>
       </p:ext>
     </p:extLst>
   </p:cSld>
@@ -5741,6 +6001,13 @@
           </p:nvPr>
         </p:nvSpPr>
         <p:spPr/>
+        <p:txBody>
+          <a:bodyPr/>
+          <a:lstStyle/>
+          <a:p>
+            <a:endParaRPr lang="fr-FR"/>
+          </a:p>
+        </p:txBody>
       </p:sp>
       <p:sp>
         <p:nvSpPr>
@@ -5757,10 +6024,7 @@
           <a:bodyPr/>
           <a:lstStyle/>
           <a:p>
-            <a:r>
-              <a:rPr lang="fr-FR" dirty="0"/>
-              <a:t>Pour analyser les données nous devons les préparer</a:t>
-            </a:r>
+            <a:endParaRPr lang="fr-FR" dirty="0"/>
           </a:p>
         </p:txBody>
       </p:sp>
@@ -5782,7 +6046,7 @@
             <a:pPr rtl="0"/>
             <a:fld id="{C6B3AB32-59DF-41F1-9618-EDFBF5049629}" type="slidenum">
               <a:rPr lang="fr-FR" noProof="0" smtClean="0"/>
-              <a:t>7</a:t>
+              <a:t>6</a:t>
             </a:fld>
             <a:endParaRPr lang="fr-FR" noProof="0"/>
           </a:p>
@@ -5791,7 +6055,7 @@
     </p:spTree>
     <p:extLst>
       <p:ext uri="{BB962C8B-B14F-4D97-AF65-F5344CB8AC3E}">
-        <p14:creationId xmlns:p14="http://schemas.microsoft.com/office/powerpoint/2010/main" val="4097205542"/>
+        <p14:creationId xmlns:p14="http://schemas.microsoft.com/office/powerpoint/2010/main" val="3241041007"/>
       </p:ext>
     </p:extLst>
   </p:cSld>
@@ -5806,7 +6070,13 @@
   <p:cSld>
     <p:spTree>
       <p:nvGrpSpPr>
-        <p:cNvPr id="1" name=""/>
+        <p:cNvPr id="1" name="">
+          <a:extLst>
+            <a:ext uri="{FF2B5EF4-FFF2-40B4-BE49-F238E27FC236}">
+              <a16:creationId xmlns:a16="http://schemas.microsoft.com/office/drawing/2014/main" id="{5ADB9793-939C-9ED6-1873-A265EF828CD5}"/>
+            </a:ext>
+          </a:extLst>
+        </p:cNvPr>
         <p:cNvGrpSpPr/>
         <p:nvPr/>
       </p:nvGrpSpPr>
@@ -5820,7 +6090,13 @@
       </p:grpSpPr>
       <p:sp>
         <p:nvSpPr>
-          <p:cNvPr id="2" name="Espace réservé de l'image des diapositives 1"/>
+          <p:cNvPr id="2" name="Espace réservé de l'image des diapositives 1">
+            <a:extLst>
+              <a:ext uri="{FF2B5EF4-FFF2-40B4-BE49-F238E27FC236}">
+                <a16:creationId xmlns:a16="http://schemas.microsoft.com/office/drawing/2014/main" id="{232ACA2F-97E3-4662-606D-BD06BE23C9D4}"/>
+              </a:ext>
+            </a:extLst>
+          </p:cNvPr>
           <p:cNvSpPr>
             <a:spLocks noGrp="1" noRot="1" noChangeAspect="1"/>
           </p:cNvSpPr>
@@ -5839,7 +6115,13 @@
       </p:sp>
       <p:sp>
         <p:nvSpPr>
-          <p:cNvPr id="3" name="Espace réservé des notes 2"/>
+          <p:cNvPr id="3" name="Espace réservé des notes 2">
+            <a:extLst>
+              <a:ext uri="{FF2B5EF4-FFF2-40B4-BE49-F238E27FC236}">
+                <a16:creationId xmlns:a16="http://schemas.microsoft.com/office/drawing/2014/main" id="{170703E3-EFD9-09E8-636A-87D376D0EA60}"/>
+              </a:ext>
+            </a:extLst>
+          </p:cNvPr>
           <p:cNvSpPr>
             <a:spLocks noGrp="1"/>
           </p:cNvSpPr>
@@ -5852,13 +6134,152 @@
           <a:bodyPr/>
           <a:lstStyle/>
           <a:p>
+            <a:pPr marL="0" marR="0" lvl="0" indent="0" algn="l" defTabSz="914400" rtl="0" eaLnBrk="1" fontAlgn="auto" latinLnBrk="0" hangingPunct="1">
+              <a:lnSpc>
+                <a:spcPct val="100000"/>
+              </a:lnSpc>
+              <a:spcBef>
+                <a:spcPts val="0"/>
+              </a:spcBef>
+              <a:spcAft>
+                <a:spcPts val="0"/>
+              </a:spcAft>
+              <a:buClrTx/>
+              <a:buSzTx/>
+              <a:buFontTx/>
+              <a:buNone/>
+              <a:tabLst/>
+              <a:defRPr/>
+            </a:pPr>
+            <a:r>
+              <a:rPr lang="en-US" dirty="0">
+                <a:solidFill>
+                  <a:schemeClr val="tx2"/>
+                </a:solidFill>
+                <a:latin typeface="Verdana" panose="020B0604030504040204" pitchFamily="34" charset="0"/>
+                <a:ea typeface="Verdana" panose="020B0604030504040204" pitchFamily="34" charset="0"/>
+              </a:rPr>
+              <a:t>Jointure ID</a:t>
+            </a:r>
+          </a:p>
+          <a:p>
+            <a:pPr marL="0" marR="0" lvl="0" indent="0" algn="l" defTabSz="914400" rtl="0" eaLnBrk="1" fontAlgn="auto" latinLnBrk="0" hangingPunct="1">
+              <a:lnSpc>
+                <a:spcPct val="100000"/>
+              </a:lnSpc>
+              <a:spcBef>
+                <a:spcPts val="0"/>
+              </a:spcBef>
+              <a:spcAft>
+                <a:spcPts val="0"/>
+              </a:spcAft>
+              <a:buClrTx/>
+              <a:buSzTx/>
+              <a:buFontTx/>
+              <a:buNone/>
+              <a:tabLst/>
+              <a:defRPr/>
+            </a:pPr>
+            <a:r>
+              <a:rPr lang="en-US" dirty="0">
+                <a:solidFill>
+                  <a:schemeClr val="tx2"/>
+                </a:solidFill>
+                <a:latin typeface="Verdana" panose="020B0604030504040204" pitchFamily="34" charset="0"/>
+                <a:ea typeface="Verdana" panose="020B0604030504040204" pitchFamily="34" charset="0"/>
+              </a:rPr>
+              <a:t>* </a:t>
+            </a:r>
+            <a:r>
+              <a:rPr lang="en-US" dirty="0" err="1">
+                <a:solidFill>
+                  <a:schemeClr val="tx2"/>
+                </a:solidFill>
+                <a:latin typeface="Verdana" panose="020B0604030504040204" pitchFamily="34" charset="0"/>
+                <a:ea typeface="Verdana" panose="020B0604030504040204" pitchFamily="34" charset="0"/>
+              </a:rPr>
+              <a:t>eval_number</a:t>
+            </a:r>
+            <a:br>
+              <a:rPr lang="en-US" dirty="0">
+                <a:solidFill>
+                  <a:schemeClr val="tx2"/>
+                </a:solidFill>
+                <a:latin typeface="Verdana" panose="020B0604030504040204" pitchFamily="34" charset="0"/>
+                <a:ea typeface="Verdana" panose="020B0604030504040204" pitchFamily="34" charset="0"/>
+              </a:rPr>
+            </a:br>
+            <a:r>
+              <a:rPr lang="en-US" dirty="0">
+                <a:solidFill>
+                  <a:schemeClr val="tx2"/>
+                </a:solidFill>
+                <a:latin typeface="Verdana" panose="020B0604030504040204" pitchFamily="34" charset="0"/>
+                <a:ea typeface="Verdana" panose="020B0604030504040204" pitchFamily="34" charset="0"/>
+              </a:rPr>
+              <a:t>* </a:t>
+            </a:r>
+            <a:r>
+              <a:rPr lang="en-US" dirty="0" err="1">
+                <a:solidFill>
+                  <a:schemeClr val="tx2"/>
+                </a:solidFill>
+                <a:latin typeface="Verdana" panose="020B0604030504040204" pitchFamily="34" charset="0"/>
+                <a:ea typeface="Verdana" panose="020B0604030504040204" pitchFamily="34" charset="0"/>
+              </a:rPr>
+              <a:t>id_employee</a:t>
+            </a:r>
+            <a:br>
+              <a:rPr lang="en-US" dirty="0">
+                <a:solidFill>
+                  <a:schemeClr val="tx2"/>
+                </a:solidFill>
+                <a:latin typeface="Verdana" panose="020B0604030504040204" pitchFamily="34" charset="0"/>
+                <a:ea typeface="Verdana" panose="020B0604030504040204" pitchFamily="34" charset="0"/>
+              </a:rPr>
+            </a:br>
+            <a:r>
+              <a:rPr lang="en-US" dirty="0">
+                <a:solidFill>
+                  <a:schemeClr val="tx2"/>
+                </a:solidFill>
+                <a:latin typeface="Verdana" panose="020B0604030504040204" pitchFamily="34" charset="0"/>
+                <a:ea typeface="Verdana" panose="020B0604030504040204" pitchFamily="34" charset="0"/>
+              </a:rPr>
+              <a:t>* </a:t>
+            </a:r>
+            <a:r>
+              <a:rPr lang="en-US" dirty="0" err="1">
+                <a:solidFill>
+                  <a:schemeClr val="tx2"/>
+                </a:solidFill>
+                <a:latin typeface="Verdana" panose="020B0604030504040204" pitchFamily="34" charset="0"/>
+                <a:ea typeface="Verdana" panose="020B0604030504040204" pitchFamily="34" charset="0"/>
+              </a:rPr>
+              <a:t>code_sondage</a:t>
+            </a:r>
+            <a:endParaRPr lang="fr-FR" dirty="0">
+              <a:solidFill>
+                <a:schemeClr val="tx2"/>
+              </a:solidFill>
+              <a:latin typeface="Verdana" panose="020B0604030504040204" pitchFamily="34" charset="0"/>
+              <a:ea typeface="Verdana" panose="020B0604030504040204" pitchFamily="34" charset="0"/>
+            </a:endParaRPr>
+          </a:p>
+          <a:p>
             <a:endParaRPr lang="fr-FR" dirty="0"/>
           </a:p>
         </p:txBody>
       </p:sp>
       <p:sp>
         <p:nvSpPr>
-          <p:cNvPr id="4" name="Espace réservé du numéro de diapositive 3"/>
+          <p:cNvPr id="4" name="Espace réservé du numéro de diapositive 3">
+            <a:extLst>
+              <a:ext uri="{FF2B5EF4-FFF2-40B4-BE49-F238E27FC236}">
+                <a16:creationId xmlns:a16="http://schemas.microsoft.com/office/drawing/2014/main" id="{E1468EBC-400A-43AB-9A35-311BA4E58402}"/>
+              </a:ext>
+            </a:extLst>
+          </p:cNvPr>
           <p:cNvSpPr>
             <a:spLocks noGrp="1"/>
           </p:cNvSpPr>
@@ -5874,7 +6295,7 @@
             <a:pPr rtl="0"/>
             <a:fld id="{C6B3AB32-59DF-41F1-9618-EDFBF5049629}" type="slidenum">
               <a:rPr lang="fr-FR" noProof="0" smtClean="0"/>
-              <a:t>8</a:t>
+              <a:t>7</a:t>
             </a:fld>
             <a:endParaRPr lang="fr-FR" noProof="0"/>
           </a:p>
@@ -5883,7 +6304,7 @@
     </p:spTree>
     <p:extLst>
       <p:ext uri="{BB962C8B-B14F-4D97-AF65-F5344CB8AC3E}">
-        <p14:creationId xmlns:p14="http://schemas.microsoft.com/office/powerpoint/2010/main" val="3241041007"/>
+        <p14:creationId xmlns:p14="http://schemas.microsoft.com/office/powerpoint/2010/main" val="1873950053"/>
       </p:ext>
     </p:extLst>
   </p:cSld>
@@ -5939,15 +6360,7 @@
           <a:p>
             <a:r>
               <a:rPr lang="fr-FR" dirty="0"/>
-              <a:t>Globalement le </a:t>
-            </a:r>
-            <a:r>
-              <a:rPr lang="fr-FR" dirty="0" err="1"/>
-              <a:t>dataset</a:t>
-            </a:r>
-            <a:r>
-              <a:rPr lang="fr-FR" dirty="0"/>
-              <a:t> est propre</a:t>
+              <a:t>Pour analyser les données nous devons les préparer</a:t>
             </a:r>
           </a:p>
         </p:txBody>
@@ -5970,7 +6383,7 @@
             <a:pPr rtl="0"/>
             <a:fld id="{C6B3AB32-59DF-41F1-9618-EDFBF5049629}" type="slidenum">
               <a:rPr lang="fr-FR" noProof="0" smtClean="0"/>
-              <a:t>9</a:t>
+              <a:t>8</a:t>
             </a:fld>
             <a:endParaRPr lang="fr-FR" noProof="0"/>
           </a:p>
@@ -5979,7 +6392,7 @@
     </p:spTree>
     <p:extLst>
       <p:ext uri="{BB962C8B-B14F-4D97-AF65-F5344CB8AC3E}">
-        <p14:creationId xmlns:p14="http://schemas.microsoft.com/office/powerpoint/2010/main" val="483067361"/>
+        <p14:creationId xmlns:p14="http://schemas.microsoft.com/office/powerpoint/2010/main" val="4097205542"/>
       </p:ext>
     </p:extLst>
   </p:cSld>
@@ -6017,13 +6430,6 @@
           </p:nvPr>
         </p:nvSpPr>
         <p:spPr/>
-        <p:txBody>
-          <a:bodyPr/>
-          <a:lstStyle/>
-          <a:p>
-            <a:endParaRPr lang="fr-FR"/>
-          </a:p>
-        </p:txBody>
       </p:sp>
       <p:sp>
         <p:nvSpPr>
@@ -6042,13 +6448,15 @@
           <a:p>
             <a:r>
               <a:rPr lang="fr-FR" dirty="0"/>
-              <a:t>Identifiants</a:t>
-            </a:r>
-          </a:p>
-          <a:p>
+              <a:t>Globalement le </a:t>
+            </a:r>
+            <a:r>
+              <a:rPr lang="fr-FR" dirty="0" err="1"/>
+              <a:t>dataset</a:t>
+            </a:r>
             <a:r>
               <a:rPr lang="fr-FR" dirty="0"/>
-              <a:t>Valeurs fixes</a:t>
+              <a:t> est propre</a:t>
             </a:r>
           </a:p>
         </p:txBody>
@@ -6071,7 +6479,7 @@
             <a:pPr rtl="0"/>
             <a:fld id="{C6B3AB32-59DF-41F1-9618-EDFBF5049629}" type="slidenum">
               <a:rPr lang="fr-FR" noProof="0" smtClean="0"/>
-              <a:t>10</a:t>
+              <a:t>9</a:t>
             </a:fld>
             <a:endParaRPr lang="fr-FR" noProof="0"/>
           </a:p>
@@ -6080,7 +6488,7 @@
     </p:spTree>
     <p:extLst>
       <p:ext uri="{BB962C8B-B14F-4D97-AF65-F5344CB8AC3E}">
-        <p14:creationId xmlns:p14="http://schemas.microsoft.com/office/powerpoint/2010/main" val="1363216828"/>
+        <p14:creationId xmlns:p14="http://schemas.microsoft.com/office/powerpoint/2010/main" val="483067361"/>
       </p:ext>
     </p:extLst>
   </p:cSld>
@@ -6343,7 +6751,7 @@
             <a:pPr rtl="0"/>
             <a:fld id="{3F3B20A7-A3FE-46B9-84EA-B4257BA7E60C}" type="datetime1">
               <a:rPr lang="fr-FR" noProof="0" smtClean="0"/>
-              <a:t>07/09/2026</a:t>
+              <a:t>15/09/2026</a:t>
             </a:fld>
             <a:endParaRPr lang="fr-FR" noProof="0"/>
           </a:p>
@@ -6615,7 +7023,7 @@
             <a:pPr rtl="0"/>
             <a:fld id="{7E5E3FBB-57D2-4FB3-B51E-0FDE8CEE6791}" type="datetime1">
               <a:rPr lang="fr-FR" noProof="0" smtClean="0"/>
-              <a:t>07/09/2026</a:t>
+              <a:t>15/09/2026</a:t>
             </a:fld>
             <a:endParaRPr lang="fr-FR" noProof="0"/>
           </a:p>
@@ -6860,7 +7268,7 @@
             <a:pPr rtl="0"/>
             <a:fld id="{BE9F9435-70D7-42BA-8564-5EC34B97B69E}" type="datetime1">
               <a:rPr lang="fr-FR" noProof="0" smtClean="0"/>
-              <a:t>07/09/2026</a:t>
+              <a:t>15/09/2026</a:t>
             </a:fld>
             <a:endParaRPr lang="fr-FR" noProof="0"/>
           </a:p>
@@ -7110,7 +7518,7 @@
             <a:pPr rtl="0"/>
             <a:fld id="{29B34D2F-0B02-482E-ABD2-95D8C2FF2A58}" type="datetime1">
               <a:rPr lang="fr-FR" noProof="0" smtClean="0"/>
-              <a:t>07/09/2026</a:t>
+              <a:t>15/09/2026</a:t>
             </a:fld>
             <a:endParaRPr lang="fr-FR" noProof="0"/>
           </a:p>
@@ -7428,7 +7836,7 @@
             <a:pPr rtl="0"/>
             <a:fld id="{126ECFBB-4871-428F-B4AE-1EF357E63674}" type="datetime1">
               <a:rPr lang="fr-FR" noProof="0" smtClean="0"/>
-              <a:t>07/09/2026</a:t>
+              <a:t>15/09/2026</a:t>
             </a:fld>
             <a:endParaRPr lang="fr-FR" noProof="0"/>
           </a:p>
@@ -7739,7 +8147,7 @@
             <a:pPr rtl="0"/>
             <a:fld id="{75517F14-0D9C-452E-A596-36902551AE9C}" type="datetime1">
               <a:rPr lang="fr-FR" noProof="0" smtClean="0"/>
-              <a:t>07/09/2026</a:t>
+              <a:t>15/09/2026</a:t>
             </a:fld>
             <a:endParaRPr lang="fr-FR" noProof="0"/>
           </a:p>
@@ -8170,7 +8578,7 @@
             <a:pPr rtl="0"/>
             <a:fld id="{FA9BF800-A62B-4735-B9A7-5450007C0A78}" type="datetime1">
               <a:rPr lang="fr-FR" noProof="0" smtClean="0"/>
-              <a:t>07/09/2026</a:t>
+              <a:t>15/09/2026</a:t>
             </a:fld>
             <a:endParaRPr lang="fr-FR" noProof="0"/>
           </a:p>
@@ -8269,7 +8677,7 @@
             <a:pPr rtl="0"/>
             <a:fld id="{F47267E0-A979-4430-94B4-54611641D8EE}" type="datetime1">
               <a:rPr lang="fr-FR" noProof="0" smtClean="0"/>
-              <a:t>07/09/2026</a:t>
+              <a:t>15/09/2026</a:t>
             </a:fld>
             <a:endParaRPr lang="fr-FR" noProof="0"/>
           </a:p>
@@ -8442,7 +8850,7 @@
             <a:pPr rtl="0"/>
             <a:fld id="{C58A73B6-B077-488D-82CF-3056D5BAC73E}" type="datetime1">
               <a:rPr lang="fr-FR" noProof="0" smtClean="0"/>
-              <a:t>07/09/2026</a:t>
+              <a:t>15/09/2026</a:t>
             </a:fld>
             <a:endParaRPr lang="fr-FR" noProof="0"/>
           </a:p>
@@ -8830,7 +9238,7 @@
             <a:pPr rtl="0"/>
             <a:fld id="{98F108A3-3495-404B-9869-1BA62DF0E465}" type="datetime1">
               <a:rPr lang="fr-FR" noProof="0" smtClean="0"/>
-              <a:t>07/09/2026</a:t>
+              <a:t>15/09/2026</a:t>
             </a:fld>
             <a:endParaRPr lang="fr-FR" noProof="0"/>
           </a:p>
@@ -9123,7 +9531,7 @@
             <a:pPr rtl="0"/>
             <a:fld id="{94B550F6-4238-41AE-B6F4-4D375745C983}" type="datetime1">
               <a:rPr lang="fr-FR" noProof="0" smtClean="0"/>
-              <a:t>07/09/2026</a:t>
+              <a:t>15/09/2026</a:t>
             </a:fld>
             <a:endParaRPr lang="fr-FR" noProof="0"/>
           </a:p>
@@ -9337,7 +9745,7 @@
             <a:pPr rtl="0"/>
             <a:fld id="{BBB97F02-5EDD-4BF6-BE41-AB41D1FEABF8}" type="datetime1">
               <a:rPr lang="fr-FR" noProof="0" smtClean="0"/>
-              <a:t>07/09/2026</a:t>
+              <a:t>15/09/2026</a:t>
             </a:fld>
             <a:endParaRPr lang="fr-FR" noProof="0"/>
           </a:p>
@@ -15999,8 +16407,39 @@
                 </a:effectLst>
                 <a:latin typeface="Aptos" panose="020B0004020202020204" pitchFamily="34" charset="0"/>
               </a:rPr>
-              <a:t>Recherche du seuil optimal (F1-Score)</a:t>
-            </a:r>
+              <a:t>Recherche du seuil optimal (</a:t>
+            </a:r>
+            <a:r>
+              <a:rPr lang="fr-FR" sz="3600" kern="1200" noProof="0">
+                <a:ln w="0"/>
+                <a:solidFill>
+                  <a:schemeClr val="accent1"/>
+                </a:solidFill>
+                <a:effectLst>
+                  <a:outerShdw blurRad="38100" dist="25400" dir="5400000" algn="ctr" rotWithShape="0">
+                    <a:srgbClr val="6E747A">
+                      <a:alpha val="43000"/>
+                    </a:srgbClr>
+                  </a:outerShdw>
+                </a:effectLst>
+                <a:latin typeface="Aptos" panose="020B0004020202020204" pitchFamily="34" charset="0"/>
+              </a:rPr>
+              <a:t>Recall)</a:t>
+            </a:r>
+            <a:endParaRPr lang="fr-FR" sz="3600" kern="1200" noProof="0" dirty="0">
+              <a:ln w="0"/>
+              <a:solidFill>
+                <a:schemeClr val="accent1"/>
+              </a:solidFill>
+              <a:effectLst>
+                <a:outerShdw blurRad="38100" dist="25400" dir="5400000" algn="ctr" rotWithShape="0">
+                  <a:srgbClr val="6E747A">
+                    <a:alpha val="43000"/>
+                  </a:srgbClr>
+                </a:outerShdw>
+              </a:effectLst>
+              <a:latin typeface="Aptos" panose="020B0004020202020204" pitchFamily="34" charset="0"/>
+            </a:endParaRPr>
           </a:p>
         </p:txBody>
       </p:sp>
@@ -16369,261 +16808,6 @@
         <p:cNvPr id="1" name="">
           <a:extLst>
             <a:ext uri="{FF2B5EF4-FFF2-40B4-BE49-F238E27FC236}">
-              <a16:creationId xmlns:a16="http://schemas.microsoft.com/office/drawing/2014/main" id="{E20AEAEB-B036-4562-A5F1-1E35BF55BCB7}"/>
-            </a:ext>
-          </a:extLst>
-        </p:cNvPr>
-        <p:cNvGrpSpPr/>
-        <p:nvPr/>
-      </p:nvGrpSpPr>
-      <p:grpSpPr>
-        <a:xfrm>
-          <a:off x="0" y="0"/>
-          <a:ext cx="0" cy="0"/>
-          <a:chOff x="0" y="0"/>
-          <a:chExt cx="0" cy="0"/>
-        </a:xfrm>
-      </p:grpSpPr>
-      <p:sp>
-        <p:nvSpPr>
-          <p:cNvPr id="2" name="Titre 1">
-            <a:extLst>
-              <a:ext uri="{FF2B5EF4-FFF2-40B4-BE49-F238E27FC236}">
-                <a16:creationId xmlns:a16="http://schemas.microsoft.com/office/drawing/2014/main" id="{FCFEA3B2-BE54-52C0-6847-FCA5F6024479}"/>
-              </a:ext>
-            </a:extLst>
-          </p:cNvPr>
-          <p:cNvSpPr>
-            <a:spLocks noGrp="1"/>
-          </p:cNvSpPr>
-          <p:nvPr>
-            <p:ph type="title"/>
-          </p:nvPr>
-        </p:nvSpPr>
-        <p:spPr/>
-        <p:txBody>
-          <a:bodyPr/>
-          <a:lstStyle/>
-          <a:p>
-            <a:r>
-              <a:rPr lang="fr-FR" b="1" dirty="0"/>
-              <a:t>La courbe Précision-Rappel</a:t>
-            </a:r>
-            <a:br>
-              <a:rPr lang="fr-FR" b="1" dirty="0"/>
-            </a:br>
-            <a:r>
-              <a:rPr lang="fr-FR" sz="1600" b="1" dirty="0"/>
-              <a:t>La courbe Précision-Rappel pour choisir le seuil</a:t>
-            </a:r>
-            <a:endParaRPr lang="fr-FR" dirty="0"/>
-          </a:p>
-        </p:txBody>
-      </p:sp>
-      <p:sp>
-        <p:nvSpPr>
-          <p:cNvPr id="22" name="ZoneTexte 21">
-            <a:extLst>
-              <a:ext uri="{FF2B5EF4-FFF2-40B4-BE49-F238E27FC236}">
-                <a16:creationId xmlns:a16="http://schemas.microsoft.com/office/drawing/2014/main" id="{AE6DC2BF-F3C2-29BD-BD7A-94120B4D0DC8}"/>
-              </a:ext>
-            </a:extLst>
-          </p:cNvPr>
-          <p:cNvSpPr txBox="1"/>
-          <p:nvPr/>
-        </p:nvSpPr>
-        <p:spPr>
-          <a:xfrm>
-            <a:off x="515185" y="5255689"/>
-            <a:ext cx="11161629" cy="1200329"/>
-          </a:xfrm>
-          <a:prstGeom prst="rect">
-            <a:avLst/>
-          </a:prstGeom>
-          <a:noFill/>
-        </p:spPr>
-        <p:txBody>
-          <a:bodyPr wrap="square">
-            <a:spAutoFit/>
-          </a:bodyPr>
-          <a:lstStyle/>
-          <a:p>
-            <a:pPr marL="285750" indent="-285750">
-              <a:buFont typeface="Arial" panose="020B0604020202020204" pitchFamily="34" charset="0"/>
-              <a:buChar char="•"/>
-            </a:pPr>
-            <a:r>
-              <a:rPr lang="fr-FR" sz="2400" b="1" dirty="0">
-                <a:latin typeface="Aptos" panose="020B0004020202020204" pitchFamily="34" charset="0"/>
-              </a:rPr>
-              <a:t>Rappel      = 70 % des départs réels sont détectés</a:t>
-            </a:r>
-          </a:p>
-          <a:p>
-            <a:pPr marL="285750" indent="-285750">
-              <a:buFont typeface="Arial" panose="020B0604020202020204" pitchFamily="34" charset="0"/>
-              <a:buChar char="•"/>
-            </a:pPr>
-            <a:r>
-              <a:rPr lang="fr-FR" sz="2400" b="1" dirty="0">
-                <a:latin typeface="Aptos" panose="020B0004020202020204" pitchFamily="34" charset="0"/>
-              </a:rPr>
-              <a:t>Précision = 47 % des alertes sont correctes</a:t>
-            </a:r>
-            <a:r>
-              <a:rPr lang="fr-FR" sz="2400" dirty="0">
-                <a:latin typeface="Aptos" panose="020B0004020202020204" pitchFamily="34" charset="0"/>
-              </a:rPr>
-              <a:t> (1 alerte sur 2 est un faux positif)</a:t>
-            </a:r>
-          </a:p>
-          <a:p>
-            <a:pPr marL="285750" indent="-285750">
-              <a:buFont typeface="Arial" panose="020B0604020202020204" pitchFamily="34" charset="0"/>
-              <a:buChar char="•"/>
-            </a:pPr>
-            <a:r>
-              <a:rPr lang="fr-FR" sz="2400" b="1" dirty="0">
-                <a:latin typeface="Aptos" panose="020B0004020202020204" pitchFamily="34" charset="0"/>
-              </a:rPr>
-              <a:t>F1-Score  = 0.56</a:t>
-            </a:r>
-            <a:r>
-              <a:rPr lang="fr-FR" sz="2400" dirty="0">
-                <a:latin typeface="Aptos" panose="020B0004020202020204" pitchFamily="34" charset="0"/>
-              </a:rPr>
-              <a:t> → bon compromis global pour un problème déséquilibré</a:t>
-            </a:r>
-          </a:p>
-        </p:txBody>
-      </p:sp>
-      <p:sp>
-        <p:nvSpPr>
-          <p:cNvPr id="23" name="ZoneTexte 22">
-            <a:extLst>
-              <a:ext uri="{FF2B5EF4-FFF2-40B4-BE49-F238E27FC236}">
-                <a16:creationId xmlns:a16="http://schemas.microsoft.com/office/drawing/2014/main" id="{8E183EA0-0E17-BEF6-8DBC-B1D027A117AF}"/>
-              </a:ext>
-            </a:extLst>
-          </p:cNvPr>
-          <p:cNvSpPr txBox="1"/>
-          <p:nvPr/>
-        </p:nvSpPr>
-        <p:spPr>
-          <a:xfrm>
-            <a:off x="419270" y="2685190"/>
-            <a:ext cx="4507831" cy="1692771"/>
-          </a:xfrm>
-          <a:prstGeom prst="rect">
-            <a:avLst/>
-          </a:prstGeom>
-          <a:noFill/>
-        </p:spPr>
-        <p:txBody>
-          <a:bodyPr wrap="square">
-            <a:spAutoFit/>
-          </a:bodyPr>
-          <a:lstStyle/>
-          <a:p>
-            <a:r>
-              <a:rPr lang="fr-FR" sz="3200" b="1" u="sng" dirty="0">
-                <a:solidFill>
-                  <a:srgbClr val="FF0000"/>
-                </a:solidFill>
-                <a:latin typeface="Aptos" panose="020B0004020202020204" pitchFamily="34" charset="0"/>
-              </a:rPr>
-              <a:t>Objectif :</a:t>
-            </a:r>
-          </a:p>
-          <a:p>
-            <a:pPr lvl="1"/>
-            <a:r>
-              <a:rPr lang="fr-FR" sz="3200" b="1" dirty="0">
-                <a:solidFill>
-                  <a:srgbClr val="FF0000"/>
-                </a:solidFill>
-                <a:latin typeface="Aptos" panose="020B0004020202020204" pitchFamily="34" charset="0"/>
-              </a:rPr>
-              <a:t>Détecter au moins </a:t>
-            </a:r>
-            <a:r>
-              <a:rPr lang="fr-FR" sz="4000" b="1" dirty="0">
-                <a:solidFill>
-                  <a:srgbClr val="FF0000"/>
-                </a:solidFill>
-                <a:latin typeface="Aptos" panose="020B0004020202020204" pitchFamily="34" charset="0"/>
-              </a:rPr>
-              <a:t>68%</a:t>
-            </a:r>
-            <a:r>
-              <a:rPr lang="fr-FR" sz="3200" b="1" dirty="0">
-                <a:solidFill>
-                  <a:srgbClr val="FF0000"/>
-                </a:solidFill>
-                <a:latin typeface="Aptos" panose="020B0004020202020204" pitchFamily="34" charset="0"/>
-              </a:rPr>
-              <a:t> des départs</a:t>
-            </a:r>
-            <a:endParaRPr lang="fr-FR" sz="3200" dirty="0">
-              <a:solidFill>
-                <a:srgbClr val="FF0000"/>
-              </a:solidFill>
-              <a:latin typeface="Aptos" panose="020B0004020202020204" pitchFamily="34" charset="0"/>
-            </a:endParaRPr>
-          </a:p>
-        </p:txBody>
-      </p:sp>
-      <p:pic>
-        <p:nvPicPr>
-          <p:cNvPr id="25" name="Image 24">
-            <a:extLst>
-              <a:ext uri="{FF2B5EF4-FFF2-40B4-BE49-F238E27FC236}">
-                <a16:creationId xmlns:a16="http://schemas.microsoft.com/office/drawing/2014/main" id="{389A54AB-07AD-7AAD-BAF7-030939333621}"/>
-              </a:ext>
-            </a:extLst>
-          </p:cNvPr>
-          <p:cNvPicPr>
-            <a:picLocks noChangeAspect="1"/>
-          </p:cNvPicPr>
-          <p:nvPr/>
-        </p:nvPicPr>
-        <p:blipFill>
-          <a:blip r:embed="rId3"/>
-          <a:stretch>
-            <a:fillRect/>
-          </a:stretch>
-        </p:blipFill>
-        <p:spPr>
-          <a:xfrm>
-            <a:off x="5618747" y="1956561"/>
-            <a:ext cx="5678906" cy="3299128"/>
-          </a:xfrm>
-          <a:prstGeom prst="rect">
-            <a:avLst/>
-          </a:prstGeom>
-        </p:spPr>
-      </p:pic>
-    </p:spTree>
-    <p:extLst>
-      <p:ext uri="{BB962C8B-B14F-4D97-AF65-F5344CB8AC3E}">
-        <p14:creationId xmlns:p14="http://schemas.microsoft.com/office/powerpoint/2010/main" val="613504890"/>
-      </p:ext>
-    </p:extLst>
-  </p:cSld>
-  <p:clrMapOvr>
-    <a:masterClrMapping/>
-  </p:clrMapOvr>
-</p:sld>
-</file>
-
-<file path=ppt/slides/slide29.xml><?xml version="1.0" encoding="utf-8"?>
-<p:sld xmlns:a="http://schemas.openxmlformats.org/drawingml/2006/main" xmlns:r="http://schemas.openxmlformats.org/officeDocument/2006/relationships" xmlns:p="http://schemas.openxmlformats.org/presentationml/2006/main">
-  <p:cSld>
-    <p:spTree>
-      <p:nvGrpSpPr>
-        <p:cNvPr id="1" name="">
-          <a:extLst>
-            <a:ext uri="{FF2B5EF4-FFF2-40B4-BE49-F238E27FC236}">
               <a16:creationId xmlns:a16="http://schemas.microsoft.com/office/drawing/2014/main" id="{6381E41C-1636-12A3-0A35-A04199562099}"/>
             </a:ext>
           </a:extLst>
@@ -16757,6 +16941,260 @@
     <p:extLst>
       <p:ext uri="{BB962C8B-B14F-4D97-AF65-F5344CB8AC3E}">
         <p14:creationId xmlns:p14="http://schemas.microsoft.com/office/powerpoint/2010/main" val="1496315645"/>
+      </p:ext>
+    </p:extLst>
+  </p:cSld>
+  <p:clrMapOvr>
+    <a:masterClrMapping/>
+  </p:clrMapOvr>
+</p:sld>
+</file>
+
+<file path=ppt/slides/slide29.xml><?xml version="1.0" encoding="utf-8"?>
+<p:sld xmlns:a="http://schemas.openxmlformats.org/drawingml/2006/main" xmlns:r="http://schemas.openxmlformats.org/officeDocument/2006/relationships" xmlns:p="http://schemas.openxmlformats.org/presentationml/2006/main">
+  <p:cSld>
+    <p:spTree>
+      <p:nvGrpSpPr>
+        <p:cNvPr id="1" name="">
+          <a:extLst>
+            <a:ext uri="{FF2B5EF4-FFF2-40B4-BE49-F238E27FC236}">
+              <a16:creationId xmlns:a16="http://schemas.microsoft.com/office/drawing/2014/main" id="{2B47A2D6-CBB2-4579-2311-CE675DCE2F0A}"/>
+            </a:ext>
+          </a:extLst>
+        </p:cNvPr>
+        <p:cNvGrpSpPr/>
+        <p:nvPr/>
+      </p:nvGrpSpPr>
+      <p:grpSpPr>
+        <a:xfrm>
+          <a:off x="0" y="0"/>
+          <a:ext cx="0" cy="0"/>
+          <a:chOff x="0" y="0"/>
+          <a:chExt cx="0" cy="0"/>
+        </a:xfrm>
+      </p:grpSpPr>
+      <p:pic>
+        <p:nvPicPr>
+          <p:cNvPr id="10" name="Image 9">
+            <a:extLst>
+              <a:ext uri="{FF2B5EF4-FFF2-40B4-BE49-F238E27FC236}">
+                <a16:creationId xmlns:a16="http://schemas.microsoft.com/office/drawing/2014/main" id="{18E4D03C-1099-C6C1-76FC-7ED6F262F7BA}"/>
+              </a:ext>
+            </a:extLst>
+          </p:cNvPr>
+          <p:cNvPicPr>
+            <a:picLocks noChangeAspect="1"/>
+          </p:cNvPicPr>
+          <p:nvPr/>
+        </p:nvPicPr>
+        <p:blipFill>
+          <a:blip r:embed="rId3"/>
+          <a:stretch>
+            <a:fillRect/>
+          </a:stretch>
+        </p:blipFill>
+        <p:spPr>
+          <a:xfrm>
+            <a:off x="1370419" y="2521771"/>
+            <a:ext cx="9451162" cy="3387259"/>
+          </a:xfrm>
+          <a:prstGeom prst="rect">
+            <a:avLst/>
+          </a:prstGeom>
+        </p:spPr>
+      </p:pic>
+      <p:sp>
+        <p:nvSpPr>
+          <p:cNvPr id="4" name="Titre 3">
+            <a:extLst>
+              <a:ext uri="{FF2B5EF4-FFF2-40B4-BE49-F238E27FC236}">
+                <a16:creationId xmlns:a16="http://schemas.microsoft.com/office/drawing/2014/main" id="{C2003356-66FB-93DE-47CB-666EE7B46E04}"/>
+              </a:ext>
+            </a:extLst>
+          </p:cNvPr>
+          <p:cNvSpPr>
+            <a:spLocks noGrp="1"/>
+          </p:cNvSpPr>
+          <p:nvPr>
+            <p:ph type="title"/>
+          </p:nvPr>
+        </p:nvSpPr>
+        <p:spPr/>
+        <p:txBody>
+          <a:bodyPr/>
+          <a:lstStyle/>
+          <a:p>
+            <a:r>
+              <a:rPr lang="fr-FR" b="1" dirty="0"/>
+              <a:t>EVALUATION Finale</a:t>
+            </a:r>
+            <a:br>
+              <a:rPr lang="fr-FR" dirty="0"/>
+            </a:br>
+            <a:endParaRPr lang="fr-FR" dirty="0"/>
+          </a:p>
+        </p:txBody>
+      </p:sp>
+      <p:sp>
+        <p:nvSpPr>
+          <p:cNvPr id="6" name="Rectangle 5">
+            <a:extLst>
+              <a:ext uri="{FF2B5EF4-FFF2-40B4-BE49-F238E27FC236}">
+                <a16:creationId xmlns:a16="http://schemas.microsoft.com/office/drawing/2014/main" id="{F21E06C2-0C33-3AFA-53C8-560A2C3EF4EB}"/>
+              </a:ext>
+            </a:extLst>
+          </p:cNvPr>
+          <p:cNvSpPr/>
+          <p:nvPr/>
+        </p:nvSpPr>
+        <p:spPr>
+          <a:xfrm>
+            <a:off x="4768987" y="4405815"/>
+            <a:ext cx="1125895" cy="426556"/>
+          </a:xfrm>
+          <a:prstGeom prst="rect">
+            <a:avLst/>
+          </a:prstGeom>
+          <a:noFill/>
+          <a:ln w="76200">
+            <a:solidFill>
+              <a:srgbClr val="FFC000"/>
+            </a:solidFill>
+          </a:ln>
+        </p:spPr>
+        <p:style>
+          <a:lnRef idx="2">
+            <a:schemeClr val="accent1">
+              <a:shade val="15000"/>
+            </a:schemeClr>
+          </a:lnRef>
+          <a:fillRef idx="1">
+            <a:schemeClr val="accent1"/>
+          </a:fillRef>
+          <a:effectRef idx="0">
+            <a:schemeClr val="accent1"/>
+          </a:effectRef>
+          <a:fontRef idx="minor">
+            <a:schemeClr val="lt1"/>
+          </a:fontRef>
+        </p:style>
+        <p:txBody>
+          <a:bodyPr rtlCol="0" anchor="ctr"/>
+          <a:lstStyle/>
+          <a:p>
+            <a:pPr algn="ctr"/>
+            <a:endParaRPr lang="fr-FR"/>
+          </a:p>
+        </p:txBody>
+      </p:sp>
+      <p:sp>
+        <p:nvSpPr>
+          <p:cNvPr id="7" name="Rectangle 6">
+            <a:extLst>
+              <a:ext uri="{FF2B5EF4-FFF2-40B4-BE49-F238E27FC236}">
+                <a16:creationId xmlns:a16="http://schemas.microsoft.com/office/drawing/2014/main" id="{2445BFBA-8AA7-9616-A5B3-96DB8D03DA5F}"/>
+              </a:ext>
+            </a:extLst>
+          </p:cNvPr>
+          <p:cNvSpPr/>
+          <p:nvPr/>
+        </p:nvSpPr>
+        <p:spPr>
+          <a:xfrm>
+            <a:off x="6224338" y="3979259"/>
+            <a:ext cx="1124358" cy="426556"/>
+          </a:xfrm>
+          <a:prstGeom prst="rect">
+            <a:avLst/>
+          </a:prstGeom>
+          <a:noFill/>
+          <a:ln w="76200">
+            <a:solidFill>
+              <a:srgbClr val="FFC000"/>
+            </a:solidFill>
+          </a:ln>
+        </p:spPr>
+        <p:style>
+          <a:lnRef idx="2">
+            <a:schemeClr val="accent1">
+              <a:shade val="15000"/>
+            </a:schemeClr>
+          </a:lnRef>
+          <a:fillRef idx="1">
+            <a:schemeClr val="accent1"/>
+          </a:fillRef>
+          <a:effectRef idx="0">
+            <a:schemeClr val="accent1"/>
+          </a:effectRef>
+          <a:fontRef idx="minor">
+            <a:schemeClr val="lt1"/>
+          </a:fontRef>
+        </p:style>
+        <p:txBody>
+          <a:bodyPr rtlCol="0" anchor="ctr"/>
+          <a:lstStyle/>
+          <a:p>
+            <a:pPr algn="ctr"/>
+            <a:endParaRPr lang="fr-FR"/>
+          </a:p>
+        </p:txBody>
+      </p:sp>
+      <p:sp>
+        <p:nvSpPr>
+          <p:cNvPr id="8" name="Rectangle 7">
+            <a:extLst>
+              <a:ext uri="{FF2B5EF4-FFF2-40B4-BE49-F238E27FC236}">
+                <a16:creationId xmlns:a16="http://schemas.microsoft.com/office/drawing/2014/main" id="{D0F50017-7F3C-2FD0-E881-CE75101057CF}"/>
+              </a:ext>
+            </a:extLst>
+          </p:cNvPr>
+          <p:cNvSpPr/>
+          <p:nvPr/>
+        </p:nvSpPr>
+        <p:spPr>
+          <a:xfrm>
+            <a:off x="8007607" y="3979259"/>
+            <a:ext cx="1124359" cy="426556"/>
+          </a:xfrm>
+          <a:prstGeom prst="rect">
+            <a:avLst/>
+          </a:prstGeom>
+          <a:noFill/>
+          <a:ln w="76200">
+            <a:solidFill>
+              <a:srgbClr val="FFC000"/>
+            </a:solidFill>
+          </a:ln>
+        </p:spPr>
+        <p:style>
+          <a:lnRef idx="2">
+            <a:schemeClr val="accent1">
+              <a:shade val="15000"/>
+            </a:schemeClr>
+          </a:lnRef>
+          <a:fillRef idx="1">
+            <a:schemeClr val="accent1"/>
+          </a:fillRef>
+          <a:effectRef idx="0">
+            <a:schemeClr val="accent1"/>
+          </a:effectRef>
+          <a:fontRef idx="minor">
+            <a:schemeClr val="lt1"/>
+          </a:fontRef>
+        </p:style>
+        <p:txBody>
+          <a:bodyPr rtlCol="0" anchor="ctr"/>
+          <a:lstStyle/>
+          <a:p>
+            <a:pPr algn="ctr"/>
+            <a:endParaRPr lang="fr-FR"/>
+          </a:p>
+        </p:txBody>
+      </p:sp>
+    </p:spTree>
+    <p:extLst>
+      <p:ext uri="{BB962C8B-B14F-4D97-AF65-F5344CB8AC3E}">
+        <p14:creationId xmlns:p14="http://schemas.microsoft.com/office/powerpoint/2010/main" val="431691040"/>
       </p:ext>
     </p:extLst>
   </p:cSld>
@@ -16837,7 +17275,7 @@
           <p:nvPr/>
         </p:nvPicPr>
         <p:blipFill>
-          <a:blip r:embed="rId2">
+          <a:blip r:embed="rId3">
             <a:extLst>
               <a:ext uri="{28A0092B-C50C-407E-A947-70E740481C1C}">
                 <a14:useLocalDpi xmlns:a14="http://schemas.microsoft.com/office/drawing/2010/main" val="0"/>
@@ -16887,7 +17325,7 @@
           <p:nvPr/>
         </p:nvPicPr>
         <p:blipFill>
-          <a:blip r:embed="rId3">
+          <a:blip r:embed="rId4">
             <a:extLst>
               <a:ext uri="{28A0092B-C50C-407E-A947-70E740481C1C}">
                 <a14:useLocalDpi xmlns:a14="http://schemas.microsoft.com/office/drawing/2010/main" val="0"/>
@@ -16937,7 +17375,7 @@
           <p:nvPr/>
         </p:nvPicPr>
         <p:blipFill>
-          <a:blip r:embed="rId4">
+          <a:blip r:embed="rId5">
             <a:extLst>
               <a:ext uri="{28A0092B-C50C-407E-A947-70E740481C1C}">
                 <a14:useLocalDpi xmlns:a14="http://schemas.microsoft.com/office/drawing/2010/main" val="0"/>
@@ -16987,7 +17425,7 @@
           <p:nvPr/>
         </p:nvPicPr>
         <p:blipFill rotWithShape="1">
-          <a:blip r:embed="rId5">
+          <a:blip r:embed="rId6">
             <a:extLst>
               <a:ext uri="{28A0092B-C50C-407E-A947-70E740481C1C}">
                 <a14:useLocalDpi xmlns:a14="http://schemas.microsoft.com/office/drawing/2010/main" val="0"/>
@@ -17037,7 +17475,7 @@
           <p:nvPr/>
         </p:nvPicPr>
         <p:blipFill>
-          <a:blip r:embed="rId6">
+          <a:blip r:embed="rId7">
             <a:extLst>
               <a:ext uri="{28A0092B-C50C-407E-A947-70E740481C1C}">
                 <a14:useLocalDpi xmlns:a14="http://schemas.microsoft.com/office/drawing/2010/main" val="0"/>
@@ -17101,7 +17539,7 @@
         <p:cNvPr id="1" name="">
           <a:extLst>
             <a:ext uri="{FF2B5EF4-FFF2-40B4-BE49-F238E27FC236}">
-              <a16:creationId xmlns:a16="http://schemas.microsoft.com/office/drawing/2014/main" id="{2B47A2D6-CBB2-4579-2311-CE675DCE2F0A}"/>
+              <a16:creationId xmlns:a16="http://schemas.microsoft.com/office/drawing/2014/main" id="{E20AEAEB-B036-4562-A5F1-1E35BF55BCB7}"/>
             </a:ext>
           </a:extLst>
         </p:cNvPr>
@@ -17116,12 +17554,201 @@
           <a:chExt cx="0" cy="0"/>
         </a:xfrm>
       </p:grpSpPr>
+      <p:sp>
+        <p:nvSpPr>
+          <p:cNvPr id="2" name="Titre 1">
+            <a:extLst>
+              <a:ext uri="{FF2B5EF4-FFF2-40B4-BE49-F238E27FC236}">
+                <a16:creationId xmlns:a16="http://schemas.microsoft.com/office/drawing/2014/main" id="{FCFEA3B2-BE54-52C0-6847-FCA5F6024479}"/>
+              </a:ext>
+            </a:extLst>
+          </p:cNvPr>
+          <p:cNvSpPr>
+            <a:spLocks noGrp="1"/>
+          </p:cNvSpPr>
+          <p:nvPr>
+            <p:ph type="title"/>
+          </p:nvPr>
+        </p:nvSpPr>
+        <p:spPr/>
+        <p:txBody>
+          <a:bodyPr/>
+          <a:lstStyle/>
+          <a:p>
+            <a:r>
+              <a:rPr lang="fr-FR" b="1" dirty="0"/>
+              <a:t>La courbe Précision-Rappel</a:t>
+            </a:r>
+            <a:br>
+              <a:rPr lang="fr-FR" b="1" dirty="0"/>
+            </a:br>
+            <a:r>
+              <a:rPr lang="fr-FR" sz="1600" b="1" dirty="0"/>
+              <a:t>La courbe Précision-Rappel pour choisir le seuil</a:t>
+            </a:r>
+            <a:endParaRPr lang="fr-FR" dirty="0"/>
+          </a:p>
+        </p:txBody>
+      </p:sp>
+      <p:sp>
+        <p:nvSpPr>
+          <p:cNvPr id="22" name="ZoneTexte 21">
+            <a:extLst>
+              <a:ext uri="{FF2B5EF4-FFF2-40B4-BE49-F238E27FC236}">
+                <a16:creationId xmlns:a16="http://schemas.microsoft.com/office/drawing/2014/main" id="{AE6DC2BF-F3C2-29BD-BD7A-94120B4D0DC8}"/>
+              </a:ext>
+            </a:extLst>
+          </p:cNvPr>
+          <p:cNvSpPr txBox="1"/>
+          <p:nvPr/>
+        </p:nvSpPr>
+        <p:spPr>
+          <a:xfrm>
+            <a:off x="515185" y="5255689"/>
+            <a:ext cx="11161629" cy="1200329"/>
+          </a:xfrm>
+          <a:prstGeom prst="rect">
+            <a:avLst/>
+          </a:prstGeom>
+          <a:noFill/>
+        </p:spPr>
+        <p:txBody>
+          <a:bodyPr wrap="square">
+            <a:spAutoFit/>
+          </a:bodyPr>
+          <a:lstStyle/>
+          <a:p>
+            <a:pPr marL="285750" indent="-285750">
+              <a:buFont typeface="Arial" panose="020B0604020202020204" pitchFamily="34" charset="0"/>
+              <a:buChar char="•"/>
+            </a:pPr>
+            <a:r>
+              <a:rPr lang="fr-FR" sz="2400" b="1" dirty="0">
+                <a:latin typeface="Aptos" panose="020B0004020202020204" pitchFamily="34" charset="0"/>
+              </a:rPr>
+              <a:t>Rappel      = 70 % des départs réels sont détectés</a:t>
+            </a:r>
+          </a:p>
+          <a:p>
+            <a:pPr marL="285750" indent="-285750">
+              <a:buFont typeface="Arial" panose="020B0604020202020204" pitchFamily="34" charset="0"/>
+              <a:buChar char="•"/>
+            </a:pPr>
+            <a:r>
+              <a:rPr lang="fr-FR" sz="2400" b="1" dirty="0">
+                <a:latin typeface="Aptos" panose="020B0004020202020204" pitchFamily="34" charset="0"/>
+              </a:rPr>
+              <a:t>Précision = 47 % des alertes sont correctes</a:t>
+            </a:r>
+            <a:r>
+              <a:rPr lang="fr-FR" sz="2400" dirty="0">
+                <a:latin typeface="Aptos" panose="020B0004020202020204" pitchFamily="34" charset="0"/>
+              </a:rPr>
+              <a:t> (1 alerte sur 2 est un faux positif)</a:t>
+            </a:r>
+          </a:p>
+          <a:p>
+            <a:pPr marL="285750" indent="-285750">
+              <a:buFont typeface="Arial" panose="020B0604020202020204" pitchFamily="34" charset="0"/>
+              <a:buChar char="•"/>
+            </a:pPr>
+            <a:r>
+              <a:rPr lang="fr-FR" sz="2400" b="1" dirty="0">
+                <a:latin typeface="Aptos" panose="020B0004020202020204" pitchFamily="34" charset="0"/>
+              </a:rPr>
+              <a:t>F1-Score  = 0.56</a:t>
+            </a:r>
+            <a:r>
+              <a:rPr lang="fr-FR" sz="2400" dirty="0">
+                <a:latin typeface="Aptos" panose="020B0004020202020204" pitchFamily="34" charset="0"/>
+              </a:rPr>
+              <a:t> → bon compromis global pour un problème déséquilibré</a:t>
+            </a:r>
+          </a:p>
+        </p:txBody>
+      </p:sp>
+      <p:sp>
+        <p:nvSpPr>
+          <p:cNvPr id="23" name="ZoneTexte 22">
+            <a:extLst>
+              <a:ext uri="{FF2B5EF4-FFF2-40B4-BE49-F238E27FC236}">
+                <a16:creationId xmlns:a16="http://schemas.microsoft.com/office/drawing/2014/main" id="{8E183EA0-0E17-BEF6-8DBC-B1D027A117AF}"/>
+              </a:ext>
+            </a:extLst>
+          </p:cNvPr>
+          <p:cNvSpPr txBox="1"/>
+          <p:nvPr/>
+        </p:nvSpPr>
+        <p:spPr>
+          <a:xfrm>
+            <a:off x="419270" y="2685190"/>
+            <a:ext cx="4507831" cy="1692771"/>
+          </a:xfrm>
+          <a:prstGeom prst="rect">
+            <a:avLst/>
+          </a:prstGeom>
+          <a:noFill/>
+        </p:spPr>
+        <p:txBody>
+          <a:bodyPr wrap="square">
+            <a:spAutoFit/>
+          </a:bodyPr>
+          <a:lstStyle/>
+          <a:p>
+            <a:r>
+              <a:rPr lang="fr-FR" sz="3200" b="1" u="sng" dirty="0">
+                <a:solidFill>
+                  <a:srgbClr val="FF0000"/>
+                </a:solidFill>
+                <a:latin typeface="Aptos" panose="020B0004020202020204" pitchFamily="34" charset="0"/>
+              </a:rPr>
+              <a:t>Objectif :</a:t>
+            </a:r>
+          </a:p>
+          <a:p>
+            <a:pPr lvl="1"/>
+            <a:r>
+              <a:rPr lang="fr-FR" sz="3200" b="1" dirty="0">
+                <a:solidFill>
+                  <a:srgbClr val="FF0000"/>
+                </a:solidFill>
+                <a:latin typeface="Aptos" panose="020B0004020202020204" pitchFamily="34" charset="0"/>
+              </a:rPr>
+              <a:t>Détecter au moins </a:t>
+            </a:r>
+            <a:r>
+              <a:rPr lang="fr-FR" sz="4000" b="1" dirty="0">
+                <a:solidFill>
+                  <a:srgbClr val="FF0000"/>
+                </a:solidFill>
+                <a:latin typeface="Aptos" panose="020B0004020202020204" pitchFamily="34" charset="0"/>
+              </a:rPr>
+              <a:t>68%</a:t>
+            </a:r>
+            <a:r>
+              <a:rPr lang="fr-FR" sz="3200" b="1" dirty="0">
+                <a:solidFill>
+                  <a:srgbClr val="FF0000"/>
+                </a:solidFill>
+                <a:latin typeface="Aptos" panose="020B0004020202020204" pitchFamily="34" charset="0"/>
+              </a:rPr>
+              <a:t> des départs</a:t>
+            </a:r>
+            <a:endParaRPr lang="fr-FR" sz="3200" dirty="0">
+              <a:solidFill>
+                <a:srgbClr val="FF0000"/>
+              </a:solidFill>
+              <a:latin typeface="Aptos" panose="020B0004020202020204" pitchFamily="34" charset="0"/>
+            </a:endParaRPr>
+          </a:p>
+        </p:txBody>
+      </p:sp>
       <p:pic>
         <p:nvPicPr>
-          <p:cNvPr id="10" name="Image 9">
-            <a:extLst>
-              <a:ext uri="{FF2B5EF4-FFF2-40B4-BE49-F238E27FC236}">
-                <a16:creationId xmlns:a16="http://schemas.microsoft.com/office/drawing/2014/main" id="{18E4D03C-1099-C6C1-76FC-7ED6F262F7BA}"/>
+          <p:cNvPr id="25" name="Image 24">
+            <a:extLst>
+              <a:ext uri="{FF2B5EF4-FFF2-40B4-BE49-F238E27FC236}">
+                <a16:creationId xmlns:a16="http://schemas.microsoft.com/office/drawing/2014/main" id="{389A54AB-07AD-7AAD-BAF7-030939333621}"/>
               </a:ext>
             </a:extLst>
           </p:cNvPr>
@@ -17138,206 +17765,18 @@
         </p:blipFill>
         <p:spPr>
           <a:xfrm>
-            <a:off x="1370419" y="2521771"/>
-            <a:ext cx="9451162" cy="3387259"/>
+            <a:off x="5618747" y="1956561"/>
+            <a:ext cx="5678906" cy="3299128"/>
           </a:xfrm>
           <a:prstGeom prst="rect">
             <a:avLst/>
           </a:prstGeom>
         </p:spPr>
       </p:pic>
-      <p:sp>
-        <p:nvSpPr>
-          <p:cNvPr id="4" name="Titre 3">
-            <a:extLst>
-              <a:ext uri="{FF2B5EF4-FFF2-40B4-BE49-F238E27FC236}">
-                <a16:creationId xmlns:a16="http://schemas.microsoft.com/office/drawing/2014/main" id="{C2003356-66FB-93DE-47CB-666EE7B46E04}"/>
-              </a:ext>
-            </a:extLst>
-          </p:cNvPr>
-          <p:cNvSpPr>
-            <a:spLocks noGrp="1"/>
-          </p:cNvSpPr>
-          <p:nvPr>
-            <p:ph type="title"/>
-          </p:nvPr>
-        </p:nvSpPr>
-        <p:spPr/>
-        <p:txBody>
-          <a:bodyPr/>
-          <a:lstStyle/>
-          <a:p>
-            <a:r>
-              <a:rPr lang="fr-FR" b="1" dirty="0"/>
-              <a:t>EVALUATION Finale</a:t>
-            </a:r>
-            <a:br>
-              <a:rPr lang="fr-FR" dirty="0"/>
-            </a:br>
-            <a:endParaRPr lang="fr-FR" dirty="0"/>
-          </a:p>
-        </p:txBody>
-      </p:sp>
-      <p:sp>
-        <p:nvSpPr>
-          <p:cNvPr id="6" name="Rectangle 5">
-            <a:extLst>
-              <a:ext uri="{FF2B5EF4-FFF2-40B4-BE49-F238E27FC236}">
-                <a16:creationId xmlns:a16="http://schemas.microsoft.com/office/drawing/2014/main" id="{F21E06C2-0C33-3AFA-53C8-560A2C3EF4EB}"/>
-              </a:ext>
-            </a:extLst>
-          </p:cNvPr>
-          <p:cNvSpPr/>
-          <p:nvPr/>
-        </p:nvSpPr>
-        <p:spPr>
-          <a:xfrm>
-            <a:off x="8007607" y="4405815"/>
-            <a:ext cx="1125895" cy="426556"/>
-          </a:xfrm>
-          <a:prstGeom prst="rect">
-            <a:avLst/>
-          </a:prstGeom>
-          <a:noFill/>
-          <a:ln w="76200">
-            <a:solidFill>
-              <a:srgbClr val="FFC000"/>
-            </a:solidFill>
-          </a:ln>
-        </p:spPr>
-        <p:style>
-          <a:lnRef idx="2">
-            <a:schemeClr val="accent1">
-              <a:shade val="15000"/>
-            </a:schemeClr>
-          </a:lnRef>
-          <a:fillRef idx="1">
-            <a:schemeClr val="accent1"/>
-          </a:fillRef>
-          <a:effectRef idx="0">
-            <a:schemeClr val="accent1"/>
-          </a:effectRef>
-          <a:fontRef idx="minor">
-            <a:schemeClr val="lt1"/>
-          </a:fontRef>
-        </p:style>
-        <p:txBody>
-          <a:bodyPr rtlCol="0" anchor="ctr"/>
-          <a:lstStyle/>
-          <a:p>
-            <a:pPr algn="ctr"/>
-            <a:endParaRPr lang="fr-FR"/>
-          </a:p>
-        </p:txBody>
-      </p:sp>
-      <p:sp>
-        <p:nvSpPr>
-          <p:cNvPr id="7" name="Rectangle 6">
-            <a:extLst>
-              <a:ext uri="{FF2B5EF4-FFF2-40B4-BE49-F238E27FC236}">
-                <a16:creationId xmlns:a16="http://schemas.microsoft.com/office/drawing/2014/main" id="{2445BFBA-8AA7-9616-A5B3-96DB8D03DA5F}"/>
-              </a:ext>
-            </a:extLst>
-          </p:cNvPr>
-          <p:cNvSpPr/>
-          <p:nvPr/>
-        </p:nvSpPr>
-        <p:spPr>
-          <a:xfrm>
-            <a:off x="6224338" y="3979259"/>
-            <a:ext cx="1124358" cy="426556"/>
-          </a:xfrm>
-          <a:prstGeom prst="rect">
-            <a:avLst/>
-          </a:prstGeom>
-          <a:noFill/>
-          <a:ln w="76200">
-            <a:solidFill>
-              <a:srgbClr val="FFC000"/>
-            </a:solidFill>
-          </a:ln>
-        </p:spPr>
-        <p:style>
-          <a:lnRef idx="2">
-            <a:schemeClr val="accent1">
-              <a:shade val="15000"/>
-            </a:schemeClr>
-          </a:lnRef>
-          <a:fillRef idx="1">
-            <a:schemeClr val="accent1"/>
-          </a:fillRef>
-          <a:effectRef idx="0">
-            <a:schemeClr val="accent1"/>
-          </a:effectRef>
-          <a:fontRef idx="minor">
-            <a:schemeClr val="lt1"/>
-          </a:fontRef>
-        </p:style>
-        <p:txBody>
-          <a:bodyPr rtlCol="0" anchor="ctr"/>
-          <a:lstStyle/>
-          <a:p>
-            <a:pPr algn="ctr"/>
-            <a:endParaRPr lang="fr-FR"/>
-          </a:p>
-        </p:txBody>
-      </p:sp>
-      <p:sp>
-        <p:nvSpPr>
-          <p:cNvPr id="8" name="Rectangle 7">
-            <a:extLst>
-              <a:ext uri="{FF2B5EF4-FFF2-40B4-BE49-F238E27FC236}">
-                <a16:creationId xmlns:a16="http://schemas.microsoft.com/office/drawing/2014/main" id="{D0F50017-7F3C-2FD0-E881-CE75101057CF}"/>
-              </a:ext>
-            </a:extLst>
-          </p:cNvPr>
-          <p:cNvSpPr/>
-          <p:nvPr/>
-        </p:nvSpPr>
-        <p:spPr>
-          <a:xfrm>
-            <a:off x="8007607" y="3979259"/>
-            <a:ext cx="1124359" cy="426556"/>
-          </a:xfrm>
-          <a:prstGeom prst="rect">
-            <a:avLst/>
-          </a:prstGeom>
-          <a:noFill/>
-          <a:ln w="76200">
-            <a:solidFill>
-              <a:srgbClr val="FFC000"/>
-            </a:solidFill>
-          </a:ln>
-        </p:spPr>
-        <p:style>
-          <a:lnRef idx="2">
-            <a:schemeClr val="accent1">
-              <a:shade val="15000"/>
-            </a:schemeClr>
-          </a:lnRef>
-          <a:fillRef idx="1">
-            <a:schemeClr val="accent1"/>
-          </a:fillRef>
-          <a:effectRef idx="0">
-            <a:schemeClr val="accent1"/>
-          </a:effectRef>
-          <a:fontRef idx="minor">
-            <a:schemeClr val="lt1"/>
-          </a:fontRef>
-        </p:style>
-        <p:txBody>
-          <a:bodyPr rtlCol="0" anchor="ctr"/>
-          <a:lstStyle/>
-          <a:p>
-            <a:pPr algn="ctr"/>
-            <a:endParaRPr lang="fr-FR"/>
-          </a:p>
-        </p:txBody>
-      </p:sp>
     </p:spTree>
     <p:extLst>
       <p:ext uri="{BB962C8B-B14F-4D97-AF65-F5344CB8AC3E}">
-        <p14:creationId xmlns:p14="http://schemas.microsoft.com/office/powerpoint/2010/main" val="431691040"/>
+        <p14:creationId xmlns:p14="http://schemas.microsoft.com/office/powerpoint/2010/main" val="613504890"/>
       </p:ext>
     </p:extLst>
   </p:cSld>
@@ -21373,785 +21812,6 @@
         <p:cNvPr id="1" name="">
           <a:extLst>
             <a:ext uri="{FF2B5EF4-FFF2-40B4-BE49-F238E27FC236}">
-              <a16:creationId xmlns:a16="http://schemas.microsoft.com/office/drawing/2014/main" id="{3517CDB8-06B4-26A6-9C29-55AFA9C3EB38}"/>
-            </a:ext>
-          </a:extLst>
-        </p:cNvPr>
-        <p:cNvGrpSpPr/>
-        <p:nvPr/>
-      </p:nvGrpSpPr>
-      <p:grpSpPr>
-        <a:xfrm>
-          <a:off x="0" y="0"/>
-          <a:ext cx="0" cy="0"/>
-          <a:chOff x="0" y="0"/>
-          <a:chExt cx="0" cy="0"/>
-        </a:xfrm>
-      </p:grpSpPr>
-      <p:sp>
-        <p:nvSpPr>
-          <p:cNvPr id="2" name="Titre 1">
-            <a:extLst>
-              <a:ext uri="{FF2B5EF4-FFF2-40B4-BE49-F238E27FC236}">
-                <a16:creationId xmlns:a16="http://schemas.microsoft.com/office/drawing/2014/main" id="{C4B186BD-35A8-C0C0-14E7-916A3EEBF267}"/>
-              </a:ext>
-            </a:extLst>
-          </p:cNvPr>
-          <p:cNvSpPr>
-            <a:spLocks noGrp="1"/>
-          </p:cNvSpPr>
-          <p:nvPr>
-            <p:ph type="title"/>
-          </p:nvPr>
-        </p:nvSpPr>
-        <p:spPr/>
-        <p:txBody>
-          <a:bodyPr/>
-          <a:lstStyle/>
-          <a:p>
-            <a:pPr algn="ctr"/>
-            <a:r>
-              <a:rPr lang="fr-FR" dirty="0"/>
-              <a:t>PIPELINE DE TRAITEMENT</a:t>
-            </a:r>
-          </a:p>
-        </p:txBody>
-      </p:sp>
-      <p:pic>
-        <p:nvPicPr>
-          <p:cNvPr id="2050" name="Picture 2" descr="Update Details - Python: Styled DataFrame Viewer 0.12.0 | JetBrains  Marketplace">
-            <a:extLst>
-              <a:ext uri="{FF2B5EF4-FFF2-40B4-BE49-F238E27FC236}">
-                <a16:creationId xmlns:a16="http://schemas.microsoft.com/office/drawing/2014/main" id="{3A7B0C41-3BCF-DFD4-65C6-EF7158DD13F0}"/>
-              </a:ext>
-            </a:extLst>
-          </p:cNvPr>
-          <p:cNvPicPr>
-            <a:picLocks noChangeAspect="1" noChangeArrowheads="1"/>
-          </p:cNvPicPr>
-          <p:nvPr/>
-        </p:nvPicPr>
-        <p:blipFill>
-          <a:blip r:embed="rId3">
-            <a:extLst>
-              <a:ext uri="{28A0092B-C50C-407E-A947-70E740481C1C}">
-                <a14:useLocalDpi xmlns:a14="http://schemas.microsoft.com/office/drawing/2010/main" val="0"/>
-              </a:ext>
-            </a:extLst>
-          </a:blip>
-          <a:srcRect/>
-          <a:stretch>
-            <a:fillRect/>
-          </a:stretch>
-        </p:blipFill>
-        <p:spPr bwMode="auto">
-          <a:xfrm>
-            <a:off x="9343165" y="2812636"/>
-            <a:ext cx="2160943" cy="2160943"/>
-          </a:xfrm>
-          <a:prstGeom prst="rect">
-            <a:avLst/>
-          </a:prstGeom>
-          <a:noFill/>
-          <a:extLst>
-            <a:ext uri="{909E8E84-426E-40DD-AFC4-6F175D3DCCD1}">
-              <a14:hiddenFill xmlns:a14="http://schemas.microsoft.com/office/drawing/2010/main">
-                <a:solidFill>
-                  <a:srgbClr val="FFFFFF"/>
-                </a:solidFill>
-              </a14:hiddenFill>
-            </a:ext>
-          </a:extLst>
-        </p:spPr>
-      </p:pic>
-      <p:sp>
-        <p:nvSpPr>
-          <p:cNvPr id="19" name="ZoneTexte 18">
-            <a:extLst>
-              <a:ext uri="{FF2B5EF4-FFF2-40B4-BE49-F238E27FC236}">
-                <a16:creationId xmlns:a16="http://schemas.microsoft.com/office/drawing/2014/main" id="{E90CD0C4-1001-37F8-2EE5-FA148ED29642}"/>
-              </a:ext>
-            </a:extLst>
-          </p:cNvPr>
-          <p:cNvSpPr txBox="1"/>
-          <p:nvPr/>
-        </p:nvSpPr>
-        <p:spPr>
-          <a:xfrm>
-            <a:off x="8782951" y="4993041"/>
-            <a:ext cx="3281370" cy="707886"/>
-          </a:xfrm>
-          <a:prstGeom prst="rect">
-            <a:avLst/>
-          </a:prstGeom>
-          <a:noFill/>
-        </p:spPr>
-        <p:txBody>
-          <a:bodyPr wrap="square">
-            <a:spAutoFit/>
-          </a:bodyPr>
-          <a:lstStyle/>
-          <a:p>
-            <a:pPr algn="ctr"/>
-            <a:r>
-              <a:rPr lang="en-US" sz="4000" dirty="0" err="1">
-                <a:solidFill>
-                  <a:schemeClr val="tx1">
-                    <a:lumMod val="65000"/>
-                    <a:lumOff val="35000"/>
-                  </a:schemeClr>
-                </a:solidFill>
-                <a:latin typeface="Segoe UI Black" panose="020B0A02040204020203" pitchFamily="34" charset="0"/>
-                <a:ea typeface="Segoe UI Black" panose="020B0A02040204020203" pitchFamily="34" charset="0"/>
-              </a:rPr>
-              <a:t>DataFrame</a:t>
-            </a:r>
-            <a:endParaRPr lang="fr-FR" sz="4000" dirty="0">
-              <a:solidFill>
-                <a:schemeClr val="tx1">
-                  <a:lumMod val="65000"/>
-                  <a:lumOff val="35000"/>
-                </a:schemeClr>
-              </a:solidFill>
-              <a:latin typeface="Segoe UI Black" panose="020B0A02040204020203" pitchFamily="34" charset="0"/>
-              <a:ea typeface="Segoe UI Black" panose="020B0A02040204020203" pitchFamily="34" charset="0"/>
-            </a:endParaRPr>
-          </a:p>
-        </p:txBody>
-      </p:sp>
-      <p:pic>
-        <p:nvPicPr>
-          <p:cNvPr id="3" name="Picture 4" descr="Microsoft Excel — Wikipédia">
-            <a:extLst>
-              <a:ext uri="{FF2B5EF4-FFF2-40B4-BE49-F238E27FC236}">
-                <a16:creationId xmlns:a16="http://schemas.microsoft.com/office/drawing/2014/main" id="{87818D2B-9246-FE97-89D0-5B43D08F4E3F}"/>
-              </a:ext>
-            </a:extLst>
-          </p:cNvPr>
-          <p:cNvPicPr>
-            <a:picLocks noChangeAspect="1" noChangeArrowheads="1"/>
-          </p:cNvPicPr>
-          <p:nvPr/>
-        </p:nvPicPr>
-        <p:blipFill>
-          <a:blip r:embed="rId4">
-            <a:extLst>
-              <a:ext uri="{28A0092B-C50C-407E-A947-70E740481C1C}">
-                <a14:useLocalDpi xmlns:a14="http://schemas.microsoft.com/office/drawing/2010/main" val="0"/>
-              </a:ext>
-            </a:extLst>
-          </a:blip>
-          <a:srcRect/>
-          <a:stretch>
-            <a:fillRect/>
-          </a:stretch>
-        </p:blipFill>
-        <p:spPr bwMode="auto">
-          <a:xfrm>
-            <a:off x="957681" y="3586194"/>
-            <a:ext cx="791174" cy="816234"/>
-          </a:xfrm>
-          <a:prstGeom prst="roundRect">
-            <a:avLst>
-              <a:gd name="adj" fmla="val 8594"/>
-            </a:avLst>
-          </a:prstGeom>
-          <a:solidFill>
-            <a:srgbClr val="FFFFFF">
-              <a:shade val="85000"/>
-            </a:srgbClr>
-          </a:solidFill>
-          <a:ln>
-            <a:noFill/>
-          </a:ln>
-          <a:effectLst>
-            <a:reflection blurRad="12700" stA="38000" endPos="28000" dist="5000" dir="5400000" sy="-100000" algn="bl" rotWithShape="0"/>
-          </a:effectLst>
-        </p:spPr>
-      </p:pic>
-      <p:pic>
-        <p:nvPicPr>
-          <p:cNvPr id="4" name="Picture 4" descr="Microsoft Excel — Wikipédia">
-            <a:extLst>
-              <a:ext uri="{FF2B5EF4-FFF2-40B4-BE49-F238E27FC236}">
-                <a16:creationId xmlns:a16="http://schemas.microsoft.com/office/drawing/2014/main" id="{B94E4A62-D9C5-1058-5F67-0BFAEE10869F}"/>
-              </a:ext>
-            </a:extLst>
-          </p:cNvPr>
-          <p:cNvPicPr>
-            <a:picLocks noChangeAspect="1" noChangeArrowheads="1"/>
-          </p:cNvPicPr>
-          <p:nvPr/>
-        </p:nvPicPr>
-        <p:blipFill>
-          <a:blip r:embed="rId4">
-            <a:extLst>
-              <a:ext uri="{28A0092B-C50C-407E-A947-70E740481C1C}">
-                <a14:useLocalDpi xmlns:a14="http://schemas.microsoft.com/office/drawing/2010/main" val="0"/>
-              </a:ext>
-            </a:extLst>
-          </a:blip>
-          <a:srcRect/>
-          <a:stretch>
-            <a:fillRect/>
-          </a:stretch>
-        </p:blipFill>
-        <p:spPr bwMode="auto">
-          <a:xfrm>
-            <a:off x="998247" y="2035187"/>
-            <a:ext cx="791174" cy="816234"/>
-          </a:xfrm>
-          <a:prstGeom prst="roundRect">
-            <a:avLst>
-              <a:gd name="adj" fmla="val 8594"/>
-            </a:avLst>
-          </a:prstGeom>
-          <a:solidFill>
-            <a:srgbClr val="FFFFFF">
-              <a:shade val="85000"/>
-            </a:srgbClr>
-          </a:solidFill>
-          <a:ln>
-            <a:noFill/>
-          </a:ln>
-          <a:effectLst>
-            <a:reflection blurRad="12700" stA="38000" endPos="28000" dist="5000" dir="5400000" sy="-100000" algn="bl" rotWithShape="0"/>
-          </a:effectLst>
-        </p:spPr>
-      </p:pic>
-      <p:pic>
-        <p:nvPicPr>
-          <p:cNvPr id="5" name="Picture 4" descr="Microsoft Excel — Wikipédia">
-            <a:extLst>
-              <a:ext uri="{FF2B5EF4-FFF2-40B4-BE49-F238E27FC236}">
-                <a16:creationId xmlns:a16="http://schemas.microsoft.com/office/drawing/2014/main" id="{4DEC808E-D041-4551-5024-0FD9158E8A04}"/>
-              </a:ext>
-            </a:extLst>
-          </p:cNvPr>
-          <p:cNvPicPr>
-            <a:picLocks noChangeAspect="1" noChangeArrowheads="1"/>
-          </p:cNvPicPr>
-          <p:nvPr/>
-        </p:nvPicPr>
-        <p:blipFill>
-          <a:blip r:embed="rId4">
-            <a:extLst>
-              <a:ext uri="{28A0092B-C50C-407E-A947-70E740481C1C}">
-                <a14:useLocalDpi xmlns:a14="http://schemas.microsoft.com/office/drawing/2010/main" val="0"/>
-              </a:ext>
-            </a:extLst>
-          </a:blip>
-          <a:srcRect/>
-          <a:stretch>
-            <a:fillRect/>
-          </a:stretch>
-        </p:blipFill>
-        <p:spPr bwMode="auto">
-          <a:xfrm>
-            <a:off x="998247" y="5175398"/>
-            <a:ext cx="791174" cy="816234"/>
-          </a:xfrm>
-          <a:prstGeom prst="roundRect">
-            <a:avLst>
-              <a:gd name="adj" fmla="val 8594"/>
-            </a:avLst>
-          </a:prstGeom>
-          <a:solidFill>
-            <a:srgbClr val="FFFFFF">
-              <a:shade val="85000"/>
-            </a:srgbClr>
-          </a:solidFill>
-          <a:ln>
-            <a:noFill/>
-          </a:ln>
-          <a:effectLst>
-            <a:reflection blurRad="12700" stA="38000" endPos="28000" dist="5000" dir="5400000" sy="-100000" algn="bl" rotWithShape="0"/>
-          </a:effectLst>
-        </p:spPr>
-      </p:pic>
-      <p:sp>
-        <p:nvSpPr>
-          <p:cNvPr id="6" name="ZoneTexte 5">
-            <a:extLst>
-              <a:ext uri="{FF2B5EF4-FFF2-40B4-BE49-F238E27FC236}">
-                <a16:creationId xmlns:a16="http://schemas.microsoft.com/office/drawing/2014/main" id="{275140CE-6C8B-AC16-2AA4-4BEC375F26A1}"/>
-              </a:ext>
-            </a:extLst>
-          </p:cNvPr>
-          <p:cNvSpPr txBox="1"/>
-          <p:nvPr/>
-        </p:nvSpPr>
-        <p:spPr>
-          <a:xfrm>
-            <a:off x="570701" y="3053240"/>
-            <a:ext cx="1646266" cy="369332"/>
-          </a:xfrm>
-          <a:prstGeom prst="rect">
-            <a:avLst/>
-          </a:prstGeom>
-          <a:noFill/>
-        </p:spPr>
-        <p:txBody>
-          <a:bodyPr wrap="square">
-            <a:spAutoFit/>
-          </a:bodyPr>
-          <a:lstStyle/>
-          <a:p>
-            <a:pPr algn="ctr"/>
-            <a:r>
-              <a:rPr lang="fr-FR" dirty="0"/>
-              <a:t>extrait_eval.csv</a:t>
-            </a:r>
-          </a:p>
-        </p:txBody>
-      </p:sp>
-      <p:sp>
-        <p:nvSpPr>
-          <p:cNvPr id="7" name="ZoneTexte 6">
-            <a:extLst>
-              <a:ext uri="{FF2B5EF4-FFF2-40B4-BE49-F238E27FC236}">
-                <a16:creationId xmlns:a16="http://schemas.microsoft.com/office/drawing/2014/main" id="{EE0EB4ED-153E-F5D3-DF54-0B136A6A9E57}"/>
-              </a:ext>
-            </a:extLst>
-          </p:cNvPr>
-          <p:cNvSpPr txBox="1"/>
-          <p:nvPr/>
-        </p:nvSpPr>
-        <p:spPr>
-          <a:xfrm>
-            <a:off x="559921" y="4604247"/>
-            <a:ext cx="1646266" cy="369332"/>
-          </a:xfrm>
-          <a:prstGeom prst="rect">
-            <a:avLst/>
-          </a:prstGeom>
-          <a:noFill/>
-        </p:spPr>
-        <p:txBody>
-          <a:bodyPr wrap="square">
-            <a:spAutoFit/>
-          </a:bodyPr>
-          <a:lstStyle/>
-          <a:p>
-            <a:pPr algn="ctr"/>
-            <a:r>
-              <a:rPr lang="fr-FR" dirty="0"/>
-              <a:t>extrait_sirh.csv</a:t>
-            </a:r>
-          </a:p>
-        </p:txBody>
-      </p:sp>
-      <p:sp>
-        <p:nvSpPr>
-          <p:cNvPr id="8" name="ZoneTexte 7">
-            <a:extLst>
-              <a:ext uri="{FF2B5EF4-FFF2-40B4-BE49-F238E27FC236}">
-                <a16:creationId xmlns:a16="http://schemas.microsoft.com/office/drawing/2014/main" id="{9C75FEF1-63D4-499F-1A8A-7949E5C313A2}"/>
-              </a:ext>
-            </a:extLst>
-          </p:cNvPr>
-          <p:cNvSpPr txBox="1"/>
-          <p:nvPr/>
-        </p:nvSpPr>
-        <p:spPr>
-          <a:xfrm>
-            <a:off x="339332" y="6190102"/>
-            <a:ext cx="2109005" cy="369332"/>
-          </a:xfrm>
-          <a:prstGeom prst="rect">
-            <a:avLst/>
-          </a:prstGeom>
-          <a:noFill/>
-        </p:spPr>
-        <p:txBody>
-          <a:bodyPr wrap="square">
-            <a:spAutoFit/>
-          </a:bodyPr>
-          <a:lstStyle/>
-          <a:p>
-            <a:pPr algn="ctr"/>
-            <a:r>
-              <a:rPr lang="fr-FR" dirty="0"/>
-              <a:t>extrait_sondage.csv</a:t>
-            </a:r>
-          </a:p>
-        </p:txBody>
-      </p:sp>
-      <p:sp>
-        <p:nvSpPr>
-          <p:cNvPr id="9" name="Accolade fermante 8">
-            <a:extLst>
-              <a:ext uri="{FF2B5EF4-FFF2-40B4-BE49-F238E27FC236}">
-                <a16:creationId xmlns:a16="http://schemas.microsoft.com/office/drawing/2014/main" id="{6CEB96CF-3FD4-79AD-5185-29AEE6B42B90}"/>
-              </a:ext>
-            </a:extLst>
-          </p:cNvPr>
-          <p:cNvSpPr/>
-          <p:nvPr/>
-        </p:nvSpPr>
-        <p:spPr>
-          <a:xfrm>
-            <a:off x="2463460" y="2068913"/>
-            <a:ext cx="985542" cy="4524247"/>
-          </a:xfrm>
-          <a:prstGeom prst="rightBrace">
-            <a:avLst>
-              <a:gd name="adj1" fmla="val 32143"/>
-              <a:gd name="adj2" fmla="val 50000"/>
-            </a:avLst>
-          </a:prstGeom>
-          <a:ln w="66675"/>
-        </p:spPr>
-        <p:style>
-          <a:lnRef idx="1">
-            <a:schemeClr val="accent1"/>
-          </a:lnRef>
-          <a:fillRef idx="0">
-            <a:schemeClr val="accent1"/>
-          </a:fillRef>
-          <a:effectRef idx="0">
-            <a:schemeClr val="accent1"/>
-          </a:effectRef>
-          <a:fontRef idx="minor">
-            <a:schemeClr val="tx1"/>
-          </a:fontRef>
-        </p:style>
-        <p:txBody>
-          <a:bodyPr rtlCol="0" anchor="ctr"/>
-          <a:lstStyle/>
-          <a:p>
-            <a:pPr algn="ctr"/>
-            <a:endParaRPr lang="fr-FR"/>
-          </a:p>
-        </p:txBody>
-      </p:sp>
-      <p:sp>
-        <p:nvSpPr>
-          <p:cNvPr id="11" name="ZoneTexte 10">
-            <a:extLst>
-              <a:ext uri="{FF2B5EF4-FFF2-40B4-BE49-F238E27FC236}">
-                <a16:creationId xmlns:a16="http://schemas.microsoft.com/office/drawing/2014/main" id="{D6D97517-1AB2-EDC3-0063-7EDA41AEADC8}"/>
-              </a:ext>
-            </a:extLst>
-          </p:cNvPr>
-          <p:cNvSpPr txBox="1"/>
-          <p:nvPr/>
-        </p:nvSpPr>
-        <p:spPr>
-          <a:xfrm>
-            <a:off x="3650401" y="2201825"/>
-            <a:ext cx="4111397" cy="4401205"/>
-          </a:xfrm>
-          <a:prstGeom prst="rect">
-            <a:avLst/>
-          </a:prstGeom>
-          <a:noFill/>
-        </p:spPr>
-        <p:txBody>
-          <a:bodyPr wrap="square">
-            <a:spAutoFit/>
-          </a:bodyPr>
-          <a:lstStyle/>
-          <a:p>
-            <a:pPr marL="285750" indent="-285750">
-              <a:spcBef>
-                <a:spcPts val="1200"/>
-              </a:spcBef>
-              <a:buFont typeface="Arial" panose="020B0604020202020204" pitchFamily="34" charset="0"/>
-              <a:buChar char="•"/>
-            </a:pPr>
-            <a:r>
-              <a:rPr lang="fr-FR" sz="2000" dirty="0">
-                <a:latin typeface="Aptos" panose="020B0004020202020204" pitchFamily="34" charset="0"/>
-              </a:rPr>
-              <a:t>Suppression colonnes constantes</a:t>
-            </a:r>
-          </a:p>
-          <a:p>
-            <a:pPr marL="285750" indent="-285750">
-              <a:spcBef>
-                <a:spcPts val="1200"/>
-              </a:spcBef>
-              <a:buFont typeface="Arial" panose="020B0604020202020204" pitchFamily="34" charset="0"/>
-              <a:buChar char="•"/>
-            </a:pPr>
-            <a:r>
-              <a:rPr lang="fr-FR" sz="2000" dirty="0">
-                <a:latin typeface="Aptos" panose="020B0004020202020204" pitchFamily="34" charset="0"/>
-              </a:rPr>
-              <a:t>Gestion des valeurs manquantes</a:t>
-            </a:r>
-          </a:p>
-          <a:p>
-            <a:pPr marL="285750" indent="-285750">
-              <a:spcBef>
-                <a:spcPts val="1200"/>
-              </a:spcBef>
-              <a:buFont typeface="Arial" panose="020B0604020202020204" pitchFamily="34" charset="0"/>
-              <a:buChar char="•"/>
-            </a:pPr>
-            <a:r>
-              <a:rPr lang="en-US" sz="2000" dirty="0" err="1">
-                <a:latin typeface="Aptos" panose="020B0004020202020204" pitchFamily="34" charset="0"/>
-              </a:rPr>
-              <a:t>Encodage</a:t>
-            </a:r>
-            <a:r>
-              <a:rPr lang="en-US" sz="2000" dirty="0">
-                <a:latin typeface="Aptos" panose="020B0004020202020204" pitchFamily="34" charset="0"/>
-              </a:rPr>
-              <a:t> one-hot (</a:t>
-            </a:r>
-            <a:r>
-              <a:rPr lang="en-US" sz="2000" dirty="0" err="1">
-                <a:latin typeface="Aptos" panose="020B0004020202020204" pitchFamily="34" charset="0"/>
-              </a:rPr>
-              <a:t>get_dummies</a:t>
-            </a:r>
-            <a:r>
-              <a:rPr lang="en-US" sz="2000" dirty="0">
-                <a:latin typeface="Aptos" panose="020B0004020202020204" pitchFamily="34" charset="0"/>
-              </a:rPr>
-              <a:t>)</a:t>
-            </a:r>
-          </a:p>
-          <a:p>
-            <a:pPr marL="285750" indent="-285750">
-              <a:spcBef>
-                <a:spcPts val="1200"/>
-              </a:spcBef>
-              <a:buFont typeface="Arial" panose="020B0604020202020204" pitchFamily="34" charset="0"/>
-              <a:buChar char="•"/>
-            </a:pPr>
-            <a:r>
-              <a:rPr lang="en-US" sz="2000" dirty="0">
-                <a:latin typeface="Aptos" panose="020B0004020202020204" pitchFamily="34" charset="0"/>
-              </a:rPr>
-              <a:t>Suppression des variables </a:t>
-            </a:r>
-            <a:r>
-              <a:rPr lang="en-US" sz="2000" dirty="0" err="1">
-                <a:latin typeface="Aptos" panose="020B0004020202020204" pitchFamily="34" charset="0"/>
-              </a:rPr>
-              <a:t>inutiles</a:t>
-            </a:r>
-            <a:endParaRPr lang="en-US" sz="2000" dirty="0">
-              <a:latin typeface="Aptos" panose="020B0004020202020204" pitchFamily="34" charset="0"/>
-            </a:endParaRPr>
-          </a:p>
-          <a:p>
-            <a:pPr marL="285750" indent="-285750">
-              <a:spcBef>
-                <a:spcPts val="1200"/>
-              </a:spcBef>
-              <a:buFont typeface="Arial" panose="020B0604020202020204" pitchFamily="34" charset="0"/>
-              <a:buChar char="•"/>
-            </a:pPr>
-            <a:r>
-              <a:rPr lang="fr-FR" sz="2000" dirty="0">
-                <a:latin typeface="Aptos" panose="020B0004020202020204" pitchFamily="34" charset="0"/>
-              </a:rPr>
-              <a:t>Création de nouvelles </a:t>
-            </a:r>
-            <a:r>
-              <a:rPr lang="fr-FR" sz="2000" dirty="0" err="1">
-                <a:latin typeface="Aptos" panose="020B0004020202020204" pitchFamily="34" charset="0"/>
-              </a:rPr>
-              <a:t>features</a:t>
-            </a:r>
-            <a:endParaRPr lang="fr-FR" sz="2000" dirty="0">
-              <a:latin typeface="Aptos" panose="020B0004020202020204" pitchFamily="34" charset="0"/>
-            </a:endParaRPr>
-          </a:p>
-          <a:p>
-            <a:pPr marL="285750" indent="-285750">
-              <a:spcBef>
-                <a:spcPts val="1200"/>
-              </a:spcBef>
-              <a:buFont typeface="Arial" panose="020B0604020202020204" pitchFamily="34" charset="0"/>
-              <a:buChar char="•"/>
-            </a:pPr>
-            <a:r>
-              <a:rPr lang="fr-FR" sz="2000" dirty="0">
-                <a:latin typeface="Aptos" panose="020B0004020202020204" pitchFamily="34" charset="0"/>
-              </a:rPr>
-              <a:t>Suppression variables redondantes (</a:t>
-            </a:r>
-            <a:r>
-              <a:rPr lang="fr-FR" sz="2000" dirty="0" err="1">
-                <a:latin typeface="Aptos" panose="020B0004020202020204" pitchFamily="34" charset="0"/>
-              </a:rPr>
-              <a:t>corr</a:t>
-            </a:r>
-            <a:r>
-              <a:rPr lang="fr-FR" sz="2000" dirty="0">
-                <a:latin typeface="Aptos" panose="020B0004020202020204" pitchFamily="34" charset="0"/>
-              </a:rPr>
-              <a:t> &gt; 0.8)</a:t>
-            </a:r>
-          </a:p>
-          <a:p>
-            <a:pPr marL="285750" indent="-285750">
-              <a:spcBef>
-                <a:spcPts val="1200"/>
-              </a:spcBef>
-              <a:buFont typeface="Arial" panose="020B0604020202020204" pitchFamily="34" charset="0"/>
-              <a:buChar char="•"/>
-            </a:pPr>
-            <a:r>
-              <a:rPr lang="fr-FR" sz="2000" dirty="0">
-                <a:latin typeface="Aptos" panose="020B0004020202020204" pitchFamily="34" charset="0"/>
-              </a:rPr>
-              <a:t>Train / Test Split (80/20)</a:t>
-            </a:r>
-          </a:p>
-        </p:txBody>
-      </p:sp>
-      <p:sp>
-        <p:nvSpPr>
-          <p:cNvPr id="12" name="Accolade fermante 11">
-            <a:extLst>
-              <a:ext uri="{FF2B5EF4-FFF2-40B4-BE49-F238E27FC236}">
-                <a16:creationId xmlns:a16="http://schemas.microsoft.com/office/drawing/2014/main" id="{7275CE1E-ED36-E694-3E52-D38D50F216DB}"/>
-              </a:ext>
-            </a:extLst>
-          </p:cNvPr>
-          <p:cNvSpPr/>
-          <p:nvPr/>
-        </p:nvSpPr>
-        <p:spPr>
-          <a:xfrm flipH="1">
-            <a:off x="7963198" y="2035187"/>
-            <a:ext cx="985542" cy="4524247"/>
-          </a:xfrm>
-          <a:prstGeom prst="rightBrace">
-            <a:avLst>
-              <a:gd name="adj1" fmla="val 32143"/>
-              <a:gd name="adj2" fmla="val 50000"/>
-            </a:avLst>
-          </a:prstGeom>
-          <a:ln w="66675"/>
-        </p:spPr>
-        <p:style>
-          <a:lnRef idx="1">
-            <a:schemeClr val="accent1"/>
-          </a:lnRef>
-          <a:fillRef idx="0">
-            <a:schemeClr val="accent1"/>
-          </a:fillRef>
-          <a:effectRef idx="0">
-            <a:schemeClr val="accent1"/>
-          </a:effectRef>
-          <a:fontRef idx="minor">
-            <a:schemeClr val="tx1"/>
-          </a:fontRef>
-        </p:style>
-        <p:txBody>
-          <a:bodyPr rtlCol="0" anchor="ctr"/>
-          <a:lstStyle/>
-          <a:p>
-            <a:pPr algn="ctr"/>
-            <a:endParaRPr lang="fr-FR"/>
-          </a:p>
-        </p:txBody>
-      </p:sp>
-    </p:spTree>
-    <p:extLst>
-      <p:ext uri="{BB962C8B-B14F-4D97-AF65-F5344CB8AC3E}">
-        <p14:creationId xmlns:p14="http://schemas.microsoft.com/office/powerpoint/2010/main" val="2827587211"/>
-      </p:ext>
-    </p:extLst>
-  </p:cSld>
-  <p:clrMapOvr>
-    <a:masterClrMapping/>
-  </p:clrMapOvr>
-</p:sld>
-</file>
-
-<file path=ppt/slides/slide7.xml><?xml version="1.0" encoding="utf-8"?>
-<p:sld xmlns:a="http://schemas.openxmlformats.org/drawingml/2006/main" xmlns:r="http://schemas.openxmlformats.org/officeDocument/2006/relationships" xmlns:p="http://schemas.openxmlformats.org/presentationml/2006/main">
-  <p:cSld>
-    <p:spTree>
-      <p:nvGrpSpPr>
-        <p:cNvPr id="1" name="">
-          <a:extLst>
-            <a:ext uri="{FF2B5EF4-FFF2-40B4-BE49-F238E27FC236}">
-              <a16:creationId xmlns:a16="http://schemas.microsoft.com/office/drawing/2014/main" id="{B5BC5D48-1FC5-0A32-4C4C-EECEACC58E4B}"/>
-            </a:ext>
-          </a:extLst>
-        </p:cNvPr>
-        <p:cNvGrpSpPr/>
-        <p:nvPr/>
-      </p:nvGrpSpPr>
-      <p:grpSpPr>
-        <a:xfrm>
-          <a:off x="0" y="0"/>
-          <a:ext cx="0" cy="0"/>
-          <a:chOff x="0" y="0"/>
-          <a:chExt cx="0" cy="0"/>
-        </a:xfrm>
-      </p:grpSpPr>
-      <p:sp>
-        <p:nvSpPr>
-          <p:cNvPr id="2" name="Titre 1">
-            <a:extLst>
-              <a:ext uri="{FF2B5EF4-FFF2-40B4-BE49-F238E27FC236}">
-                <a16:creationId xmlns:a16="http://schemas.microsoft.com/office/drawing/2014/main" id="{8F632967-CAE6-E6EE-17DA-3304CBCA71B7}"/>
-              </a:ext>
-            </a:extLst>
-          </p:cNvPr>
-          <p:cNvSpPr>
-            <a:spLocks noGrp="1"/>
-          </p:cNvSpPr>
-          <p:nvPr>
-            <p:ph type="title"/>
-          </p:nvPr>
-        </p:nvSpPr>
-        <p:spPr>
-          <a:xfrm>
-            <a:off x="581192" y="3179137"/>
-            <a:ext cx="11029616" cy="1013800"/>
-          </a:xfrm>
-        </p:spPr>
-        <p:txBody>
-          <a:bodyPr>
-            <a:normAutofit/>
-          </a:bodyPr>
-          <a:lstStyle/>
-          <a:p>
-            <a:pPr algn="ctr"/>
-            <a:r>
-              <a:rPr lang="fr-FR" sz="6000" dirty="0">
-                <a:solidFill>
-                  <a:schemeClr val="tx1"/>
-                </a:solidFill>
-              </a:rPr>
-              <a:t>Préparation des données</a:t>
-            </a:r>
-          </a:p>
-        </p:txBody>
-      </p:sp>
-    </p:spTree>
-    <p:extLst>
-      <p:ext uri="{BB962C8B-B14F-4D97-AF65-F5344CB8AC3E}">
-        <p14:creationId xmlns:p14="http://schemas.microsoft.com/office/powerpoint/2010/main" val="1960994266"/>
-      </p:ext>
-    </p:extLst>
-  </p:cSld>
-  <p:clrMapOvr>
-    <a:masterClrMapping/>
-  </p:clrMapOvr>
-</p:sld>
-</file>
-
-<file path=ppt/slides/slide8.xml><?xml version="1.0" encoding="utf-8"?>
-<p:sld xmlns:a="http://schemas.openxmlformats.org/drawingml/2006/main" xmlns:r="http://schemas.openxmlformats.org/officeDocument/2006/relationships" xmlns:p="http://schemas.openxmlformats.org/presentationml/2006/main">
-  <p:cSld>
-    <p:spTree>
-      <p:nvGrpSpPr>
-        <p:cNvPr id="1" name="">
-          <a:extLst>
-            <a:ext uri="{FF2B5EF4-FFF2-40B4-BE49-F238E27FC236}">
               <a16:creationId xmlns:a16="http://schemas.microsoft.com/office/drawing/2014/main" id="{0AFB871A-6B20-1A70-020B-978DE8C68311}"/>
             </a:ext>
           </a:extLst>
@@ -22901,6 +22561,629 @@
     <p:extLst>
       <p:ext uri="{BB962C8B-B14F-4D97-AF65-F5344CB8AC3E}">
         <p14:creationId xmlns:p14="http://schemas.microsoft.com/office/powerpoint/2010/main" val="606584950"/>
+      </p:ext>
+    </p:extLst>
+  </p:cSld>
+  <p:clrMapOvr>
+    <a:masterClrMapping/>
+  </p:clrMapOvr>
+</p:sld>
+</file>
+
+<file path=ppt/slides/slide7.xml><?xml version="1.0" encoding="utf-8"?>
+<p:sld xmlns:a="http://schemas.openxmlformats.org/drawingml/2006/main" xmlns:r="http://schemas.openxmlformats.org/officeDocument/2006/relationships" xmlns:p="http://schemas.openxmlformats.org/presentationml/2006/main">
+  <p:cSld>
+    <p:spTree>
+      <p:nvGrpSpPr>
+        <p:cNvPr id="1" name="">
+          <a:extLst>
+            <a:ext uri="{FF2B5EF4-FFF2-40B4-BE49-F238E27FC236}">
+              <a16:creationId xmlns:a16="http://schemas.microsoft.com/office/drawing/2014/main" id="{3517CDB8-06B4-26A6-9C29-55AFA9C3EB38}"/>
+            </a:ext>
+          </a:extLst>
+        </p:cNvPr>
+        <p:cNvGrpSpPr/>
+        <p:nvPr/>
+      </p:nvGrpSpPr>
+      <p:grpSpPr>
+        <a:xfrm>
+          <a:off x="0" y="0"/>
+          <a:ext cx="0" cy="0"/>
+          <a:chOff x="0" y="0"/>
+          <a:chExt cx="0" cy="0"/>
+        </a:xfrm>
+      </p:grpSpPr>
+      <p:sp>
+        <p:nvSpPr>
+          <p:cNvPr id="2" name="Titre 1">
+            <a:extLst>
+              <a:ext uri="{FF2B5EF4-FFF2-40B4-BE49-F238E27FC236}">
+                <a16:creationId xmlns:a16="http://schemas.microsoft.com/office/drawing/2014/main" id="{C4B186BD-35A8-C0C0-14E7-916A3EEBF267}"/>
+              </a:ext>
+            </a:extLst>
+          </p:cNvPr>
+          <p:cNvSpPr>
+            <a:spLocks noGrp="1"/>
+          </p:cNvSpPr>
+          <p:nvPr>
+            <p:ph type="title"/>
+          </p:nvPr>
+        </p:nvSpPr>
+        <p:spPr/>
+        <p:txBody>
+          <a:bodyPr/>
+          <a:lstStyle/>
+          <a:p>
+            <a:pPr algn="ctr"/>
+            <a:r>
+              <a:rPr lang="fr-FR" dirty="0"/>
+              <a:t>PIPELINE DE TRAITEMENT</a:t>
+            </a:r>
+          </a:p>
+        </p:txBody>
+      </p:sp>
+      <p:pic>
+        <p:nvPicPr>
+          <p:cNvPr id="2050" name="Picture 2" descr="Update Details - Python: Styled DataFrame Viewer 0.12.0 | JetBrains  Marketplace">
+            <a:extLst>
+              <a:ext uri="{FF2B5EF4-FFF2-40B4-BE49-F238E27FC236}">
+                <a16:creationId xmlns:a16="http://schemas.microsoft.com/office/drawing/2014/main" id="{3A7B0C41-3BCF-DFD4-65C6-EF7158DD13F0}"/>
+              </a:ext>
+            </a:extLst>
+          </p:cNvPr>
+          <p:cNvPicPr>
+            <a:picLocks noChangeAspect="1" noChangeArrowheads="1"/>
+          </p:cNvPicPr>
+          <p:nvPr/>
+        </p:nvPicPr>
+        <p:blipFill>
+          <a:blip r:embed="rId3">
+            <a:extLst>
+              <a:ext uri="{28A0092B-C50C-407E-A947-70E740481C1C}">
+                <a14:useLocalDpi xmlns:a14="http://schemas.microsoft.com/office/drawing/2010/main" val="0"/>
+              </a:ext>
+            </a:extLst>
+          </a:blip>
+          <a:srcRect/>
+          <a:stretch>
+            <a:fillRect/>
+          </a:stretch>
+        </p:blipFill>
+        <p:spPr bwMode="auto">
+          <a:xfrm>
+            <a:off x="9343165" y="2812636"/>
+            <a:ext cx="2160943" cy="2160943"/>
+          </a:xfrm>
+          <a:prstGeom prst="rect">
+            <a:avLst/>
+          </a:prstGeom>
+          <a:noFill/>
+          <a:extLst>
+            <a:ext uri="{909E8E84-426E-40DD-AFC4-6F175D3DCCD1}">
+              <a14:hiddenFill xmlns:a14="http://schemas.microsoft.com/office/drawing/2010/main">
+                <a:solidFill>
+                  <a:srgbClr val="FFFFFF"/>
+                </a:solidFill>
+              </a14:hiddenFill>
+            </a:ext>
+          </a:extLst>
+        </p:spPr>
+      </p:pic>
+      <p:sp>
+        <p:nvSpPr>
+          <p:cNvPr id="19" name="ZoneTexte 18">
+            <a:extLst>
+              <a:ext uri="{FF2B5EF4-FFF2-40B4-BE49-F238E27FC236}">
+                <a16:creationId xmlns:a16="http://schemas.microsoft.com/office/drawing/2014/main" id="{E90CD0C4-1001-37F8-2EE5-FA148ED29642}"/>
+              </a:ext>
+            </a:extLst>
+          </p:cNvPr>
+          <p:cNvSpPr txBox="1"/>
+          <p:nvPr/>
+        </p:nvSpPr>
+        <p:spPr>
+          <a:xfrm>
+            <a:off x="8782951" y="4993041"/>
+            <a:ext cx="3281370" cy="707886"/>
+          </a:xfrm>
+          <a:prstGeom prst="rect">
+            <a:avLst/>
+          </a:prstGeom>
+          <a:noFill/>
+        </p:spPr>
+        <p:txBody>
+          <a:bodyPr wrap="square">
+            <a:spAutoFit/>
+          </a:bodyPr>
+          <a:lstStyle/>
+          <a:p>
+            <a:pPr algn="ctr"/>
+            <a:r>
+              <a:rPr lang="en-US" sz="4000" dirty="0" err="1">
+                <a:solidFill>
+                  <a:schemeClr val="tx1">
+                    <a:lumMod val="65000"/>
+                    <a:lumOff val="35000"/>
+                  </a:schemeClr>
+                </a:solidFill>
+                <a:latin typeface="Segoe UI Black" panose="020B0A02040204020203" pitchFamily="34" charset="0"/>
+                <a:ea typeface="Segoe UI Black" panose="020B0A02040204020203" pitchFamily="34" charset="0"/>
+              </a:rPr>
+              <a:t>DataFrame</a:t>
+            </a:r>
+            <a:endParaRPr lang="fr-FR" sz="4000" dirty="0">
+              <a:solidFill>
+                <a:schemeClr val="tx1">
+                  <a:lumMod val="65000"/>
+                  <a:lumOff val="35000"/>
+                </a:schemeClr>
+              </a:solidFill>
+              <a:latin typeface="Segoe UI Black" panose="020B0A02040204020203" pitchFamily="34" charset="0"/>
+              <a:ea typeface="Segoe UI Black" panose="020B0A02040204020203" pitchFamily="34" charset="0"/>
+            </a:endParaRPr>
+          </a:p>
+        </p:txBody>
+      </p:sp>
+      <p:sp>
+        <p:nvSpPr>
+          <p:cNvPr id="9" name="Accolade fermante 8">
+            <a:extLst>
+              <a:ext uri="{FF2B5EF4-FFF2-40B4-BE49-F238E27FC236}">
+                <a16:creationId xmlns:a16="http://schemas.microsoft.com/office/drawing/2014/main" id="{6CEB96CF-3FD4-79AD-5185-29AEE6B42B90}"/>
+              </a:ext>
+            </a:extLst>
+          </p:cNvPr>
+          <p:cNvSpPr/>
+          <p:nvPr/>
+        </p:nvSpPr>
+        <p:spPr>
+          <a:xfrm>
+            <a:off x="2842601" y="2068913"/>
+            <a:ext cx="985542" cy="4524247"/>
+          </a:xfrm>
+          <a:prstGeom prst="rightBrace">
+            <a:avLst>
+              <a:gd name="adj1" fmla="val 32143"/>
+              <a:gd name="adj2" fmla="val 50000"/>
+            </a:avLst>
+          </a:prstGeom>
+          <a:ln w="66675"/>
+        </p:spPr>
+        <p:style>
+          <a:lnRef idx="1">
+            <a:schemeClr val="accent1"/>
+          </a:lnRef>
+          <a:fillRef idx="0">
+            <a:schemeClr val="accent1"/>
+          </a:fillRef>
+          <a:effectRef idx="0">
+            <a:schemeClr val="accent1"/>
+          </a:effectRef>
+          <a:fontRef idx="minor">
+            <a:schemeClr val="tx1"/>
+          </a:fontRef>
+        </p:style>
+        <p:txBody>
+          <a:bodyPr rtlCol="0" anchor="ctr"/>
+          <a:lstStyle/>
+          <a:p>
+            <a:pPr algn="ctr"/>
+            <a:endParaRPr lang="fr-FR"/>
+          </a:p>
+        </p:txBody>
+      </p:sp>
+      <p:sp>
+        <p:nvSpPr>
+          <p:cNvPr id="11" name="ZoneTexte 10">
+            <a:extLst>
+              <a:ext uri="{FF2B5EF4-FFF2-40B4-BE49-F238E27FC236}">
+                <a16:creationId xmlns:a16="http://schemas.microsoft.com/office/drawing/2014/main" id="{D6D97517-1AB2-EDC3-0063-7EDA41AEADC8}"/>
+              </a:ext>
+            </a:extLst>
+          </p:cNvPr>
+          <p:cNvSpPr txBox="1"/>
+          <p:nvPr/>
+        </p:nvSpPr>
+        <p:spPr>
+          <a:xfrm>
+            <a:off x="4029542" y="2201825"/>
+            <a:ext cx="4111397" cy="4401205"/>
+          </a:xfrm>
+          <a:prstGeom prst="rect">
+            <a:avLst/>
+          </a:prstGeom>
+          <a:noFill/>
+        </p:spPr>
+        <p:txBody>
+          <a:bodyPr wrap="square">
+            <a:spAutoFit/>
+          </a:bodyPr>
+          <a:lstStyle/>
+          <a:p>
+            <a:pPr marL="285750" indent="-285750">
+              <a:spcBef>
+                <a:spcPts val="1200"/>
+              </a:spcBef>
+              <a:buFont typeface="Arial" panose="020B0604020202020204" pitchFamily="34" charset="0"/>
+              <a:buChar char="•"/>
+            </a:pPr>
+            <a:r>
+              <a:rPr lang="fr-FR" sz="2000" dirty="0">
+                <a:latin typeface="Aptos" panose="020B0004020202020204" pitchFamily="34" charset="0"/>
+              </a:rPr>
+              <a:t>Suppression colonnes constantes</a:t>
+            </a:r>
+          </a:p>
+          <a:p>
+            <a:pPr marL="285750" indent="-285750">
+              <a:spcBef>
+                <a:spcPts val="1200"/>
+              </a:spcBef>
+              <a:buFont typeface="Arial" panose="020B0604020202020204" pitchFamily="34" charset="0"/>
+              <a:buChar char="•"/>
+            </a:pPr>
+            <a:r>
+              <a:rPr lang="fr-FR" sz="2000" dirty="0">
+                <a:latin typeface="Aptos" panose="020B0004020202020204" pitchFamily="34" charset="0"/>
+              </a:rPr>
+              <a:t>Gestion des valeurs manquantes</a:t>
+            </a:r>
+          </a:p>
+          <a:p>
+            <a:pPr marL="285750" indent="-285750">
+              <a:spcBef>
+                <a:spcPts val="1200"/>
+              </a:spcBef>
+              <a:buFont typeface="Arial" panose="020B0604020202020204" pitchFamily="34" charset="0"/>
+              <a:buChar char="•"/>
+            </a:pPr>
+            <a:r>
+              <a:rPr lang="en-US" sz="2000" dirty="0" err="1">
+                <a:latin typeface="Aptos" panose="020B0004020202020204" pitchFamily="34" charset="0"/>
+              </a:rPr>
+              <a:t>Encodage</a:t>
+            </a:r>
+            <a:r>
+              <a:rPr lang="en-US" sz="2000" dirty="0">
+                <a:latin typeface="Aptos" panose="020B0004020202020204" pitchFamily="34" charset="0"/>
+              </a:rPr>
+              <a:t> one-hot (</a:t>
+            </a:r>
+            <a:r>
+              <a:rPr lang="en-US" sz="2000" dirty="0" err="1">
+                <a:latin typeface="Aptos" panose="020B0004020202020204" pitchFamily="34" charset="0"/>
+              </a:rPr>
+              <a:t>get_dummies</a:t>
+            </a:r>
+            <a:r>
+              <a:rPr lang="en-US" sz="2000" dirty="0">
+                <a:latin typeface="Aptos" panose="020B0004020202020204" pitchFamily="34" charset="0"/>
+              </a:rPr>
+              <a:t>)</a:t>
+            </a:r>
+          </a:p>
+          <a:p>
+            <a:pPr marL="285750" indent="-285750">
+              <a:spcBef>
+                <a:spcPts val="1200"/>
+              </a:spcBef>
+              <a:buFont typeface="Arial" panose="020B0604020202020204" pitchFamily="34" charset="0"/>
+              <a:buChar char="•"/>
+            </a:pPr>
+            <a:r>
+              <a:rPr lang="en-US" sz="2000" dirty="0">
+                <a:latin typeface="Aptos" panose="020B0004020202020204" pitchFamily="34" charset="0"/>
+              </a:rPr>
+              <a:t>Suppression des variables </a:t>
+            </a:r>
+            <a:r>
+              <a:rPr lang="en-US" sz="2000" dirty="0" err="1">
+                <a:latin typeface="Aptos" panose="020B0004020202020204" pitchFamily="34" charset="0"/>
+              </a:rPr>
+              <a:t>inutiles</a:t>
+            </a:r>
+            <a:endParaRPr lang="en-US" sz="2000" dirty="0">
+              <a:latin typeface="Aptos" panose="020B0004020202020204" pitchFamily="34" charset="0"/>
+            </a:endParaRPr>
+          </a:p>
+          <a:p>
+            <a:pPr marL="285750" indent="-285750">
+              <a:spcBef>
+                <a:spcPts val="1200"/>
+              </a:spcBef>
+              <a:buFont typeface="Arial" panose="020B0604020202020204" pitchFamily="34" charset="0"/>
+              <a:buChar char="•"/>
+            </a:pPr>
+            <a:r>
+              <a:rPr lang="fr-FR" sz="2000" dirty="0">
+                <a:latin typeface="Aptos" panose="020B0004020202020204" pitchFamily="34" charset="0"/>
+              </a:rPr>
+              <a:t>Création de nouvelles </a:t>
+            </a:r>
+            <a:r>
+              <a:rPr lang="fr-FR" sz="2000" dirty="0" err="1">
+                <a:latin typeface="Aptos" panose="020B0004020202020204" pitchFamily="34" charset="0"/>
+              </a:rPr>
+              <a:t>features</a:t>
+            </a:r>
+            <a:endParaRPr lang="fr-FR" sz="2000" dirty="0">
+              <a:latin typeface="Aptos" panose="020B0004020202020204" pitchFamily="34" charset="0"/>
+            </a:endParaRPr>
+          </a:p>
+          <a:p>
+            <a:pPr marL="285750" indent="-285750">
+              <a:spcBef>
+                <a:spcPts val="1200"/>
+              </a:spcBef>
+              <a:buFont typeface="Arial" panose="020B0604020202020204" pitchFamily="34" charset="0"/>
+              <a:buChar char="•"/>
+            </a:pPr>
+            <a:r>
+              <a:rPr lang="fr-FR" sz="2000" dirty="0">
+                <a:latin typeface="Aptos" panose="020B0004020202020204" pitchFamily="34" charset="0"/>
+              </a:rPr>
+              <a:t>Suppression variables redondantes (</a:t>
+            </a:r>
+            <a:r>
+              <a:rPr lang="fr-FR" sz="2000" dirty="0" err="1">
+                <a:latin typeface="Aptos" panose="020B0004020202020204" pitchFamily="34" charset="0"/>
+              </a:rPr>
+              <a:t>corr</a:t>
+            </a:r>
+            <a:r>
+              <a:rPr lang="fr-FR" sz="2000" dirty="0">
+                <a:latin typeface="Aptos" panose="020B0004020202020204" pitchFamily="34" charset="0"/>
+              </a:rPr>
+              <a:t> &gt; 0.8)</a:t>
+            </a:r>
+          </a:p>
+          <a:p>
+            <a:pPr marL="285750" indent="-285750">
+              <a:spcBef>
+                <a:spcPts val="1200"/>
+              </a:spcBef>
+              <a:buFont typeface="Arial" panose="020B0604020202020204" pitchFamily="34" charset="0"/>
+              <a:buChar char="•"/>
+            </a:pPr>
+            <a:r>
+              <a:rPr lang="fr-FR" sz="2000" dirty="0">
+                <a:latin typeface="Aptos" panose="020B0004020202020204" pitchFamily="34" charset="0"/>
+              </a:rPr>
+              <a:t>Train / Test Split (80/20)</a:t>
+            </a:r>
+          </a:p>
+        </p:txBody>
+      </p:sp>
+      <p:sp>
+        <p:nvSpPr>
+          <p:cNvPr id="12" name="Accolade fermante 11">
+            <a:extLst>
+              <a:ext uri="{FF2B5EF4-FFF2-40B4-BE49-F238E27FC236}">
+                <a16:creationId xmlns:a16="http://schemas.microsoft.com/office/drawing/2014/main" id="{7275CE1E-ED36-E694-3E52-D38D50F216DB}"/>
+              </a:ext>
+            </a:extLst>
+          </p:cNvPr>
+          <p:cNvSpPr/>
+          <p:nvPr/>
+        </p:nvSpPr>
+        <p:spPr>
+          <a:xfrm flipH="1">
+            <a:off x="8342339" y="2035187"/>
+            <a:ext cx="985542" cy="4524247"/>
+          </a:xfrm>
+          <a:prstGeom prst="rightBrace">
+            <a:avLst>
+              <a:gd name="adj1" fmla="val 32143"/>
+              <a:gd name="adj2" fmla="val 50000"/>
+            </a:avLst>
+          </a:prstGeom>
+          <a:ln w="66675"/>
+        </p:spPr>
+        <p:style>
+          <a:lnRef idx="1">
+            <a:schemeClr val="accent1"/>
+          </a:lnRef>
+          <a:fillRef idx="0">
+            <a:schemeClr val="accent1"/>
+          </a:fillRef>
+          <a:effectRef idx="0">
+            <a:schemeClr val="accent1"/>
+          </a:effectRef>
+          <a:fontRef idx="minor">
+            <a:schemeClr val="tx1"/>
+          </a:fontRef>
+        </p:style>
+        <p:txBody>
+          <a:bodyPr rtlCol="0" anchor="ctr"/>
+          <a:lstStyle/>
+          <a:p>
+            <a:pPr algn="ctr"/>
+            <a:endParaRPr lang="fr-FR"/>
+          </a:p>
+        </p:txBody>
+      </p:sp>
+      <p:pic>
+        <p:nvPicPr>
+          <p:cNvPr id="14" name="Picture 2" descr="Update Details - Python: Styled DataFrame Viewer 0.12.0 | JetBrains  Marketplace">
+            <a:extLst>
+              <a:ext uri="{FF2B5EF4-FFF2-40B4-BE49-F238E27FC236}">
+                <a16:creationId xmlns:a16="http://schemas.microsoft.com/office/drawing/2014/main" id="{726F94E2-304D-FF2F-8F65-B40C4ECD5154}"/>
+              </a:ext>
+            </a:extLst>
+          </p:cNvPr>
+          <p:cNvPicPr>
+            <a:picLocks noChangeAspect="1" noChangeArrowheads="1"/>
+          </p:cNvPicPr>
+          <p:nvPr/>
+        </p:nvPicPr>
+        <p:blipFill>
+          <a:blip r:embed="rId3">
+            <a:extLst>
+              <a:ext uri="{28A0092B-C50C-407E-A947-70E740481C1C}">
+                <a14:useLocalDpi xmlns:a14="http://schemas.microsoft.com/office/drawing/2010/main" val="0"/>
+              </a:ext>
+            </a:extLst>
+          </a:blip>
+          <a:srcRect/>
+          <a:stretch>
+            <a:fillRect/>
+          </a:stretch>
+        </p:blipFill>
+        <p:spPr bwMode="auto">
+          <a:xfrm>
+            <a:off x="519368" y="2812636"/>
+            <a:ext cx="2160943" cy="2160943"/>
+          </a:xfrm>
+          <a:prstGeom prst="rect">
+            <a:avLst/>
+          </a:prstGeom>
+          <a:noFill/>
+          <a:extLst>
+            <a:ext uri="{909E8E84-426E-40DD-AFC4-6F175D3DCCD1}">
+              <a14:hiddenFill xmlns:a14="http://schemas.microsoft.com/office/drawing/2010/main">
+                <a:solidFill>
+                  <a:srgbClr val="FFFFFF"/>
+                </a:solidFill>
+              </a14:hiddenFill>
+            </a:ext>
+          </a:extLst>
+        </p:spPr>
+      </p:pic>
+      <p:sp>
+        <p:nvSpPr>
+          <p:cNvPr id="15" name="ZoneTexte 14">
+            <a:extLst>
+              <a:ext uri="{FF2B5EF4-FFF2-40B4-BE49-F238E27FC236}">
+                <a16:creationId xmlns:a16="http://schemas.microsoft.com/office/drawing/2014/main" id="{C1412C11-F4C9-F858-3448-FD4823E09254}"/>
+              </a:ext>
+            </a:extLst>
+          </p:cNvPr>
+          <p:cNvSpPr txBox="1"/>
+          <p:nvPr/>
+        </p:nvSpPr>
+        <p:spPr>
+          <a:xfrm>
+            <a:off x="-40846" y="4993041"/>
+            <a:ext cx="3281370" cy="707886"/>
+          </a:xfrm>
+          <a:prstGeom prst="rect">
+            <a:avLst/>
+          </a:prstGeom>
+          <a:noFill/>
+        </p:spPr>
+        <p:txBody>
+          <a:bodyPr wrap="square">
+            <a:spAutoFit/>
+          </a:bodyPr>
+          <a:lstStyle/>
+          <a:p>
+            <a:pPr algn="ctr"/>
+            <a:r>
+              <a:rPr lang="en-US" sz="4000" dirty="0" err="1">
+                <a:solidFill>
+                  <a:schemeClr val="tx1">
+                    <a:lumMod val="65000"/>
+                    <a:lumOff val="35000"/>
+                  </a:schemeClr>
+                </a:solidFill>
+                <a:latin typeface="Segoe UI Black" panose="020B0A02040204020203" pitchFamily="34" charset="0"/>
+                <a:ea typeface="Segoe UI Black" panose="020B0A02040204020203" pitchFamily="34" charset="0"/>
+              </a:rPr>
+              <a:t>DataFrame</a:t>
+            </a:r>
+            <a:endParaRPr lang="fr-FR" sz="4000" dirty="0">
+              <a:solidFill>
+                <a:schemeClr val="tx1">
+                  <a:lumMod val="65000"/>
+                  <a:lumOff val="35000"/>
+                </a:schemeClr>
+              </a:solidFill>
+              <a:latin typeface="Segoe UI Black" panose="020B0A02040204020203" pitchFamily="34" charset="0"/>
+              <a:ea typeface="Segoe UI Black" panose="020B0A02040204020203" pitchFamily="34" charset="0"/>
+            </a:endParaRPr>
+          </a:p>
+        </p:txBody>
+      </p:sp>
+    </p:spTree>
+    <p:extLst>
+      <p:ext uri="{BB962C8B-B14F-4D97-AF65-F5344CB8AC3E}">
+        <p14:creationId xmlns:p14="http://schemas.microsoft.com/office/powerpoint/2010/main" val="2827587211"/>
+      </p:ext>
+    </p:extLst>
+  </p:cSld>
+  <p:clrMapOvr>
+    <a:masterClrMapping/>
+  </p:clrMapOvr>
+</p:sld>
+</file>
+
+<file path=ppt/slides/slide8.xml><?xml version="1.0" encoding="utf-8"?>
+<p:sld xmlns:a="http://schemas.openxmlformats.org/drawingml/2006/main" xmlns:r="http://schemas.openxmlformats.org/officeDocument/2006/relationships" xmlns:p="http://schemas.openxmlformats.org/presentationml/2006/main">
+  <p:cSld>
+    <p:spTree>
+      <p:nvGrpSpPr>
+        <p:cNvPr id="1" name="">
+          <a:extLst>
+            <a:ext uri="{FF2B5EF4-FFF2-40B4-BE49-F238E27FC236}">
+              <a16:creationId xmlns:a16="http://schemas.microsoft.com/office/drawing/2014/main" id="{B5BC5D48-1FC5-0A32-4C4C-EECEACC58E4B}"/>
+            </a:ext>
+          </a:extLst>
+        </p:cNvPr>
+        <p:cNvGrpSpPr/>
+        <p:nvPr/>
+      </p:nvGrpSpPr>
+      <p:grpSpPr>
+        <a:xfrm>
+          <a:off x="0" y="0"/>
+          <a:ext cx="0" cy="0"/>
+          <a:chOff x="0" y="0"/>
+          <a:chExt cx="0" cy="0"/>
+        </a:xfrm>
+      </p:grpSpPr>
+      <p:sp>
+        <p:nvSpPr>
+          <p:cNvPr id="2" name="Titre 1">
+            <a:extLst>
+              <a:ext uri="{FF2B5EF4-FFF2-40B4-BE49-F238E27FC236}">
+                <a16:creationId xmlns:a16="http://schemas.microsoft.com/office/drawing/2014/main" id="{8F632967-CAE6-E6EE-17DA-3304CBCA71B7}"/>
+              </a:ext>
+            </a:extLst>
+          </p:cNvPr>
+          <p:cNvSpPr>
+            <a:spLocks noGrp="1"/>
+          </p:cNvSpPr>
+          <p:nvPr>
+            <p:ph type="title"/>
+          </p:nvPr>
+        </p:nvSpPr>
+        <p:spPr>
+          <a:xfrm>
+            <a:off x="581192" y="3179137"/>
+            <a:ext cx="11029616" cy="1013800"/>
+          </a:xfrm>
+        </p:spPr>
+        <p:txBody>
+          <a:bodyPr>
+            <a:normAutofit/>
+          </a:bodyPr>
+          <a:lstStyle/>
+          <a:p>
+            <a:pPr algn="ctr"/>
+            <a:r>
+              <a:rPr lang="fr-FR" sz="6000" dirty="0">
+                <a:solidFill>
+                  <a:schemeClr val="tx1"/>
+                </a:solidFill>
+              </a:rPr>
+              <a:t>Préparation des données</a:t>
+            </a:r>
+          </a:p>
+        </p:txBody>
+      </p:sp>
+    </p:spTree>
+    <p:extLst>
+      <p:ext uri="{BB962C8B-B14F-4D97-AF65-F5344CB8AC3E}">
+        <p14:creationId xmlns:p14="http://schemas.microsoft.com/office/powerpoint/2010/main" val="1960994266"/>
       </p:ext>
     </p:extLst>
   </p:cSld>

--- a/Presentation.pptx
+++ b/Presentation.pptx
@@ -3829,7 +3829,7 @@
           <a:p>
             <a:r>
               <a:rPr lang="fr-FR" b="1" dirty="0"/>
-              <a:t>Seuil retenu : 0.551</a:t>
+              <a:t>Seuil retenu : 0.596</a:t>
             </a:r>
           </a:p>
           <a:p>
@@ -3848,50 +3848,6 @@
           </a:p>
           <a:p>
             <a:endParaRPr lang="fr-FR" dirty="0"/>
-          </a:p>
-          <a:p>
-            <a:r>
-              <a:rPr lang="fr-FR" b="1" dirty="0"/>
-              <a:t>Interprétation</a:t>
-            </a:r>
-          </a:p>
-          <a:p>
-            <a:r>
-              <a:rPr lang="fr-FR" b="1" dirty="0"/>
-              <a:t> 70 % des départs réels sont détectés</a:t>
-            </a:r>
-            <a:endParaRPr lang="fr-FR" dirty="0"/>
-          </a:p>
-          <a:p>
-            <a:r>
-              <a:rPr lang="fr-FR" dirty="0"/>
-              <a:t> </a:t>
-            </a:r>
-            <a:r>
-              <a:rPr lang="fr-FR" b="1" dirty="0"/>
-              <a:t>47 % des alertes sont correctes</a:t>
-            </a:r>
-            <a:r>
-              <a:rPr lang="fr-FR" dirty="0"/>
-              <a:t> (1 alerte sur 2 est un faux positif)</a:t>
-            </a:r>
-          </a:p>
-          <a:p>
-            <a:r>
-              <a:rPr lang="fr-FR" dirty="0"/>
-              <a:t> </a:t>
-            </a:r>
-            <a:r>
-              <a:rPr lang="fr-FR" b="1" dirty="0"/>
-              <a:t>F1 = 0.56</a:t>
-            </a:r>
-            <a:r>
-              <a:rPr lang="fr-FR" dirty="0"/>
-              <a:t> → bon compromis global pour un problème déséquilibré</a:t>
-            </a:r>
-          </a:p>
-          <a:p>
-            <a:endParaRPr lang="fr-FR" b="1" dirty="0"/>
           </a:p>
           <a:p>
             <a:r>
@@ -14714,9 +14670,9 @@
         <p:grpSpPr>
           <a:xfrm>
             <a:off x="570053" y="1046054"/>
-            <a:ext cx="9983164" cy="376128"/>
+            <a:ext cx="9983164" cy="1708160"/>
             <a:chOff x="570053" y="1046054"/>
-            <a:chExt cx="9983164" cy="376128"/>
+            <a:chExt cx="9983164" cy="1708160"/>
           </a:xfrm>
         </p:grpSpPr>
         <p:sp>
@@ -14734,7 +14690,7 @@
           <p:spPr>
             <a:xfrm>
               <a:off x="4459147" y="1046054"/>
-              <a:ext cx="6094070" cy="369332"/>
+              <a:ext cx="6094070" cy="1708160"/>
             </a:xfrm>
             <a:prstGeom prst="rect">
               <a:avLst/>
@@ -14767,6 +14723,40 @@
               <a:r>
                 <a:rPr lang="fr-FR" dirty="0"/>
                 <a:t>Ne joue quasiment aucun rôle dans le départ (:= 3 ou 4)</a:t>
+              </a:r>
+            </a:p>
+            <a:p>
+              <a:pPr algn="just"/>
+              <a:endParaRPr lang="fr-FR" dirty="0"/>
+            </a:p>
+            <a:p>
+              <a:pPr algn="just"/>
+              <a:r>
+                <a:rPr lang="fr-FR" dirty="0">
+                  <a:solidFill>
+                    <a:srgbClr val="FF0000"/>
+                  </a:solidFill>
+                </a:rPr>
+                <a:t>Risque de data-</a:t>
+              </a:r>
+              <a:r>
+                <a:rPr lang="fr-FR" dirty="0" err="1">
+                  <a:solidFill>
+                    <a:srgbClr val="FF0000"/>
+                  </a:solidFill>
+                </a:rPr>
+                <a:t>leakage</a:t>
+              </a:r>
+              <a:r>
+                <a:rPr lang="fr-FR" dirty="0"/>
+                <a:t>: l’information est potentiellement collectée après la décision du salarié de quitter l’entreprise.</a:t>
+              </a:r>
+            </a:p>
+            <a:p>
+              <a:pPr algn="just"/>
+              <a:r>
+                <a:rPr lang="fr-FR" dirty="0"/>
+                <a:t>Dans ce cas, elle introduit une fuite temporelle.</a:t>
               </a:r>
             </a:p>
           </p:txBody>
@@ -16410,7 +16400,7 @@
               <a:t>Recherche du seuil optimal (</a:t>
             </a:r>
             <a:r>
-              <a:rPr lang="fr-FR" sz="3600" kern="1200" noProof="0">
+              <a:rPr lang="fr-FR" sz="3600" kern="1200" noProof="0" dirty="0" err="1">
                 <a:ln w="0"/>
                 <a:solidFill>
                   <a:schemeClr val="accent1"/>
@@ -16424,22 +16414,25 @@
                 </a:effectLst>
                 <a:latin typeface="Aptos" panose="020B0004020202020204" pitchFamily="34" charset="0"/>
               </a:rPr>
-              <a:t>Recall)</a:t>
-            </a:r>
-            <a:endParaRPr lang="fr-FR" sz="3600" kern="1200" noProof="0" dirty="0">
-              <a:ln w="0"/>
-              <a:solidFill>
-                <a:schemeClr val="accent1"/>
-              </a:solidFill>
-              <a:effectLst>
-                <a:outerShdw blurRad="38100" dist="25400" dir="5400000" algn="ctr" rotWithShape="0">
-                  <a:srgbClr val="6E747A">
-                    <a:alpha val="43000"/>
-                  </a:srgbClr>
-                </a:outerShdw>
-              </a:effectLst>
-              <a:latin typeface="Aptos" panose="020B0004020202020204" pitchFamily="34" charset="0"/>
-            </a:endParaRPr>
+              <a:t>Recall</a:t>
+            </a:r>
+            <a:r>
+              <a:rPr lang="fr-FR" sz="3600" kern="1200" noProof="0" dirty="0">
+                <a:ln w="0"/>
+                <a:solidFill>
+                  <a:schemeClr val="accent1"/>
+                </a:solidFill>
+                <a:effectLst>
+                  <a:outerShdw blurRad="38100" dist="25400" dir="5400000" algn="ctr" rotWithShape="0">
+                    <a:srgbClr val="6E747A">
+                      <a:alpha val="43000"/>
+                    </a:srgbClr>
+                  </a:outerShdw>
+                </a:effectLst>
+                <a:latin typeface="Aptos" panose="020B0004020202020204" pitchFamily="34" charset="0"/>
+              </a:rPr>
+              <a:t>)</a:t>
+            </a:r>
           </a:p>
         </p:txBody>
       </p:sp>
@@ -17554,201 +17547,12 @@
           <a:chExt cx="0" cy="0"/>
         </a:xfrm>
       </p:grpSpPr>
-      <p:sp>
-        <p:nvSpPr>
-          <p:cNvPr id="2" name="Titre 1">
-            <a:extLst>
-              <a:ext uri="{FF2B5EF4-FFF2-40B4-BE49-F238E27FC236}">
-                <a16:creationId xmlns:a16="http://schemas.microsoft.com/office/drawing/2014/main" id="{FCFEA3B2-BE54-52C0-6847-FCA5F6024479}"/>
-              </a:ext>
-            </a:extLst>
-          </p:cNvPr>
-          <p:cNvSpPr>
-            <a:spLocks noGrp="1"/>
-          </p:cNvSpPr>
-          <p:nvPr>
-            <p:ph type="title"/>
-          </p:nvPr>
-        </p:nvSpPr>
-        <p:spPr/>
-        <p:txBody>
-          <a:bodyPr/>
-          <a:lstStyle/>
-          <a:p>
-            <a:r>
-              <a:rPr lang="fr-FR" b="1" dirty="0"/>
-              <a:t>La courbe Précision-Rappel</a:t>
-            </a:r>
-            <a:br>
-              <a:rPr lang="fr-FR" b="1" dirty="0"/>
-            </a:br>
-            <a:r>
-              <a:rPr lang="fr-FR" sz="1600" b="1" dirty="0"/>
-              <a:t>La courbe Précision-Rappel pour choisir le seuil</a:t>
-            </a:r>
-            <a:endParaRPr lang="fr-FR" dirty="0"/>
-          </a:p>
-        </p:txBody>
-      </p:sp>
-      <p:sp>
-        <p:nvSpPr>
-          <p:cNvPr id="22" name="ZoneTexte 21">
-            <a:extLst>
-              <a:ext uri="{FF2B5EF4-FFF2-40B4-BE49-F238E27FC236}">
-                <a16:creationId xmlns:a16="http://schemas.microsoft.com/office/drawing/2014/main" id="{AE6DC2BF-F3C2-29BD-BD7A-94120B4D0DC8}"/>
-              </a:ext>
-            </a:extLst>
-          </p:cNvPr>
-          <p:cNvSpPr txBox="1"/>
-          <p:nvPr/>
-        </p:nvSpPr>
-        <p:spPr>
-          <a:xfrm>
-            <a:off x="515185" y="5255689"/>
-            <a:ext cx="11161629" cy="1200329"/>
-          </a:xfrm>
-          <a:prstGeom prst="rect">
-            <a:avLst/>
-          </a:prstGeom>
-          <a:noFill/>
-        </p:spPr>
-        <p:txBody>
-          <a:bodyPr wrap="square">
-            <a:spAutoFit/>
-          </a:bodyPr>
-          <a:lstStyle/>
-          <a:p>
-            <a:pPr marL="285750" indent="-285750">
-              <a:buFont typeface="Arial" panose="020B0604020202020204" pitchFamily="34" charset="0"/>
-              <a:buChar char="•"/>
-            </a:pPr>
-            <a:r>
-              <a:rPr lang="fr-FR" sz="2400" b="1" dirty="0">
-                <a:latin typeface="Aptos" panose="020B0004020202020204" pitchFamily="34" charset="0"/>
-              </a:rPr>
-              <a:t>Rappel      = 70 % des départs réels sont détectés</a:t>
-            </a:r>
-          </a:p>
-          <a:p>
-            <a:pPr marL="285750" indent="-285750">
-              <a:buFont typeface="Arial" panose="020B0604020202020204" pitchFamily="34" charset="0"/>
-              <a:buChar char="•"/>
-            </a:pPr>
-            <a:r>
-              <a:rPr lang="fr-FR" sz="2400" b="1" dirty="0">
-                <a:latin typeface="Aptos" panose="020B0004020202020204" pitchFamily="34" charset="0"/>
-              </a:rPr>
-              <a:t>Précision = 47 % des alertes sont correctes</a:t>
-            </a:r>
-            <a:r>
-              <a:rPr lang="fr-FR" sz="2400" dirty="0">
-                <a:latin typeface="Aptos" panose="020B0004020202020204" pitchFamily="34" charset="0"/>
-              </a:rPr>
-              <a:t> (1 alerte sur 2 est un faux positif)</a:t>
-            </a:r>
-          </a:p>
-          <a:p>
-            <a:pPr marL="285750" indent="-285750">
-              <a:buFont typeface="Arial" panose="020B0604020202020204" pitchFamily="34" charset="0"/>
-              <a:buChar char="•"/>
-            </a:pPr>
-            <a:r>
-              <a:rPr lang="fr-FR" sz="2400" b="1" dirty="0">
-                <a:latin typeface="Aptos" panose="020B0004020202020204" pitchFamily="34" charset="0"/>
-              </a:rPr>
-              <a:t>F1-Score  = 0.56</a:t>
-            </a:r>
-            <a:r>
-              <a:rPr lang="fr-FR" sz="2400" dirty="0">
-                <a:latin typeface="Aptos" panose="020B0004020202020204" pitchFamily="34" charset="0"/>
-              </a:rPr>
-              <a:t> → bon compromis global pour un problème déséquilibré</a:t>
-            </a:r>
-          </a:p>
-        </p:txBody>
-      </p:sp>
-      <p:sp>
-        <p:nvSpPr>
-          <p:cNvPr id="23" name="ZoneTexte 22">
-            <a:extLst>
-              <a:ext uri="{FF2B5EF4-FFF2-40B4-BE49-F238E27FC236}">
-                <a16:creationId xmlns:a16="http://schemas.microsoft.com/office/drawing/2014/main" id="{8E183EA0-0E17-BEF6-8DBC-B1D027A117AF}"/>
-              </a:ext>
-            </a:extLst>
-          </p:cNvPr>
-          <p:cNvSpPr txBox="1"/>
-          <p:nvPr/>
-        </p:nvSpPr>
-        <p:spPr>
-          <a:xfrm>
-            <a:off x="419270" y="2685190"/>
-            <a:ext cx="4507831" cy="1692771"/>
-          </a:xfrm>
-          <a:prstGeom prst="rect">
-            <a:avLst/>
-          </a:prstGeom>
-          <a:noFill/>
-        </p:spPr>
-        <p:txBody>
-          <a:bodyPr wrap="square">
-            <a:spAutoFit/>
-          </a:bodyPr>
-          <a:lstStyle/>
-          <a:p>
-            <a:r>
-              <a:rPr lang="fr-FR" sz="3200" b="1" u="sng" dirty="0">
-                <a:solidFill>
-                  <a:srgbClr val="FF0000"/>
-                </a:solidFill>
-                <a:latin typeface="Aptos" panose="020B0004020202020204" pitchFamily="34" charset="0"/>
-              </a:rPr>
-              <a:t>Objectif :</a:t>
-            </a:r>
-          </a:p>
-          <a:p>
-            <a:pPr lvl="1"/>
-            <a:r>
-              <a:rPr lang="fr-FR" sz="3200" b="1" dirty="0">
-                <a:solidFill>
-                  <a:srgbClr val="FF0000"/>
-                </a:solidFill>
-                <a:latin typeface="Aptos" panose="020B0004020202020204" pitchFamily="34" charset="0"/>
-              </a:rPr>
-              <a:t>Détecter au moins </a:t>
-            </a:r>
-            <a:r>
-              <a:rPr lang="fr-FR" sz="4000" b="1" dirty="0">
-                <a:solidFill>
-                  <a:srgbClr val="FF0000"/>
-                </a:solidFill>
-                <a:latin typeface="Aptos" panose="020B0004020202020204" pitchFamily="34" charset="0"/>
-              </a:rPr>
-              <a:t>68%</a:t>
-            </a:r>
-            <a:r>
-              <a:rPr lang="fr-FR" sz="3200" b="1" dirty="0">
-                <a:solidFill>
-                  <a:srgbClr val="FF0000"/>
-                </a:solidFill>
-                <a:latin typeface="Aptos" panose="020B0004020202020204" pitchFamily="34" charset="0"/>
-              </a:rPr>
-              <a:t> des départs</a:t>
-            </a:r>
-            <a:endParaRPr lang="fr-FR" sz="3200" dirty="0">
-              <a:solidFill>
-                <a:srgbClr val="FF0000"/>
-              </a:solidFill>
-              <a:latin typeface="Aptos" panose="020B0004020202020204" pitchFamily="34" charset="0"/>
-            </a:endParaRPr>
-          </a:p>
-        </p:txBody>
-      </p:sp>
       <p:pic>
         <p:nvPicPr>
-          <p:cNvPr id="25" name="Image 24">
-            <a:extLst>
-              <a:ext uri="{FF2B5EF4-FFF2-40B4-BE49-F238E27FC236}">
-                <a16:creationId xmlns:a16="http://schemas.microsoft.com/office/drawing/2014/main" id="{389A54AB-07AD-7AAD-BAF7-030939333621}"/>
+          <p:cNvPr id="4" name="Image 3">
+            <a:extLst>
+              <a:ext uri="{FF2B5EF4-FFF2-40B4-BE49-F238E27FC236}">
+                <a16:creationId xmlns:a16="http://schemas.microsoft.com/office/drawing/2014/main" id="{B758F12A-C197-E267-6FED-A1152E66D549}"/>
               </a:ext>
             </a:extLst>
           </p:cNvPr>
@@ -17766,13 +17570,202 @@
         <p:spPr>
           <a:xfrm>
             <a:off x="5618747" y="1956561"/>
-            <a:ext cx="5678906" cy="3299128"/>
+            <a:ext cx="5705042" cy="3299128"/>
           </a:xfrm>
           <a:prstGeom prst="rect">
             <a:avLst/>
           </a:prstGeom>
         </p:spPr>
       </p:pic>
+      <p:sp>
+        <p:nvSpPr>
+          <p:cNvPr id="2" name="Titre 1">
+            <a:extLst>
+              <a:ext uri="{FF2B5EF4-FFF2-40B4-BE49-F238E27FC236}">
+                <a16:creationId xmlns:a16="http://schemas.microsoft.com/office/drawing/2014/main" id="{FCFEA3B2-BE54-52C0-6847-FCA5F6024479}"/>
+              </a:ext>
+            </a:extLst>
+          </p:cNvPr>
+          <p:cNvSpPr>
+            <a:spLocks noGrp="1"/>
+          </p:cNvSpPr>
+          <p:nvPr>
+            <p:ph type="title"/>
+          </p:nvPr>
+        </p:nvSpPr>
+        <p:spPr/>
+        <p:txBody>
+          <a:bodyPr/>
+          <a:lstStyle/>
+          <a:p>
+            <a:r>
+              <a:rPr lang="fr-FR" b="1" dirty="0"/>
+              <a:t>La courbe Précision-Rappel</a:t>
+            </a:r>
+            <a:br>
+              <a:rPr lang="fr-FR" b="1" dirty="0"/>
+            </a:br>
+            <a:r>
+              <a:rPr lang="fr-FR" sz="1600" b="1" dirty="0"/>
+              <a:t>La courbe Précision-Rappel pour choisir le seuil</a:t>
+            </a:r>
+            <a:endParaRPr lang="fr-FR" dirty="0"/>
+          </a:p>
+        </p:txBody>
+      </p:sp>
+      <p:sp>
+        <p:nvSpPr>
+          <p:cNvPr id="22" name="ZoneTexte 21">
+            <a:extLst>
+              <a:ext uri="{FF2B5EF4-FFF2-40B4-BE49-F238E27FC236}">
+                <a16:creationId xmlns:a16="http://schemas.microsoft.com/office/drawing/2014/main" id="{AE6DC2BF-F3C2-29BD-BD7A-94120B4D0DC8}"/>
+              </a:ext>
+            </a:extLst>
+          </p:cNvPr>
+          <p:cNvSpPr txBox="1"/>
+          <p:nvPr/>
+        </p:nvSpPr>
+        <p:spPr>
+          <a:xfrm>
+            <a:off x="515185" y="5255689"/>
+            <a:ext cx="11161629" cy="1200329"/>
+          </a:xfrm>
+          <a:prstGeom prst="rect">
+            <a:avLst/>
+          </a:prstGeom>
+          <a:noFill/>
+        </p:spPr>
+        <p:txBody>
+          <a:bodyPr wrap="square">
+            <a:spAutoFit/>
+          </a:bodyPr>
+          <a:lstStyle/>
+          <a:p>
+            <a:pPr marL="285750" indent="-285750">
+              <a:buFont typeface="Arial" panose="020B0604020202020204" pitchFamily="34" charset="0"/>
+              <a:buChar char="•"/>
+            </a:pPr>
+            <a:r>
+              <a:rPr lang="fr-FR" sz="2400" b="1" dirty="0">
+                <a:latin typeface="Aptos" panose="020B0004020202020204" pitchFamily="34" charset="0"/>
+              </a:rPr>
+              <a:t>Rappel      = 68 % des départs réels sont détectés</a:t>
+            </a:r>
+          </a:p>
+          <a:p>
+            <a:pPr marL="285750" indent="-285750">
+              <a:buFont typeface="Arial" panose="020B0604020202020204" pitchFamily="34" charset="0"/>
+              <a:buChar char="•"/>
+            </a:pPr>
+            <a:r>
+              <a:rPr lang="fr-FR" sz="2400" b="1" dirty="0">
+                <a:latin typeface="Aptos" panose="020B0004020202020204" pitchFamily="34" charset="0"/>
+              </a:rPr>
+              <a:t>Précision = 57 % des alertes sont correctes</a:t>
+            </a:r>
+            <a:r>
+              <a:rPr lang="fr-FR" sz="2400" dirty="0">
+                <a:latin typeface="Aptos" panose="020B0004020202020204" pitchFamily="34" charset="0"/>
+              </a:rPr>
+              <a:t> (1 alerte sur 2 est un faux positif)</a:t>
+            </a:r>
+          </a:p>
+          <a:p>
+            <a:pPr marL="285750" indent="-285750">
+              <a:buFont typeface="Arial" panose="020B0604020202020204" pitchFamily="34" charset="0"/>
+              <a:buChar char="•"/>
+            </a:pPr>
+            <a:r>
+              <a:rPr lang="fr-FR" sz="2400" b="1" dirty="0">
+                <a:latin typeface="Aptos" panose="020B0004020202020204" pitchFamily="34" charset="0"/>
+              </a:rPr>
+              <a:t>F1-Score  = 0.62</a:t>
+            </a:r>
+            <a:r>
+              <a:rPr lang="fr-FR" sz="2400" dirty="0">
+                <a:latin typeface="Aptos" panose="020B0004020202020204" pitchFamily="34" charset="0"/>
+              </a:rPr>
+              <a:t> → bon compromis global pour un problème déséquilibré</a:t>
+            </a:r>
+          </a:p>
+        </p:txBody>
+      </p:sp>
+      <p:sp>
+        <p:nvSpPr>
+          <p:cNvPr id="23" name="ZoneTexte 22">
+            <a:extLst>
+              <a:ext uri="{FF2B5EF4-FFF2-40B4-BE49-F238E27FC236}">
+                <a16:creationId xmlns:a16="http://schemas.microsoft.com/office/drawing/2014/main" id="{8E183EA0-0E17-BEF6-8DBC-B1D027A117AF}"/>
+              </a:ext>
+            </a:extLst>
+          </p:cNvPr>
+          <p:cNvSpPr txBox="1"/>
+          <p:nvPr/>
+        </p:nvSpPr>
+        <p:spPr>
+          <a:xfrm>
+            <a:off x="419270" y="2685190"/>
+            <a:ext cx="4507831" cy="1692771"/>
+          </a:xfrm>
+          <a:prstGeom prst="rect">
+            <a:avLst/>
+          </a:prstGeom>
+          <a:noFill/>
+        </p:spPr>
+        <p:txBody>
+          <a:bodyPr wrap="square">
+            <a:spAutoFit/>
+          </a:bodyPr>
+          <a:lstStyle/>
+          <a:p>
+            <a:r>
+              <a:rPr lang="fr-FR" sz="3200" b="1" u="sng" dirty="0">
+                <a:solidFill>
+                  <a:srgbClr val="FF0000"/>
+                </a:solidFill>
+                <a:latin typeface="Aptos" panose="020B0004020202020204" pitchFamily="34" charset="0"/>
+              </a:rPr>
+              <a:t>Objectif :</a:t>
+            </a:r>
+          </a:p>
+          <a:p>
+            <a:pPr lvl="1"/>
+            <a:r>
+              <a:rPr lang="fr-FR" sz="3200" b="1" dirty="0">
+                <a:solidFill>
+                  <a:srgbClr val="FF0000"/>
+                </a:solidFill>
+                <a:latin typeface="Aptos" panose="020B0004020202020204" pitchFamily="34" charset="0"/>
+              </a:rPr>
+              <a:t>Détecter au moins </a:t>
+            </a:r>
+            <a:r>
+              <a:rPr lang="fr-FR" sz="4000" b="1" dirty="0">
+                <a:solidFill>
+                  <a:srgbClr val="FF0000"/>
+                </a:solidFill>
+                <a:latin typeface="Aptos" panose="020B0004020202020204" pitchFamily="34" charset="0"/>
+              </a:rPr>
+              <a:t>68%</a:t>
+            </a:r>
+            <a:r>
+              <a:rPr lang="fr-FR" sz="3200" b="1" dirty="0">
+                <a:solidFill>
+                  <a:srgbClr val="FF0000"/>
+                </a:solidFill>
+                <a:latin typeface="Aptos" panose="020B0004020202020204" pitchFamily="34" charset="0"/>
+              </a:rPr>
+              <a:t> des départs</a:t>
+            </a:r>
+            <a:endParaRPr lang="fr-FR" sz="3200" dirty="0">
+              <a:solidFill>
+                <a:srgbClr val="FF0000"/>
+              </a:solidFill>
+              <a:latin typeface="Aptos" panose="020B0004020202020204" pitchFamily="34" charset="0"/>
+            </a:endParaRPr>
+          </a:p>
+        </p:txBody>
+      </p:sp>
     </p:spTree>
     <p:extLst>
       <p:ext uri="{BB962C8B-B14F-4D97-AF65-F5344CB8AC3E}">
